--- a/docs/review/Learnova_Review.pptx
+++ b/docs/review/Learnova_Review.pptx
@@ -11244,7 +11244,7 @@
                 </a:solidFill>
                 <a:latin typeface="Calibri"/>
               </a:rPr>
-              <a:t>Six layers, each replaceable; every AI step has an offline fallback</a:t>
+              <a:t>Input → processing workflow → output; every AI step has an offline fallback</a:t>
             </a:r>
           </a:p>
         </p:txBody>
@@ -11480,12 +11480,97 @@
         </p:nvSpPr>
         <p:spPr>
           <a:xfrm>
-            <a:off x="274320" y="914400"/>
-            <a:ext cx="8001000" cy="1024128"/>
+            <a:off x="274320" y="896112"/>
+            <a:ext cx="8183879" cy="292608"/>
           </a:xfrm>
           <a:prstGeom prst="roundRect">
             <a:avLst>
-              <a:gd name="adj" fmla="val 6000"/>
+              <a:gd name="adj" fmla="val 40000"/>
+            </a:avLst>
+          </a:prstGeom>
+          <a:solidFill>
+            <a:srgbClr val="16845B"/>
+          </a:solidFill>
+          <a:ln>
+            <a:noFill/>
+          </a:ln>
+          <a:effectLst/>
+        </p:spPr>
+        <p:style>
+          <a:lnRef idx="1">
+            <a:schemeClr val="accent1"/>
+          </a:lnRef>
+          <a:fillRef idx="3">
+            <a:schemeClr val="accent1"/>
+          </a:fillRef>
+          <a:effectRef idx="2">
+            <a:schemeClr val="accent1"/>
+          </a:effectRef>
+          <a:fontRef idx="minor">
+            <a:schemeClr val="lt1"/>
+          </a:fontRef>
+        </p:style>
+        <p:txBody>
+          <a:bodyPr rtlCol="0" anchor="ctr"/>
+          <a:lstStyle/>
+          <a:p>
+            <a:pPr algn="ctr"/>
+          </a:p>
+        </p:txBody>
+      </p:sp>
+      <p:sp>
+        <p:nvSpPr>
+          <p:cNvPr id="11" name="TextBox 10"/>
+          <p:cNvSpPr txBox="1"/>
+          <p:nvPr/>
+        </p:nvSpPr>
+        <p:spPr>
+          <a:xfrm>
+            <a:off x="274320" y="896112"/>
+            <a:ext cx="8183879" cy="292608"/>
+          </a:xfrm>
+          <a:prstGeom prst="rect">
+            <a:avLst/>
+          </a:prstGeom>
+          <a:noFill/>
+        </p:spPr>
+        <p:txBody>
+          <a:bodyPr wrap="square" anchor="ctr" lIns="36576" rIns="36576" tIns="18288" bIns="18288">
+            <a:spAutoFit/>
+          </a:bodyPr>
+          <a:lstStyle/>
+          <a:p>
+            <a:pPr algn="ctr">
+              <a:spcAft>
+                <a:spcPts val="300"/>
+              </a:spcAft>
+            </a:pPr>
+            <a:r>
+              <a:rPr sz="1200" b="1" i="0">
+                <a:solidFill>
+                  <a:srgbClr val="FFFFFF"/>
+                </a:solidFill>
+                <a:latin typeface="Calibri"/>
+              </a:rPr>
+              <a:t>System architecture and data flow</a:t>
+            </a:r>
+          </a:p>
+        </p:txBody>
+      </p:sp>
+      <p:sp>
+        <p:nvSpPr>
+          <p:cNvPr id="12" name="Rounded Rectangle 11"/>
+          <p:cNvSpPr/>
+          <p:nvPr/>
+        </p:nvSpPr>
+        <p:spPr>
+          <a:xfrm>
+            <a:off x="274320" y="1261872"/>
+            <a:ext cx="1481328" cy="3904487"/>
+          </a:xfrm>
+          <a:prstGeom prst="roundRect">
+            <a:avLst>
+              <a:gd name="adj" fmla="val 5000"/>
             </a:avLst>
           </a:prstGeom>
           <a:solidFill>
@@ -11522,14 +11607,60 @@
       </p:sp>
       <p:sp>
         <p:nvSpPr>
-          <p:cNvPr id="11" name="TextBox 10"/>
+          <p:cNvPr id="13" name="Rounded Rectangle 12"/>
+          <p:cNvSpPr/>
+          <p:nvPr/>
+        </p:nvSpPr>
+        <p:spPr>
+          <a:xfrm>
+            <a:off x="384048" y="1207008"/>
+            <a:ext cx="1261872" cy="219456"/>
+          </a:xfrm>
+          <a:prstGeom prst="roundRect">
+            <a:avLst>
+              <a:gd name="adj" fmla="val 50000"/>
+            </a:avLst>
+          </a:prstGeom>
+          <a:solidFill>
+            <a:srgbClr val="1F5FBF"/>
+          </a:solidFill>
+          <a:ln>
+            <a:noFill/>
+          </a:ln>
+          <a:effectLst/>
+        </p:spPr>
+        <p:style>
+          <a:lnRef idx="1">
+            <a:schemeClr val="accent1"/>
+          </a:lnRef>
+          <a:fillRef idx="3">
+            <a:schemeClr val="accent1"/>
+          </a:fillRef>
+          <a:effectRef idx="2">
+            <a:schemeClr val="accent1"/>
+          </a:effectRef>
+          <a:fontRef idx="minor">
+            <a:schemeClr val="lt1"/>
+          </a:fontRef>
+        </p:style>
+        <p:txBody>
+          <a:bodyPr rtlCol="0" anchor="ctr"/>
+          <a:lstStyle/>
+          <a:p>
+            <a:pPr algn="ctr"/>
+          </a:p>
+        </p:txBody>
+      </p:sp>
+      <p:sp>
+        <p:nvSpPr>
+          <p:cNvPr id="14" name="TextBox 13"/>
           <p:cNvSpPr txBox="1"/>
           <p:nvPr/>
         </p:nvSpPr>
         <p:spPr>
           <a:xfrm>
-            <a:off x="365760" y="932688"/>
-            <a:ext cx="3657600" cy="256032"/>
+            <a:off x="384048" y="1207008"/>
+            <a:ext cx="1261872" cy="219456"/>
           </a:xfrm>
           <a:prstGeom prst="rect">
             <a:avLst/>
@@ -11537,38 +11668,38 @@
           <a:noFill/>
         </p:spPr>
         <p:txBody>
-          <a:bodyPr wrap="square" anchor="t" lIns="36576" rIns="36576" tIns="18288" bIns="18288">
+          <a:bodyPr wrap="square" anchor="ctr" lIns="36576" rIns="36576" tIns="18288" bIns="18288">
             <a:spAutoFit/>
           </a:bodyPr>
           <a:lstStyle/>
           <a:p>
-            <a:pPr algn="l">
+            <a:pPr algn="ctr">
               <a:spcAft>
                 <a:spcPts val="300"/>
               </a:spcAft>
             </a:pPr>
             <a:r>
-              <a:rPr sz="1100" b="1" i="0">
-                <a:solidFill>
-                  <a:srgbClr val="1F5FBF"/>
-                </a:solidFill>
-                <a:latin typeface="Montserrat"/>
-              </a:rPr>
-              <a:t>1  User &amp; client layer</a:t>
-            </a:r>
-          </a:p>
-        </p:txBody>
-      </p:sp>
-      <p:sp>
-        <p:nvSpPr>
-          <p:cNvPr id="12" name="Rounded Rectangle 11"/>
+              <a:rPr sz="900" b="1" i="0">
+                <a:solidFill>
+                  <a:srgbClr val="FFFFFF"/>
+                </a:solidFill>
+                <a:latin typeface="Calibri"/>
+              </a:rPr>
+              <a:t>INPUT</a:t>
+            </a:r>
+          </a:p>
+        </p:txBody>
+      </p:sp>
+      <p:sp>
+        <p:nvSpPr>
+          <p:cNvPr id="15" name="Rounded Rectangle 14"/>
           <p:cNvSpPr/>
           <p:nvPr/>
         </p:nvSpPr>
         <p:spPr>
           <a:xfrm>
-            <a:off x="384048" y="1207008"/>
-            <a:ext cx="1481328" cy="658368"/>
+            <a:off x="338328" y="1499616"/>
+            <a:ext cx="1353312" cy="658368"/>
           </a:xfrm>
           <a:prstGeom prst="roundRect">
             <a:avLst>
@@ -11609,14 +11740,14 @@
       </p:sp>
       <p:sp>
         <p:nvSpPr>
-          <p:cNvPr id="13" name="Oval 12"/>
+          <p:cNvPr id="16" name="Oval 15"/>
           <p:cNvSpPr/>
           <p:nvPr/>
         </p:nvSpPr>
         <p:spPr>
           <a:xfrm>
-            <a:off x="438912" y="1325880"/>
-            <a:ext cx="420624" cy="420624"/>
+            <a:off x="374904" y="1554480"/>
+            <a:ext cx="292608" cy="292608"/>
           </a:xfrm>
           <a:prstGeom prst="ellipse">
             <a:avLst/>
@@ -11653,7 +11784,7 @@
       </p:sp>
       <p:pic>
         <p:nvPicPr>
-          <p:cNvPr id="14" name="Picture 13" descr="image.png"/>
+          <p:cNvPr id="17" name="Picture 16" descr="image.png"/>
           <p:cNvPicPr>
             <a:picLocks noChangeAspect="1"/>
           </p:cNvPicPr>
@@ -11667,8 +11798,8 @@
         </p:blipFill>
         <p:spPr>
           <a:xfrm>
-            <a:off x="523036" y="1410004"/>
-            <a:ext cx="252374" cy="252374"/>
+            <a:off x="433425" y="1613001"/>
+            <a:ext cx="175564" cy="175564"/>
           </a:xfrm>
           <a:prstGeom prst="rect">
             <a:avLst/>
@@ -11677,14 +11808,14 @@
       </p:pic>
       <p:sp>
         <p:nvSpPr>
-          <p:cNvPr id="15" name="TextBox 14"/>
+          <p:cNvPr id="18" name="TextBox 17"/>
           <p:cNvSpPr txBox="1"/>
           <p:nvPr/>
         </p:nvSpPr>
         <p:spPr>
           <a:xfrm>
-            <a:off x="886968" y="1225296"/>
-            <a:ext cx="969264" cy="621792"/>
+            <a:off x="694944" y="1517904"/>
+            <a:ext cx="987552" cy="329184"/>
           </a:xfrm>
           <a:prstGeom prst="rect">
             <a:avLst/>
@@ -11699,47 +11830,70 @@
           <a:p>
             <a:pPr algn="l">
               <a:spcAft>
+                <a:spcPts val="300"/>
+              </a:spcAft>
+            </a:pPr>
+            <a:r>
+              <a:rPr sz="840" b="1" i="0">
+                <a:solidFill>
+                  <a:srgbClr val="172131"/>
+                </a:solidFill>
+                <a:latin typeface="Calibri"/>
+              </a:rPr>
+              <a:t>PowerPoint (.pptx)</a:t>
+            </a:r>
+          </a:p>
+        </p:txBody>
+      </p:sp>
+      <p:sp>
+        <p:nvSpPr>
+          <p:cNvPr id="19" name="TextBox 18"/>
+          <p:cNvSpPr txBox="1"/>
+          <p:nvPr/>
+        </p:nvSpPr>
+        <p:spPr>
+          <a:xfrm>
+            <a:off x="365760" y="1847088"/>
+            <a:ext cx="1298448" cy="301752"/>
+          </a:xfrm>
+          <a:prstGeom prst="rect">
+            <a:avLst/>
+          </a:prstGeom>
+          <a:noFill/>
+        </p:spPr>
+        <p:txBody>
+          <a:bodyPr wrap="square" anchor="t" lIns="36576" rIns="36576" tIns="18288" bIns="18288">
+            <a:spAutoFit/>
+          </a:bodyPr>
+          <a:lstStyle/>
+          <a:p>
+            <a:pPr algn="l">
+              <a:spcAft>
                 <a:spcPts val="0"/>
               </a:spcAft>
             </a:pPr>
             <a:r>
-              <a:rPr sz="950" b="1" i="0">
-                <a:solidFill>
-                  <a:srgbClr val="172131"/>
-                </a:solidFill>
-                <a:latin typeface="Calibri"/>
-              </a:rPr>
-              <a:t>Web app</a:t>
-            </a:r>
-          </a:p>
-          <a:p>
-            <a:pPr algn="l">
-              <a:spcAft>
-                <a:spcPts val="0"/>
-              </a:spcAft>
-            </a:pPr>
-            <a:r>
-              <a:rPr sz="800" b="0" i="0">
+              <a:rPr sz="760" b="0" i="0">
                 <a:solidFill>
                   <a:srgbClr val="555F6D"/>
                 </a:solidFill>
                 <a:latin typeface="Calibri"/>
               </a:rPr>
-              <a:t>React · Vite · Tailwind</a:t>
-            </a:r>
-          </a:p>
-        </p:txBody>
-      </p:sp>
-      <p:sp>
-        <p:nvSpPr>
-          <p:cNvPr id="16" name="Rounded Rectangle 15"/>
+              <a:t>teacher's existing deck</a:t>
+            </a:r>
+          </a:p>
+        </p:txBody>
+      </p:sp>
+      <p:sp>
+        <p:nvSpPr>
+          <p:cNvPr id="20" name="Rounded Rectangle 19"/>
           <p:cNvSpPr/>
           <p:nvPr/>
         </p:nvSpPr>
         <p:spPr>
           <a:xfrm>
-            <a:off x="1956816" y="1207008"/>
-            <a:ext cx="1481328" cy="658368"/>
+            <a:off x="338328" y="2231136"/>
+            <a:ext cx="1353312" cy="658368"/>
           </a:xfrm>
           <a:prstGeom prst="roundRect">
             <a:avLst>
@@ -11780,14 +11934,14 @@
       </p:sp>
       <p:sp>
         <p:nvSpPr>
-          <p:cNvPr id="17" name="Oval 16"/>
+          <p:cNvPr id="21" name="Oval 20"/>
           <p:cNvSpPr/>
           <p:nvPr/>
         </p:nvSpPr>
         <p:spPr>
           <a:xfrm>
-            <a:off x="2011680" y="1325880"/>
-            <a:ext cx="420624" cy="420624"/>
+            <a:off x="374904" y="2286000"/>
+            <a:ext cx="292608" cy="292608"/>
           </a:xfrm>
           <a:prstGeom prst="ellipse">
             <a:avLst/>
@@ -11824,7 +11978,7 @@
       </p:sp>
       <p:pic>
         <p:nvPicPr>
-          <p:cNvPr id="18" name="Picture 17" descr="image.png"/>
+          <p:cNvPr id="22" name="Picture 21" descr="image.png"/>
           <p:cNvPicPr>
             <a:picLocks noChangeAspect="1"/>
           </p:cNvPicPr>
@@ -11838,8 +11992,8 @@
         </p:blipFill>
         <p:spPr>
           <a:xfrm>
-            <a:off x="2095804" y="1410004"/>
-            <a:ext cx="252374" cy="252374"/>
+            <a:off x="433425" y="2344521"/>
+            <a:ext cx="175564" cy="175564"/>
           </a:xfrm>
           <a:prstGeom prst="rect">
             <a:avLst/>
@@ -11848,14 +12002,14 @@
       </p:pic>
       <p:sp>
         <p:nvSpPr>
-          <p:cNvPr id="19" name="TextBox 18"/>
+          <p:cNvPr id="23" name="TextBox 22"/>
           <p:cNvSpPr txBox="1"/>
           <p:nvPr/>
         </p:nvSpPr>
         <p:spPr>
           <a:xfrm>
-            <a:off x="2459736" y="1225296"/>
-            <a:ext cx="969264" cy="621792"/>
+            <a:off x="694944" y="2249424"/>
+            <a:ext cx="987552" cy="329184"/>
           </a:xfrm>
           <a:prstGeom prst="rect">
             <a:avLst/>
@@ -11870,47 +12024,70 @@
           <a:p>
             <a:pPr algn="l">
               <a:spcAft>
+                <a:spcPts val="300"/>
+              </a:spcAft>
+            </a:pPr>
+            <a:r>
+              <a:rPr sz="840" b="1" i="0">
+                <a:solidFill>
+                  <a:srgbClr val="172131"/>
+                </a:solidFill>
+                <a:latin typeface="Calibri"/>
+              </a:rPr>
+              <a:t>Slide PDF</a:t>
+            </a:r>
+          </a:p>
+        </p:txBody>
+      </p:sp>
+      <p:sp>
+        <p:nvSpPr>
+          <p:cNvPr id="24" name="TextBox 23"/>
+          <p:cNvSpPr txBox="1"/>
+          <p:nvPr/>
+        </p:nvSpPr>
+        <p:spPr>
+          <a:xfrm>
+            <a:off x="365760" y="2578608"/>
+            <a:ext cx="1298448" cy="301752"/>
+          </a:xfrm>
+          <a:prstGeom prst="rect">
+            <a:avLst/>
+          </a:prstGeom>
+          <a:noFill/>
+        </p:spPr>
+        <p:txBody>
+          <a:bodyPr wrap="square" anchor="t" lIns="36576" rIns="36576" tIns="18288" bIns="18288">
+            <a:spAutoFit/>
+          </a:bodyPr>
+          <a:lstStyle/>
+          <a:p>
+            <a:pPr algn="l">
+              <a:spcAft>
                 <a:spcPts val="0"/>
               </a:spcAft>
             </a:pPr>
             <a:r>
-              <a:rPr sz="950" b="1" i="0">
-                <a:solidFill>
-                  <a:srgbClr val="172131"/>
-                </a:solidFill>
-                <a:latin typeface="Calibri"/>
-              </a:rPr>
-              <a:t>Web deck</a:t>
-            </a:r>
-          </a:p>
-          <a:p>
-            <a:pPr algn="l">
-              <a:spcAft>
-                <a:spcPts val="0"/>
-              </a:spcAft>
-            </a:pPr>
-            <a:r>
-              <a:rPr sz="800" b="0" i="0">
+              <a:rPr sz="760" b="0" i="0">
                 <a:solidFill>
                   <a:srgbClr val="555F6D"/>
                 </a:solidFill>
                 <a:latin typeface="Calibri"/>
               </a:rPr>
-              <a:t>Reveal.js, click reveals</a:t>
-            </a:r>
-          </a:p>
-        </p:txBody>
-      </p:sp>
-      <p:sp>
-        <p:nvSpPr>
-          <p:cNvPr id="20" name="Rounded Rectangle 19"/>
+              <a:t>exported lecture slides</a:t>
+            </a:r>
+          </a:p>
+        </p:txBody>
+      </p:sp>
+      <p:sp>
+        <p:nvSpPr>
+          <p:cNvPr id="25" name="Rounded Rectangle 24"/>
           <p:cNvSpPr/>
           <p:nvPr/>
         </p:nvSpPr>
         <p:spPr>
           <a:xfrm>
-            <a:off x="3529584" y="1207008"/>
-            <a:ext cx="1481328" cy="658368"/>
+            <a:off x="338328" y="2962656"/>
+            <a:ext cx="1353312" cy="658368"/>
           </a:xfrm>
           <a:prstGeom prst="roundRect">
             <a:avLst>
@@ -11951,14 +12128,14 @@
       </p:sp>
       <p:sp>
         <p:nvSpPr>
-          <p:cNvPr id="21" name="Oval 20"/>
+          <p:cNvPr id="26" name="Oval 25"/>
           <p:cNvSpPr/>
           <p:nvPr/>
         </p:nvSpPr>
         <p:spPr>
           <a:xfrm>
-            <a:off x="3584448" y="1325880"/>
-            <a:ext cx="420624" cy="420624"/>
+            <a:off x="374904" y="3017520"/>
+            <a:ext cx="292608" cy="292608"/>
           </a:xfrm>
           <a:prstGeom prst="ellipse">
             <a:avLst/>
@@ -11995,7 +12172,7 @@
       </p:sp>
       <p:pic>
         <p:nvPicPr>
-          <p:cNvPr id="22" name="Picture 21" descr="image.png"/>
+          <p:cNvPr id="27" name="Picture 26" descr="image.png"/>
           <p:cNvPicPr>
             <a:picLocks noChangeAspect="1"/>
           </p:cNvPicPr>
@@ -12009,8 +12186,8 @@
         </p:blipFill>
         <p:spPr>
           <a:xfrm>
-            <a:off x="3668572" y="1410004"/>
-            <a:ext cx="252374" cy="252374"/>
+            <a:off x="433425" y="3076041"/>
+            <a:ext cx="175564" cy="175564"/>
           </a:xfrm>
           <a:prstGeom prst="rect">
             <a:avLst/>
@@ -12019,14 +12196,14 @@
       </p:pic>
       <p:sp>
         <p:nvSpPr>
-          <p:cNvPr id="23" name="TextBox 22"/>
+          <p:cNvPr id="28" name="TextBox 27"/>
           <p:cNvSpPr txBox="1"/>
           <p:nvPr/>
         </p:nvSpPr>
         <p:spPr>
           <a:xfrm>
-            <a:off x="4032504" y="1225296"/>
-            <a:ext cx="969264" cy="621792"/>
+            <a:off x="694944" y="2980944"/>
+            <a:ext cx="987552" cy="329184"/>
           </a:xfrm>
           <a:prstGeom prst="rect">
             <a:avLst/>
@@ -12041,47 +12218,70 @@
           <a:p>
             <a:pPr algn="l">
               <a:spcAft>
+                <a:spcPts val="300"/>
+              </a:spcAft>
+            </a:pPr>
+            <a:r>
+              <a:rPr sz="840" b="1" i="0">
+                <a:solidFill>
+                  <a:srgbClr val="172131"/>
+                </a:solidFill>
+                <a:latin typeface="Calibri"/>
+              </a:rPr>
+              <a:t>Word / notes</a:t>
+            </a:r>
+          </a:p>
+        </p:txBody>
+      </p:sp>
+      <p:sp>
+        <p:nvSpPr>
+          <p:cNvPr id="29" name="TextBox 28"/>
+          <p:cNvSpPr txBox="1"/>
+          <p:nvPr/>
+        </p:nvSpPr>
+        <p:spPr>
+          <a:xfrm>
+            <a:off x="365760" y="3310128"/>
+            <a:ext cx="1298448" cy="301752"/>
+          </a:xfrm>
+          <a:prstGeom prst="rect">
+            <a:avLst/>
+          </a:prstGeom>
+          <a:noFill/>
+        </p:spPr>
+        <p:txBody>
+          <a:bodyPr wrap="square" anchor="t" lIns="36576" rIns="36576" tIns="18288" bIns="18288">
+            <a:spAutoFit/>
+          </a:bodyPr>
+          <a:lstStyle/>
+          <a:p>
+            <a:pPr algn="l">
+              <a:spcAft>
                 <a:spcPts val="0"/>
               </a:spcAft>
             </a:pPr>
             <a:r>
-              <a:rPr sz="950" b="1" i="0">
-                <a:solidFill>
-                  <a:srgbClr val="172131"/>
-                </a:solidFill>
-                <a:latin typeface="Calibri"/>
-              </a:rPr>
-              <a:t>PowerPoint</a:t>
-            </a:r>
-          </a:p>
-          <a:p>
-            <a:pPr algn="l">
-              <a:spcAft>
-                <a:spcPts val="0"/>
-              </a:spcAft>
-            </a:pPr>
-            <a:r>
-              <a:rPr sz="800" b="0" i="0">
+              <a:rPr sz="760" b="0" i="0">
                 <a:solidFill>
                   <a:srgbClr val="555F6D"/>
                 </a:solidFill>
                 <a:latin typeface="Calibri"/>
               </a:rPr>
-              <a:t>editable native shapes</a:t>
-            </a:r>
-          </a:p>
-        </p:txBody>
-      </p:sp>
-      <p:sp>
-        <p:nvSpPr>
-          <p:cNvPr id="24" name="Rounded Rectangle 23"/>
+              <a:t>.docx, markdown, text</a:t>
+            </a:r>
+          </a:p>
+        </p:txBody>
+      </p:sp>
+      <p:sp>
+        <p:nvSpPr>
+          <p:cNvPr id="30" name="Rounded Rectangle 29"/>
           <p:cNvSpPr/>
           <p:nvPr/>
         </p:nvSpPr>
         <p:spPr>
           <a:xfrm>
-            <a:off x="5102352" y="1207008"/>
-            <a:ext cx="1481328" cy="658368"/>
+            <a:off x="338328" y="3694176"/>
+            <a:ext cx="1353312" cy="658368"/>
           </a:xfrm>
           <a:prstGeom prst="roundRect">
             <a:avLst>
@@ -12122,14 +12322,14 @@
       </p:sp>
       <p:sp>
         <p:nvSpPr>
-          <p:cNvPr id="25" name="Oval 24"/>
+          <p:cNvPr id="31" name="Oval 30"/>
           <p:cNvSpPr/>
           <p:nvPr/>
         </p:nvSpPr>
         <p:spPr>
           <a:xfrm>
-            <a:off x="5157216" y="1325880"/>
-            <a:ext cx="420624" cy="420624"/>
+            <a:off x="374904" y="3749039"/>
+            <a:ext cx="292608" cy="292608"/>
           </a:xfrm>
           <a:prstGeom prst="ellipse">
             <a:avLst/>
@@ -12166,7 +12366,7 @@
       </p:sp>
       <p:pic>
         <p:nvPicPr>
-          <p:cNvPr id="26" name="Picture 25" descr="image.png"/>
+          <p:cNvPr id="32" name="Picture 31" descr="image.png"/>
           <p:cNvPicPr>
             <a:picLocks noChangeAspect="1"/>
           </p:cNvPicPr>
@@ -12180,8 +12380,8 @@
         </p:blipFill>
         <p:spPr>
           <a:xfrm>
-            <a:off x="5241340" y="1410004"/>
-            <a:ext cx="252374" cy="252374"/>
+            <a:off x="433425" y="3807561"/>
+            <a:ext cx="175564" cy="175564"/>
           </a:xfrm>
           <a:prstGeom prst="rect">
             <a:avLst/>
@@ -12190,14 +12390,14 @@
       </p:pic>
       <p:sp>
         <p:nvSpPr>
-          <p:cNvPr id="27" name="TextBox 26"/>
+          <p:cNvPr id="33" name="TextBox 32"/>
           <p:cNvSpPr txBox="1"/>
           <p:nvPr/>
         </p:nvSpPr>
         <p:spPr>
           <a:xfrm>
-            <a:off x="5605272" y="1225296"/>
-            <a:ext cx="969264" cy="621792"/>
+            <a:off x="694944" y="3712463"/>
+            <a:ext cx="987552" cy="329184"/>
           </a:xfrm>
           <a:prstGeom prst="rect">
             <a:avLst/>
@@ -12212,47 +12412,70 @@
           <a:p>
             <a:pPr algn="l">
               <a:spcAft>
+                <a:spcPts val="300"/>
+              </a:spcAft>
+            </a:pPr>
+            <a:r>
+              <a:rPr sz="840" b="1" i="0">
+                <a:solidFill>
+                  <a:srgbClr val="172131"/>
+                </a:solidFill>
+                <a:latin typeface="Calibri"/>
+              </a:rPr>
+              <a:t>Typed topic</a:t>
+            </a:r>
+          </a:p>
+        </p:txBody>
+      </p:sp>
+      <p:sp>
+        <p:nvSpPr>
+          <p:cNvPr id="34" name="TextBox 33"/>
+          <p:cNvSpPr txBox="1"/>
+          <p:nvPr/>
+        </p:nvSpPr>
+        <p:spPr>
+          <a:xfrm>
+            <a:off x="365760" y="4041648"/>
+            <a:ext cx="1298448" cy="301752"/>
+          </a:xfrm>
+          <a:prstGeom prst="rect">
+            <a:avLst/>
+          </a:prstGeom>
+          <a:noFill/>
+        </p:spPr>
+        <p:txBody>
+          <a:bodyPr wrap="square" anchor="t" lIns="36576" rIns="36576" tIns="18288" bIns="18288">
+            <a:spAutoFit/>
+          </a:bodyPr>
+          <a:lstStyle/>
+          <a:p>
+            <a:pPr algn="l">
+              <a:spcAft>
                 <a:spcPts val="0"/>
               </a:spcAft>
             </a:pPr>
             <a:r>
-              <a:rPr sz="950" b="1" i="0">
-                <a:solidFill>
-                  <a:srgbClr val="172131"/>
-                </a:solidFill>
-                <a:latin typeface="Calibri"/>
-              </a:rPr>
-              <a:t>Mobile PWA</a:t>
-            </a:r>
-          </a:p>
-          <a:p>
-            <a:pPr algn="l">
-              <a:spcAft>
-                <a:spcPts val="0"/>
-              </a:spcAft>
-            </a:pPr>
-            <a:r>
-              <a:rPr sz="800" b="0" i="0">
+              <a:rPr sz="760" b="0" i="0">
                 <a:solidFill>
                   <a:srgbClr val="555F6D"/>
                 </a:solidFill>
                 <a:latin typeface="Calibri"/>
               </a:rPr>
-              <a:t>installable, offline</a:t>
-            </a:r>
-          </a:p>
-        </p:txBody>
-      </p:sp>
-      <p:sp>
-        <p:nvSpPr>
-          <p:cNvPr id="28" name="Rounded Rectangle 27"/>
+              <a:t>a prompt or syllabus line</a:t>
+            </a:r>
+          </a:p>
+        </p:txBody>
+      </p:sp>
+      <p:sp>
+        <p:nvSpPr>
+          <p:cNvPr id="35" name="Rounded Rectangle 34"/>
           <p:cNvSpPr/>
           <p:nvPr/>
         </p:nvSpPr>
         <p:spPr>
           <a:xfrm>
-            <a:off x="6675120" y="1207008"/>
-            <a:ext cx="1481328" cy="658368"/>
+            <a:off x="338328" y="4425696"/>
+            <a:ext cx="1353312" cy="658368"/>
           </a:xfrm>
           <a:prstGeom prst="roundRect">
             <a:avLst>
@@ -12293,14 +12516,14 @@
       </p:sp>
       <p:sp>
         <p:nvSpPr>
-          <p:cNvPr id="29" name="Oval 28"/>
+          <p:cNvPr id="36" name="Oval 35"/>
           <p:cNvSpPr/>
           <p:nvPr/>
         </p:nvSpPr>
         <p:spPr>
           <a:xfrm>
-            <a:off x="6729983" y="1325880"/>
-            <a:ext cx="420624" cy="420624"/>
+            <a:off x="374904" y="4480559"/>
+            <a:ext cx="292608" cy="292608"/>
           </a:xfrm>
           <a:prstGeom prst="ellipse">
             <a:avLst/>
@@ -12337,7 +12560,7 @@
       </p:sp>
       <p:pic>
         <p:nvPicPr>
-          <p:cNvPr id="30" name="Picture 29" descr="image.png"/>
+          <p:cNvPr id="37" name="Picture 36" descr="image.png"/>
           <p:cNvPicPr>
             <a:picLocks noChangeAspect="1"/>
           </p:cNvPicPr>
@@ -12351,8 +12574,8 @@
         </p:blipFill>
         <p:spPr>
           <a:xfrm>
-            <a:off x="6814108" y="1410004"/>
-            <a:ext cx="252374" cy="252374"/>
+            <a:off x="433425" y="4539081"/>
+            <a:ext cx="175564" cy="175564"/>
           </a:xfrm>
           <a:prstGeom prst="rect">
             <a:avLst/>
@@ -12361,14 +12584,14 @@
       </p:pic>
       <p:sp>
         <p:nvSpPr>
-          <p:cNvPr id="31" name="TextBox 30"/>
+          <p:cNvPr id="38" name="TextBox 37"/>
           <p:cNvSpPr txBox="1"/>
           <p:nvPr/>
         </p:nvSpPr>
         <p:spPr>
           <a:xfrm>
-            <a:off x="7178040" y="1225296"/>
-            <a:ext cx="969264" cy="621792"/>
+            <a:off x="694944" y="4443983"/>
+            <a:ext cx="987552" cy="329184"/>
           </a:xfrm>
           <a:prstGeom prst="rect">
             <a:avLst/>
@@ -12383,54 +12606,77 @@
           <a:p>
             <a:pPr algn="l">
               <a:spcAft>
+                <a:spcPts val="300"/>
+              </a:spcAft>
+            </a:pPr>
+            <a:r>
+              <a:rPr sz="840" b="1" i="0">
+                <a:solidFill>
+                  <a:srgbClr val="172131"/>
+                </a:solidFill>
+                <a:latin typeface="Calibri"/>
+              </a:rPr>
+              <a:t>Teacher labs</a:t>
+            </a:r>
+          </a:p>
+        </p:txBody>
+      </p:sp>
+      <p:sp>
+        <p:nvSpPr>
+          <p:cNvPr id="39" name="TextBox 38"/>
+          <p:cNvSpPr txBox="1"/>
+          <p:nvPr/>
+        </p:nvSpPr>
+        <p:spPr>
+          <a:xfrm>
+            <a:off x="365760" y="4773168"/>
+            <a:ext cx="1298448" cy="301752"/>
+          </a:xfrm>
+          <a:prstGeom prst="rect">
+            <a:avLst/>
+          </a:prstGeom>
+          <a:noFill/>
+        </p:spPr>
+        <p:txBody>
+          <a:bodyPr wrap="square" anchor="t" lIns="36576" rIns="36576" tIns="18288" bIns="18288">
+            <a:spAutoFit/>
+          </a:bodyPr>
+          <a:lstStyle/>
+          <a:p>
+            <a:pPr algn="l">
+              <a:spcAft>
                 <a:spcPts val="0"/>
               </a:spcAft>
             </a:pPr>
             <a:r>
-              <a:rPr sz="950" b="1" i="0">
-                <a:solidFill>
-                  <a:srgbClr val="172131"/>
-                </a:solidFill>
-                <a:latin typeface="Calibri"/>
-              </a:rPr>
-              <a:t>Share link</a:t>
-            </a:r>
-          </a:p>
-          <a:p>
-            <a:pPr algn="l">
-              <a:spcAft>
-                <a:spcPts val="0"/>
-              </a:spcAft>
-            </a:pPr>
-            <a:r>
-              <a:rPr sz="800" b="0" i="0">
+              <a:rPr sz="760" b="0" i="0">
                 <a:solidFill>
                   <a:srgbClr val="555F6D"/>
                 </a:solidFill>
                 <a:latin typeface="Calibri"/>
               </a:rPr>
-              <a:t>view-only, no login</a:t>
+              <a:t>own HTML labs via API</a:t>
             </a:r>
           </a:p>
         </p:txBody>
       </p:sp>
       <p:cxnSp>
         <p:nvCxnSpPr>
-          <p:cNvPr id="32" name="Connector 31"/>
+          <p:cNvPr id="40" name="Connector 39"/>
           <p:cNvCxnSpPr/>
           <p:nvPr/>
         </p:nvCxnSpPr>
         <p:spPr>
           <a:xfrm>
-            <a:off x="4270248" y="1938528"/>
-            <a:ext cx="0" cy="82296"/>
+            <a:off x="1764792" y="3200400"/>
+            <a:ext cx="164592" cy="0"/>
           </a:xfrm>
           <a:prstGeom prst="line">
             <a:avLst/>
           </a:prstGeom>
-          <a:ln w="25400">
+          <a:ln w="28575">
             <a:solidFill>
-              <a:srgbClr val="1F5FBF"/>
+              <a:srgbClr val="172131"/>
             </a:solidFill>
             <a:tailEnd type="triangle"/>
           </a:ln>
@@ -12452,18 +12698,57 @@
       </p:cxnSp>
       <p:sp>
         <p:nvSpPr>
-          <p:cNvPr id="33" name="Rounded Rectangle 32"/>
+          <p:cNvPr id="41" name="TextBox 40"/>
+          <p:cNvSpPr txBox="1"/>
+          <p:nvPr/>
+        </p:nvSpPr>
+        <p:spPr>
+          <a:xfrm>
+            <a:off x="1645920" y="2926080"/>
+            <a:ext cx="402336" cy="237744"/>
+          </a:xfrm>
+          <a:prstGeom prst="rect">
+            <a:avLst/>
+          </a:prstGeom>
+          <a:noFill/>
+        </p:spPr>
+        <p:txBody>
+          <a:bodyPr wrap="square" anchor="t" lIns="36576" rIns="36576" tIns="18288" bIns="18288">
+            <a:spAutoFit/>
+          </a:bodyPr>
+          <a:lstStyle/>
+          <a:p>
+            <a:pPr algn="ctr">
+              <a:spcAft>
+                <a:spcPts val="300"/>
+              </a:spcAft>
+            </a:pPr>
+            <a:r>
+              <a:rPr sz="680" b="0" i="1">
+                <a:solidFill>
+                  <a:srgbClr val="172131"/>
+                </a:solidFill>
+                <a:latin typeface="Calibri"/>
+              </a:rPr>
+              <a:t>IR</a:t>
+            </a:r>
+          </a:p>
+        </p:txBody>
+      </p:sp>
+      <p:sp>
+        <p:nvSpPr>
+          <p:cNvPr id="42" name="Rounded Rectangle 41"/>
           <p:cNvSpPr/>
           <p:nvPr/>
         </p:nvSpPr>
         <p:spPr>
           <a:xfrm>
-            <a:off x="274320" y="2020824"/>
-            <a:ext cx="8001000" cy="1024128"/>
+            <a:off x="1938528" y="1261872"/>
+            <a:ext cx="1481328" cy="3904487"/>
           </a:xfrm>
           <a:prstGeom prst="roundRect">
             <a:avLst>
-              <a:gd name="adj" fmla="val 6000"/>
+              <a:gd name="adj" fmla="val 5000"/>
             </a:avLst>
           </a:prstGeom>
           <a:solidFill>
@@ -12500,14 +12785,60 @@
       </p:sp>
       <p:sp>
         <p:nvSpPr>
-          <p:cNvPr id="34" name="TextBox 33"/>
+          <p:cNvPr id="43" name="Rounded Rectangle 42"/>
+          <p:cNvSpPr/>
+          <p:nvPr/>
+        </p:nvSpPr>
+        <p:spPr>
+          <a:xfrm>
+            <a:off x="2048256" y="1207008"/>
+            <a:ext cx="1261872" cy="219456"/>
+          </a:xfrm>
+          <a:prstGeom prst="roundRect">
+            <a:avLst>
+              <a:gd name="adj" fmla="val 50000"/>
+            </a:avLst>
+          </a:prstGeom>
+          <a:solidFill>
+            <a:srgbClr val="0E7C86"/>
+          </a:solidFill>
+          <a:ln>
+            <a:noFill/>
+          </a:ln>
+          <a:effectLst/>
+        </p:spPr>
+        <p:style>
+          <a:lnRef idx="1">
+            <a:schemeClr val="accent1"/>
+          </a:lnRef>
+          <a:fillRef idx="3">
+            <a:schemeClr val="accent1"/>
+          </a:fillRef>
+          <a:effectRef idx="2">
+            <a:schemeClr val="accent1"/>
+          </a:effectRef>
+          <a:fontRef idx="minor">
+            <a:schemeClr val="lt1"/>
+          </a:fontRef>
+        </p:style>
+        <p:txBody>
+          <a:bodyPr rtlCol="0" anchor="ctr"/>
+          <a:lstStyle/>
+          <a:p>
+            <a:pPr algn="ctr"/>
+          </a:p>
+        </p:txBody>
+      </p:sp>
+      <p:sp>
+        <p:nvSpPr>
+          <p:cNvPr id="44" name="TextBox 43"/>
           <p:cNvSpPr txBox="1"/>
           <p:nvPr/>
         </p:nvSpPr>
         <p:spPr>
           <a:xfrm>
-            <a:off x="365760" y="2039112"/>
-            <a:ext cx="3657600" cy="256032"/>
+            <a:off x="2048256" y="1207008"/>
+            <a:ext cx="1261872" cy="219456"/>
           </a:xfrm>
           <a:prstGeom prst="rect">
             <a:avLst/>
@@ -12515,38 +12846,38 @@
           <a:noFill/>
         </p:spPr>
         <p:txBody>
-          <a:bodyPr wrap="square" anchor="t" lIns="36576" rIns="36576" tIns="18288" bIns="18288">
+          <a:bodyPr wrap="square" anchor="ctr" lIns="36576" rIns="36576" tIns="18288" bIns="18288">
             <a:spAutoFit/>
           </a:bodyPr>
           <a:lstStyle/>
           <a:p>
-            <a:pPr algn="l">
+            <a:pPr algn="ctr">
               <a:spcAft>
                 <a:spcPts val="300"/>
               </a:spcAft>
             </a:pPr>
             <a:r>
-              <a:rPr sz="1100" b="1" i="0">
-                <a:solidFill>
-                  <a:srgbClr val="0E7C86"/>
-                </a:solidFill>
-                <a:latin typeface="Montserrat"/>
-              </a:rPr>
-              <a:t>2  API &amp; service layer (FastAPI)</a:t>
-            </a:r>
-          </a:p>
-        </p:txBody>
-      </p:sp>
-      <p:sp>
-        <p:nvSpPr>
-          <p:cNvPr id="35" name="Rounded Rectangle 34"/>
+              <a:rPr sz="900" b="1" i="0">
+                <a:solidFill>
+                  <a:srgbClr val="FFFFFF"/>
+                </a:solidFill>
+                <a:latin typeface="Calibri"/>
+              </a:rPr>
+              <a:t>INGEST</a:t>
+            </a:r>
+          </a:p>
+        </p:txBody>
+      </p:sp>
+      <p:sp>
+        <p:nvSpPr>
+          <p:cNvPr id="45" name="Rounded Rectangle 44"/>
           <p:cNvSpPr/>
           <p:nvPr/>
         </p:nvSpPr>
         <p:spPr>
           <a:xfrm>
-            <a:off x="384048" y="2313432"/>
-            <a:ext cx="1481328" cy="658368"/>
+            <a:off x="2002536" y="1499616"/>
+            <a:ext cx="1353312" cy="658368"/>
           </a:xfrm>
           <a:prstGeom prst="roundRect">
             <a:avLst>
@@ -12587,14 +12918,14 @@
       </p:sp>
       <p:sp>
         <p:nvSpPr>
-          <p:cNvPr id="36" name="Oval 35"/>
+          <p:cNvPr id="46" name="Oval 45"/>
           <p:cNvSpPr/>
           <p:nvPr/>
         </p:nvSpPr>
         <p:spPr>
           <a:xfrm>
-            <a:off x="438912" y="2432304"/>
-            <a:ext cx="420624" cy="420624"/>
+            <a:off x="2039112" y="1554480"/>
+            <a:ext cx="292608" cy="292608"/>
           </a:xfrm>
           <a:prstGeom prst="ellipse">
             <a:avLst/>
@@ -12631,7 +12962,7 @@
       </p:sp>
       <p:pic>
         <p:nvPicPr>
-          <p:cNvPr id="37" name="Picture 36" descr="image.png"/>
+          <p:cNvPr id="47" name="Picture 46" descr="image.png"/>
           <p:cNvPicPr>
             <a:picLocks noChangeAspect="1"/>
           </p:cNvPicPr>
@@ -12645,8 +12976,8 @@
         </p:blipFill>
         <p:spPr>
           <a:xfrm>
-            <a:off x="523036" y="2516428"/>
-            <a:ext cx="252374" cy="252374"/>
+            <a:off x="2097633" y="1613001"/>
+            <a:ext cx="175564" cy="175564"/>
           </a:xfrm>
           <a:prstGeom prst="rect">
             <a:avLst/>
@@ -12655,14 +12986,14 @@
       </p:pic>
       <p:sp>
         <p:nvSpPr>
-          <p:cNvPr id="38" name="TextBox 37"/>
+          <p:cNvPr id="48" name="TextBox 47"/>
           <p:cNvSpPr txBox="1"/>
           <p:nvPr/>
         </p:nvSpPr>
         <p:spPr>
           <a:xfrm>
-            <a:off x="886968" y="2331720"/>
-            <a:ext cx="969264" cy="621792"/>
+            <a:off x="2359152" y="1517904"/>
+            <a:ext cx="987552" cy="329184"/>
           </a:xfrm>
           <a:prstGeom prst="rect">
             <a:avLst/>
@@ -12677,47 +13008,70 @@
           <a:p>
             <a:pPr algn="l">
               <a:spcAft>
+                <a:spcPts val="300"/>
+              </a:spcAft>
+            </a:pPr>
+            <a:r>
+              <a:rPr sz="840" b="1" i="0">
+                <a:solidFill>
+                  <a:srgbClr val="172131"/>
+                </a:solidFill>
+                <a:latin typeface="Calibri"/>
+              </a:rPr>
+              <a:t>LibreOffice convert</a:t>
+            </a:r>
+          </a:p>
+        </p:txBody>
+      </p:sp>
+      <p:sp>
+        <p:nvSpPr>
+          <p:cNvPr id="49" name="TextBox 48"/>
+          <p:cNvSpPr txBox="1"/>
+          <p:nvPr/>
+        </p:nvSpPr>
+        <p:spPr>
+          <a:xfrm>
+            <a:off x="2029968" y="1847088"/>
+            <a:ext cx="1298448" cy="301752"/>
+          </a:xfrm>
+          <a:prstGeom prst="rect">
+            <a:avLst/>
+          </a:prstGeom>
+          <a:noFill/>
+        </p:spPr>
+        <p:txBody>
+          <a:bodyPr wrap="square" anchor="t" lIns="36576" rIns="36576" tIns="18288" bIns="18288">
+            <a:spAutoFit/>
+          </a:bodyPr>
+          <a:lstStyle/>
+          <a:p>
+            <a:pPr algn="l">
+              <a:spcAft>
                 <a:spcPts val="0"/>
               </a:spcAft>
             </a:pPr>
             <a:r>
-              <a:rPr sz="950" b="1" i="0">
-                <a:solidFill>
-                  <a:srgbClr val="172131"/>
-                </a:solidFill>
-                <a:latin typeface="Calibri"/>
-              </a:rPr>
-              <a:t>Auth</a:t>
-            </a:r>
-          </a:p>
-          <a:p>
-            <a:pPr algn="l">
-              <a:spcAft>
-                <a:spcPts val="0"/>
-              </a:spcAft>
-            </a:pPr>
-            <a:r>
-              <a:rPr sz="800" b="0" i="0">
+              <a:rPr sz="760" b="0" i="0">
                 <a:solidFill>
                   <a:srgbClr val="555F6D"/>
                 </a:solidFill>
                 <a:latin typeface="Calibri"/>
               </a:rPr>
-              <a:t>phone OTP, tokens, rate limit</a:t>
-            </a:r>
-          </a:p>
-        </p:txBody>
-      </p:sp>
-      <p:sp>
-        <p:nvSpPr>
-          <p:cNvPr id="39" name="Rounded Rectangle 38"/>
+              <a:t>PPTX → PDF, cached by hash</a:t>
+            </a:r>
+          </a:p>
+        </p:txBody>
+      </p:sp>
+      <p:sp>
+        <p:nvSpPr>
+          <p:cNvPr id="50" name="Rounded Rectangle 49"/>
           <p:cNvSpPr/>
           <p:nvPr/>
         </p:nvSpPr>
         <p:spPr>
           <a:xfrm>
-            <a:off x="1956816" y="2313432"/>
-            <a:ext cx="1481328" cy="658368"/>
+            <a:off x="2002536" y="2231136"/>
+            <a:ext cx="1353312" cy="658368"/>
           </a:xfrm>
           <a:prstGeom prst="roundRect">
             <a:avLst>
@@ -12758,14 +13112,14 @@
       </p:sp>
       <p:sp>
         <p:nvSpPr>
-          <p:cNvPr id="40" name="Oval 39"/>
+          <p:cNvPr id="51" name="Oval 50"/>
           <p:cNvSpPr/>
           <p:nvPr/>
         </p:nvSpPr>
         <p:spPr>
           <a:xfrm>
-            <a:off x="2011680" y="2432304"/>
-            <a:ext cx="420624" cy="420624"/>
+            <a:off x="2039112" y="2286000"/>
+            <a:ext cx="292608" cy="292608"/>
           </a:xfrm>
           <a:prstGeom prst="ellipse">
             <a:avLst/>
@@ -12802,7 +13156,7 @@
       </p:sp>
       <p:pic>
         <p:nvPicPr>
-          <p:cNvPr id="41" name="Picture 40" descr="image.png"/>
+          <p:cNvPr id="52" name="Picture 51" descr="image.png"/>
           <p:cNvPicPr>
             <a:picLocks noChangeAspect="1"/>
           </p:cNvPicPr>
@@ -12816,8 +13170,8 @@
         </p:blipFill>
         <p:spPr>
           <a:xfrm>
-            <a:off x="2095804" y="2516428"/>
-            <a:ext cx="252374" cy="252374"/>
+            <a:off x="2097633" y="2344521"/>
+            <a:ext cx="175564" cy="175564"/>
           </a:xfrm>
           <a:prstGeom prst="rect">
             <a:avLst/>
@@ -12826,14 +13180,14 @@
       </p:pic>
       <p:sp>
         <p:nvSpPr>
-          <p:cNvPr id="42" name="TextBox 41"/>
+          <p:cNvPr id="53" name="TextBox 52"/>
           <p:cNvSpPr txBox="1"/>
           <p:nvPr/>
         </p:nvSpPr>
         <p:spPr>
           <a:xfrm>
-            <a:off x="2459736" y="2331720"/>
-            <a:ext cx="969264" cy="621792"/>
+            <a:off x="2359152" y="2249424"/>
+            <a:ext cx="987552" cy="329184"/>
           </a:xfrm>
           <a:prstGeom prst="rect">
             <a:avLst/>
@@ -12848,47 +13202,70 @@
           <a:p>
             <a:pPr algn="l">
               <a:spcAft>
+                <a:spcPts val="300"/>
+              </a:spcAft>
+            </a:pPr>
+            <a:r>
+              <a:rPr sz="840" b="1" i="0">
+                <a:solidFill>
+                  <a:srgbClr val="172131"/>
+                </a:solidFill>
+                <a:latin typeface="Calibri"/>
+              </a:rPr>
+              <a:t>Slide reader</a:t>
+            </a:r>
+          </a:p>
+        </p:txBody>
+      </p:sp>
+      <p:sp>
+        <p:nvSpPr>
+          <p:cNvPr id="54" name="TextBox 53"/>
+          <p:cNvSpPr txBox="1"/>
+          <p:nvPr/>
+        </p:nvSpPr>
+        <p:spPr>
+          <a:xfrm>
+            <a:off x="2029968" y="2578608"/>
+            <a:ext cx="1298448" cy="301752"/>
+          </a:xfrm>
+          <a:prstGeom prst="rect">
+            <a:avLst/>
+          </a:prstGeom>
+          <a:noFill/>
+        </p:spPr>
+        <p:txBody>
+          <a:bodyPr wrap="square" anchor="t" lIns="36576" rIns="36576" tIns="18288" bIns="18288">
+            <a:spAutoFit/>
+          </a:bodyPr>
+          <a:lstStyle/>
+          <a:p>
+            <a:pPr algn="l">
+              <a:spcAft>
                 <a:spcPts val="0"/>
               </a:spcAft>
             </a:pPr>
             <a:r>
-              <a:rPr sz="950" b="1" i="0">
-                <a:solidFill>
-                  <a:srgbClr val="172131"/>
-                </a:solidFill>
-                <a:latin typeface="Calibri"/>
-              </a:rPr>
-              <a:t>Jobs</a:t>
-            </a:r>
-          </a:p>
-          <a:p>
-            <a:pPr algn="l">
-              <a:spcAft>
-                <a:spcPts val="0"/>
-              </a:spcAft>
-            </a:pPr>
-            <a:r>
-              <a:rPr sz="800" b="0" i="0">
+              <a:rPr sz="760" b="0" i="0">
                 <a:solidFill>
                   <a:srgbClr val="555F6D"/>
                 </a:solidFill>
                 <a:latin typeface="Calibri"/>
               </a:rPr>
-              <a:t>upload · generate · progress</a:t>
-            </a:r>
-          </a:p>
-        </p:txBody>
-      </p:sp>
-      <p:sp>
-        <p:nvSpPr>
-          <p:cNvPr id="43" name="Rounded Rectangle 42"/>
+              <a:t>titles · bullet levels · tables</a:t>
+            </a:r>
+          </a:p>
+        </p:txBody>
+      </p:sp>
+      <p:sp>
+        <p:nvSpPr>
+          <p:cNvPr id="55" name="Rounded Rectangle 54"/>
           <p:cNvSpPr/>
           <p:nvPr/>
         </p:nvSpPr>
         <p:spPr>
           <a:xfrm>
-            <a:off x="3529584" y="2313432"/>
-            <a:ext cx="1481328" cy="658368"/>
+            <a:off x="2002536" y="2962656"/>
+            <a:ext cx="1353312" cy="658368"/>
           </a:xfrm>
           <a:prstGeom prst="roundRect">
             <a:avLst>
@@ -12929,14 +13306,14 @@
       </p:sp>
       <p:sp>
         <p:nvSpPr>
-          <p:cNvPr id="44" name="Oval 43"/>
+          <p:cNvPr id="56" name="Oval 55"/>
           <p:cNvSpPr/>
           <p:nvPr/>
         </p:nvSpPr>
         <p:spPr>
           <a:xfrm>
-            <a:off x="3584448" y="2432304"/>
-            <a:ext cx="420624" cy="420624"/>
+            <a:off x="2039112" y="3017520"/>
+            <a:ext cx="292608" cy="292608"/>
           </a:xfrm>
           <a:prstGeom prst="ellipse">
             <a:avLst/>
@@ -12973,7 +13350,7 @@
       </p:sp>
       <p:pic>
         <p:nvPicPr>
-          <p:cNvPr id="45" name="Picture 44" descr="image.png"/>
+          <p:cNvPr id="57" name="Picture 56" descr="image.png"/>
           <p:cNvPicPr>
             <a:picLocks noChangeAspect="1"/>
           </p:cNvPicPr>
@@ -12987,8 +13364,8 @@
         </p:blipFill>
         <p:spPr>
           <a:xfrm>
-            <a:off x="3668572" y="2516428"/>
-            <a:ext cx="252374" cy="252374"/>
+            <a:off x="2097633" y="3076041"/>
+            <a:ext cx="175564" cy="175564"/>
           </a:xfrm>
           <a:prstGeom prst="rect">
             <a:avLst/>
@@ -12997,14 +13374,14 @@
       </p:pic>
       <p:sp>
         <p:nvSpPr>
-          <p:cNvPr id="46" name="TextBox 45"/>
+          <p:cNvPr id="58" name="TextBox 57"/>
           <p:cNvSpPr txBox="1"/>
           <p:nvPr/>
         </p:nvSpPr>
         <p:spPr>
           <a:xfrm>
-            <a:off x="4032504" y="2331720"/>
-            <a:ext cx="969264" cy="621792"/>
+            <a:off x="2359152" y="2980944"/>
+            <a:ext cx="987552" cy="329184"/>
           </a:xfrm>
           <a:prstGeom prst="rect">
             <a:avLst/>
@@ -13019,47 +13396,70 @@
           <a:p>
             <a:pPr algn="l">
               <a:spcAft>
+                <a:spcPts val="300"/>
+              </a:spcAft>
+            </a:pPr>
+            <a:r>
+              <a:rPr sz="840" b="1" i="0">
+                <a:solidFill>
+                  <a:srgbClr val="172131"/>
+                </a:solidFill>
+                <a:latin typeface="Calibri"/>
+              </a:rPr>
+              <a:t>OCR decision</a:t>
+            </a:r>
+          </a:p>
+        </p:txBody>
+      </p:sp>
+      <p:sp>
+        <p:nvSpPr>
+          <p:cNvPr id="59" name="TextBox 58"/>
+          <p:cNvSpPr txBox="1"/>
+          <p:nvPr/>
+        </p:nvSpPr>
+        <p:spPr>
+          <a:xfrm>
+            <a:off x="2029968" y="3310128"/>
+            <a:ext cx="1298448" cy="301752"/>
+          </a:xfrm>
+          <a:prstGeom prst="rect">
+            <a:avLst/>
+          </a:prstGeom>
+          <a:noFill/>
+        </p:spPr>
+        <p:txBody>
+          <a:bodyPr wrap="square" anchor="t" lIns="36576" rIns="36576" tIns="18288" bIns="18288">
+            <a:spAutoFit/>
+          </a:bodyPr>
+          <a:lstStyle/>
+          <a:p>
+            <a:pPr algn="l">
+              <a:spcAft>
                 <a:spcPts val="0"/>
               </a:spcAft>
             </a:pPr>
             <a:r>
-              <a:rPr sz="950" b="1" i="0">
-                <a:solidFill>
-                  <a:srgbClr val="172131"/>
-                </a:solidFill>
-                <a:latin typeface="Calibri"/>
-              </a:rPr>
-              <a:t>Deck library</a:t>
-            </a:r>
-          </a:p>
-          <a:p>
-            <a:pPr algn="l">
-              <a:spcAft>
-                <a:spcPts val="0"/>
-              </a:spcAft>
-            </a:pPr>
-            <a:r>
-              <a:rPr sz="800" b="0" i="0">
+              <a:rPr sz="760" b="0" i="0">
                 <a:solidFill>
                   <a:srgbClr val="555F6D"/>
                 </a:solidFill>
                 <a:latin typeface="Calibri"/>
               </a:rPr>
-              <a:t>versions · refresh</a:t>
-            </a:r>
-          </a:p>
-        </p:txBody>
-      </p:sp>
-      <p:sp>
-        <p:nvSpPr>
-          <p:cNvPr id="47" name="Rounded Rectangle 46"/>
+              <a:t>Tesseract when text is reliable</a:t>
+            </a:r>
+          </a:p>
+        </p:txBody>
+      </p:sp>
+      <p:sp>
+        <p:nvSpPr>
+          <p:cNvPr id="60" name="Rounded Rectangle 59"/>
           <p:cNvSpPr/>
           <p:nvPr/>
         </p:nvSpPr>
         <p:spPr>
           <a:xfrm>
-            <a:off x="5102352" y="2313432"/>
-            <a:ext cx="1481328" cy="658368"/>
+            <a:off x="2002536" y="3694176"/>
+            <a:ext cx="1353312" cy="658368"/>
           </a:xfrm>
           <a:prstGeom prst="roundRect">
             <a:avLst>
@@ -13100,14 +13500,14 @@
       </p:sp>
       <p:sp>
         <p:nvSpPr>
-          <p:cNvPr id="48" name="Oval 47"/>
+          <p:cNvPr id="61" name="Oval 60"/>
           <p:cNvSpPr/>
           <p:nvPr/>
         </p:nvSpPr>
         <p:spPr>
           <a:xfrm>
-            <a:off x="5157216" y="2432304"/>
-            <a:ext cx="420624" cy="420624"/>
+            <a:off x="2039112" y="3749039"/>
+            <a:ext cx="292608" cy="292608"/>
           </a:xfrm>
           <a:prstGeom prst="ellipse">
             <a:avLst/>
@@ -13144,7 +13544,7 @@
       </p:sp>
       <p:pic>
         <p:nvPicPr>
-          <p:cNvPr id="49" name="Picture 48" descr="image.png"/>
+          <p:cNvPr id="62" name="Picture 61" descr="image.png"/>
           <p:cNvPicPr>
             <a:picLocks noChangeAspect="1"/>
           </p:cNvPicPr>
@@ -13158,8 +13558,8 @@
         </p:blipFill>
         <p:spPr>
           <a:xfrm>
-            <a:off x="5241340" y="2516428"/>
-            <a:ext cx="252374" cy="252374"/>
+            <a:off x="2097633" y="3807561"/>
+            <a:ext cx="175564" cy="175564"/>
           </a:xfrm>
           <a:prstGeom prst="rect">
             <a:avLst/>
@@ -13168,14 +13568,14 @@
       </p:pic>
       <p:sp>
         <p:nvSpPr>
-          <p:cNvPr id="50" name="TextBox 49"/>
+          <p:cNvPr id="63" name="TextBox 62"/>
           <p:cNvSpPr txBox="1"/>
           <p:nvPr/>
         </p:nvSpPr>
         <p:spPr>
           <a:xfrm>
-            <a:off x="5605272" y="2331720"/>
-            <a:ext cx="969264" cy="621792"/>
+            <a:off x="2359152" y="3712463"/>
+            <a:ext cx="987552" cy="329184"/>
           </a:xfrm>
           <a:prstGeom prst="rect">
             <a:avLst/>
@@ -13190,47 +13590,70 @@
           <a:p>
             <a:pPr algn="l">
               <a:spcAft>
+                <a:spcPts val="300"/>
+              </a:spcAft>
+            </a:pPr>
+            <a:r>
+              <a:rPr sz="840" b="1" i="0">
+                <a:solidFill>
+                  <a:srgbClr val="172131"/>
+                </a:solidFill>
+                <a:latin typeface="Calibri"/>
+              </a:rPr>
+              <a:t>Repair</a:t>
+            </a:r>
+          </a:p>
+        </p:txBody>
+      </p:sp>
+      <p:sp>
+        <p:nvSpPr>
+          <p:cNvPr id="64" name="TextBox 63"/>
+          <p:cNvSpPr txBox="1"/>
+          <p:nvPr/>
+        </p:nvSpPr>
+        <p:spPr>
+          <a:xfrm>
+            <a:off x="2029968" y="4041648"/>
+            <a:ext cx="1298448" cy="301752"/>
+          </a:xfrm>
+          <a:prstGeom prst="rect">
+            <a:avLst/>
+          </a:prstGeom>
+          <a:noFill/>
+        </p:spPr>
+        <p:txBody>
+          <a:bodyPr wrap="square" anchor="t" lIns="36576" rIns="36576" tIns="18288" bIns="18288">
+            <a:spAutoFit/>
+          </a:bodyPr>
+          <a:lstStyle/>
+          <a:p>
+            <a:pPr algn="l">
+              <a:spcAft>
                 <a:spcPts val="0"/>
               </a:spcAft>
             </a:pPr>
             <a:r>
-              <a:rPr sz="950" b="1" i="0">
-                <a:solidFill>
-                  <a:srgbClr val="172131"/>
-                </a:solidFill>
-                <a:latin typeface="Calibri"/>
-              </a:rPr>
-              <a:t>Explain / labs / art</a:t>
-            </a:r>
-          </a:p>
-          <a:p>
-            <a:pPr algn="l">
-              <a:spcAft>
-                <a:spcPts val="0"/>
-              </a:spcAft>
-            </a:pPr>
-            <a:r>
-              <a:rPr sz="800" b="0" i="0">
+              <a:rPr sz="760" b="0" i="0">
                 <a:solidFill>
                   <a:srgbClr val="555F6D"/>
                 </a:solidFill>
                 <a:latin typeface="Calibri"/>
               </a:rPr>
-              <a:t>public pages</a:t>
-            </a:r>
-          </a:p>
-        </p:txBody>
-      </p:sp>
-      <p:sp>
-        <p:nvSpPr>
-          <p:cNvPr id="51" name="Rounded Rectangle 50"/>
+              <a:t>furniture, glued titles, split words</a:t>
+            </a:r>
+          </a:p>
+        </p:txBody>
+      </p:sp>
+      <p:sp>
+        <p:nvSpPr>
+          <p:cNvPr id="65" name="Rounded Rectangle 64"/>
           <p:cNvSpPr/>
           <p:nvPr/>
         </p:nvSpPr>
         <p:spPr>
           <a:xfrm>
-            <a:off x="6675120" y="2313432"/>
-            <a:ext cx="1481328" cy="658368"/>
+            <a:off x="2002536" y="4425696"/>
+            <a:ext cx="1353312" cy="658368"/>
           </a:xfrm>
           <a:prstGeom prst="roundRect">
             <a:avLst>
@@ -13271,14 +13694,14 @@
       </p:sp>
       <p:sp>
         <p:nvSpPr>
-          <p:cNvPr id="52" name="Oval 51"/>
+          <p:cNvPr id="66" name="Oval 65"/>
           <p:cNvSpPr/>
           <p:nvPr/>
         </p:nvSpPr>
         <p:spPr>
           <a:xfrm>
-            <a:off x="6729983" y="2432304"/>
-            <a:ext cx="420624" cy="420624"/>
+            <a:off x="2039112" y="4480559"/>
+            <a:ext cx="292608" cy="292608"/>
           </a:xfrm>
           <a:prstGeom prst="ellipse">
             <a:avLst/>
@@ -13315,7 +13738,7 @@
       </p:sp>
       <p:pic>
         <p:nvPicPr>
-          <p:cNvPr id="53" name="Picture 52" descr="image.png"/>
+          <p:cNvPr id="67" name="Picture 66" descr="image.png"/>
           <p:cNvPicPr>
             <a:picLocks noChangeAspect="1"/>
           </p:cNvPicPr>
@@ -13329,8 +13752,8 @@
         </p:blipFill>
         <p:spPr>
           <a:xfrm>
-            <a:off x="6814108" y="2516428"/>
-            <a:ext cx="252374" cy="252374"/>
+            <a:off x="2097633" y="4539081"/>
+            <a:ext cx="175564" cy="175564"/>
           </a:xfrm>
           <a:prstGeom prst="rect">
             <a:avLst/>
@@ -13339,14 +13762,14 @@
       </p:pic>
       <p:sp>
         <p:nvSpPr>
-          <p:cNvPr id="54" name="TextBox 53"/>
+          <p:cNvPr id="68" name="TextBox 67"/>
           <p:cNvSpPr txBox="1"/>
           <p:nvPr/>
         </p:nvSpPr>
         <p:spPr>
           <a:xfrm>
-            <a:off x="7178040" y="2331720"/>
-            <a:ext cx="969264" cy="621792"/>
+            <a:off x="2359152" y="4443983"/>
+            <a:ext cx="987552" cy="329184"/>
           </a:xfrm>
           <a:prstGeom prst="rect">
             <a:avLst/>
@@ -13361,54 +13784,77 @@
           <a:p>
             <a:pPr algn="l">
               <a:spcAft>
+                <a:spcPts val="300"/>
+              </a:spcAft>
+            </a:pPr>
+            <a:r>
+              <a:rPr sz="840" b="1" i="0">
+                <a:solidFill>
+                  <a:srgbClr val="172131"/>
+                </a:solidFill>
+                <a:latin typeface="Calibri"/>
+              </a:rPr>
+              <a:t>Colour DNA</a:t>
+            </a:r>
+          </a:p>
+        </p:txBody>
+      </p:sp>
+      <p:sp>
+        <p:nvSpPr>
+          <p:cNvPr id="69" name="TextBox 68"/>
+          <p:cNvSpPr txBox="1"/>
+          <p:nvPr/>
+        </p:nvSpPr>
+        <p:spPr>
+          <a:xfrm>
+            <a:off x="2029968" y="4773168"/>
+            <a:ext cx="1298448" cy="301752"/>
+          </a:xfrm>
+          <a:prstGeom prst="rect">
+            <a:avLst/>
+          </a:prstGeom>
+          <a:noFill/>
+        </p:spPr>
+        <p:txBody>
+          <a:bodyPr wrap="square" anchor="t" lIns="36576" rIns="36576" tIns="18288" bIns="18288">
+            <a:spAutoFit/>
+          </a:bodyPr>
+          <a:lstStyle/>
+          <a:p>
+            <a:pPr algn="l">
+              <a:spcAft>
                 <a:spcPts val="0"/>
               </a:spcAft>
             </a:pPr>
             <a:r>
-              <a:rPr sz="950" b="1" i="0">
-                <a:solidFill>
-                  <a:srgbClr val="172131"/>
-                </a:solidFill>
-                <a:latin typeface="Calibri"/>
-              </a:rPr>
-              <a:t>Tutor</a:t>
-            </a:r>
-          </a:p>
-          <a:p>
-            <a:pPr algn="l">
-              <a:spcAft>
-                <a:spcPts val="0"/>
-              </a:spcAft>
-            </a:pPr>
-            <a:r>
-              <a:rPr sz="800" b="0" i="0">
+              <a:rPr sz="760" b="0" i="0">
                 <a:solidFill>
                   <a:srgbClr val="555F6D"/>
                 </a:solidFill>
                 <a:latin typeface="Calibri"/>
               </a:rPr>
-              <a:t>answers from the deck</a:t>
+              <a:t>source palette → theme</a:t>
             </a:r>
           </a:p>
         </p:txBody>
       </p:sp>
       <p:cxnSp>
         <p:nvCxnSpPr>
-          <p:cNvPr id="55" name="Connector 54"/>
+          <p:cNvPr id="70" name="Connector 69"/>
           <p:cNvCxnSpPr/>
           <p:nvPr/>
         </p:nvCxnSpPr>
         <p:spPr>
           <a:xfrm>
-            <a:off x="4270248" y="3044952"/>
-            <a:ext cx="0" cy="82296"/>
+            <a:off x="3429000" y="3200400"/>
+            <a:ext cx="164592" cy="0"/>
           </a:xfrm>
           <a:prstGeom prst="line">
             <a:avLst/>
           </a:prstGeom>
-          <a:ln w="25400">
+          <a:ln w="28575">
             <a:solidFill>
-              <a:srgbClr val="0E7C86"/>
+              <a:srgbClr val="172131"/>
             </a:solidFill>
             <a:tailEnd type="triangle"/>
           </a:ln>
@@ -13430,18 +13876,57 @@
       </p:cxnSp>
       <p:sp>
         <p:nvSpPr>
-          <p:cNvPr id="56" name="Rounded Rectangle 55"/>
+          <p:cNvPr id="71" name="TextBox 70"/>
+          <p:cNvSpPr txBox="1"/>
+          <p:nvPr/>
+        </p:nvSpPr>
+        <p:spPr>
+          <a:xfrm>
+            <a:off x="3310128" y="2926080"/>
+            <a:ext cx="402336" cy="237744"/>
+          </a:xfrm>
+          <a:prstGeom prst="rect">
+            <a:avLst/>
+          </a:prstGeom>
+          <a:noFill/>
+        </p:spPr>
+        <p:txBody>
+          <a:bodyPr wrap="square" anchor="t" lIns="36576" rIns="36576" tIns="18288" bIns="18288">
+            <a:spAutoFit/>
+          </a:bodyPr>
+          <a:lstStyle/>
+          <a:p>
+            <a:pPr algn="ctr">
+              <a:spcAft>
+                <a:spcPts val="300"/>
+              </a:spcAft>
+            </a:pPr>
+            <a:r>
+              <a:rPr sz="680" b="0" i="1">
+                <a:solidFill>
+                  <a:srgbClr val="172131"/>
+                </a:solidFill>
+                <a:latin typeface="Calibri"/>
+              </a:rPr>
+              <a:t>plan</a:t>
+            </a:r>
+          </a:p>
+        </p:txBody>
+      </p:sp>
+      <p:sp>
+        <p:nvSpPr>
+          <p:cNvPr id="72" name="Rounded Rectangle 71"/>
           <p:cNvSpPr/>
           <p:nvPr/>
         </p:nvSpPr>
         <p:spPr>
           <a:xfrm>
-            <a:off x="274320" y="3127248"/>
-            <a:ext cx="8001000" cy="1024128"/>
+            <a:off x="3602736" y="1261872"/>
+            <a:ext cx="1481328" cy="3904487"/>
           </a:xfrm>
           <a:prstGeom prst="roundRect">
             <a:avLst>
-              <a:gd name="adj" fmla="val 6000"/>
+              <a:gd name="adj" fmla="val 5000"/>
             </a:avLst>
           </a:prstGeom>
           <a:solidFill>
@@ -13478,14 +13963,60 @@
       </p:sp>
       <p:sp>
         <p:nvSpPr>
-          <p:cNvPr id="57" name="TextBox 56"/>
+          <p:cNvPr id="73" name="Rounded Rectangle 72"/>
+          <p:cNvSpPr/>
+          <p:nvPr/>
+        </p:nvSpPr>
+        <p:spPr>
+          <a:xfrm>
+            <a:off x="3712463" y="1207008"/>
+            <a:ext cx="1261872" cy="219456"/>
+          </a:xfrm>
+          <a:prstGeom prst="roundRect">
+            <a:avLst>
+              <a:gd name="adj" fmla="val 50000"/>
+            </a:avLst>
+          </a:prstGeom>
+          <a:solidFill>
+            <a:srgbClr val="F27A2E"/>
+          </a:solidFill>
+          <a:ln>
+            <a:noFill/>
+          </a:ln>
+          <a:effectLst/>
+        </p:spPr>
+        <p:style>
+          <a:lnRef idx="1">
+            <a:schemeClr val="accent1"/>
+          </a:lnRef>
+          <a:fillRef idx="3">
+            <a:schemeClr val="accent1"/>
+          </a:fillRef>
+          <a:effectRef idx="2">
+            <a:schemeClr val="accent1"/>
+          </a:effectRef>
+          <a:fontRef idx="minor">
+            <a:schemeClr val="lt1"/>
+          </a:fontRef>
+        </p:style>
+        <p:txBody>
+          <a:bodyPr rtlCol="0" anchor="ctr"/>
+          <a:lstStyle/>
+          <a:p>
+            <a:pPr algn="ctr"/>
+          </a:p>
+        </p:txBody>
+      </p:sp>
+      <p:sp>
+        <p:nvSpPr>
+          <p:cNvPr id="74" name="TextBox 73"/>
           <p:cNvSpPr txBox="1"/>
           <p:nvPr/>
         </p:nvSpPr>
         <p:spPr>
           <a:xfrm>
-            <a:off x="365760" y="3145536"/>
-            <a:ext cx="3657600" cy="256032"/>
+            <a:off x="3712463" y="1207008"/>
+            <a:ext cx="1261872" cy="219456"/>
           </a:xfrm>
           <a:prstGeom prst="rect">
             <a:avLst/>
@@ -13493,38 +14024,38 @@
           <a:noFill/>
         </p:spPr>
         <p:txBody>
-          <a:bodyPr wrap="square" anchor="t" lIns="36576" rIns="36576" tIns="18288" bIns="18288">
+          <a:bodyPr wrap="square" anchor="ctr" lIns="36576" rIns="36576" tIns="18288" bIns="18288">
             <a:spAutoFit/>
           </a:bodyPr>
           <a:lstStyle/>
           <a:p>
-            <a:pPr algn="l">
+            <a:pPr algn="ctr">
               <a:spcAft>
                 <a:spcPts val="300"/>
               </a:spcAft>
             </a:pPr>
             <a:r>
-              <a:rPr sz="1100" b="1" i="0">
-                <a:solidFill>
-                  <a:srgbClr val="F27A2E"/>
-                </a:solidFill>
-                <a:latin typeface="Montserrat"/>
-              </a:rPr>
-              <a:t>3  Processing pipeline</a:t>
-            </a:r>
-          </a:p>
-        </p:txBody>
-      </p:sp>
-      <p:sp>
-        <p:nvSpPr>
-          <p:cNvPr id="58" name="Rounded Rectangle 57"/>
+              <a:rPr sz="900" b="1" i="0">
+                <a:solidFill>
+                  <a:srgbClr val="FFFFFF"/>
+                </a:solidFill>
+                <a:latin typeface="Calibri"/>
+              </a:rPr>
+              <a:t>ENGINES</a:t>
+            </a:r>
+          </a:p>
+        </p:txBody>
+      </p:sp>
+      <p:sp>
+        <p:nvSpPr>
+          <p:cNvPr id="75" name="Rounded Rectangle 74"/>
           <p:cNvSpPr/>
           <p:nvPr/>
         </p:nvSpPr>
         <p:spPr>
           <a:xfrm>
-            <a:off x="384048" y="3419856"/>
-            <a:ext cx="1481328" cy="658368"/>
+            <a:off x="3666744" y="1499616"/>
+            <a:ext cx="1353312" cy="658368"/>
           </a:xfrm>
           <a:prstGeom prst="roundRect">
             <a:avLst>
@@ -13565,14 +14096,14 @@
       </p:sp>
       <p:sp>
         <p:nvSpPr>
-          <p:cNvPr id="59" name="Oval 58"/>
+          <p:cNvPr id="76" name="Oval 75"/>
           <p:cNvSpPr/>
           <p:nvPr/>
         </p:nvSpPr>
         <p:spPr>
           <a:xfrm>
-            <a:off x="438912" y="3538728"/>
-            <a:ext cx="420624" cy="420624"/>
+            <a:off x="3703320" y="1554480"/>
+            <a:ext cx="292608" cy="292608"/>
           </a:xfrm>
           <a:prstGeom prst="ellipse">
             <a:avLst/>
@@ -13609,7 +14140,7 @@
       </p:sp>
       <p:pic>
         <p:nvPicPr>
-          <p:cNvPr id="60" name="Picture 59" descr="image.png"/>
+          <p:cNvPr id="77" name="Picture 76" descr="image.png"/>
           <p:cNvPicPr>
             <a:picLocks noChangeAspect="1"/>
           </p:cNvPicPr>
@@ -13623,8 +14154,8 @@
         </p:blipFill>
         <p:spPr>
           <a:xfrm>
-            <a:off x="523036" y="3622852"/>
-            <a:ext cx="252374" cy="252374"/>
+            <a:off x="3761841" y="1613001"/>
+            <a:ext cx="175564" cy="175564"/>
           </a:xfrm>
           <a:prstGeom prst="rect">
             <a:avLst/>
@@ -13633,14 +14164,14 @@
       </p:pic>
       <p:sp>
         <p:nvSpPr>
-          <p:cNvPr id="61" name="TextBox 60"/>
+          <p:cNvPr id="78" name="TextBox 77"/>
           <p:cNvSpPr txBox="1"/>
           <p:nvPr/>
         </p:nvSpPr>
         <p:spPr>
           <a:xfrm>
-            <a:off x="886968" y="3438144"/>
-            <a:ext cx="969264" cy="621792"/>
+            <a:off x="4023360" y="1517904"/>
+            <a:ext cx="987552" cy="329184"/>
           </a:xfrm>
           <a:prstGeom prst="rect">
             <a:avLst/>
@@ -13655,47 +14186,70 @@
           <a:p>
             <a:pPr algn="l">
               <a:spcAft>
+                <a:spcPts val="300"/>
+              </a:spcAft>
+            </a:pPr>
+            <a:r>
+              <a:rPr sz="840" b="1" i="0">
+                <a:solidFill>
+                  <a:srgbClr val="172131"/>
+                </a:solidFill>
+                <a:latin typeface="Calibri"/>
+              </a:rPr>
+              <a:t>Planner</a:t>
+            </a:r>
+          </a:p>
+        </p:txBody>
+      </p:sp>
+      <p:sp>
+        <p:nvSpPr>
+          <p:cNvPr id="79" name="TextBox 78"/>
+          <p:cNvSpPr txBox="1"/>
+          <p:nvPr/>
+        </p:nvSpPr>
+        <p:spPr>
+          <a:xfrm>
+            <a:off x="3694176" y="1847088"/>
+            <a:ext cx="1298448" cy="301752"/>
+          </a:xfrm>
+          <a:prstGeom prst="rect">
+            <a:avLst/>
+          </a:prstGeom>
+          <a:noFill/>
+        </p:spPr>
+        <p:txBody>
+          <a:bodyPr wrap="square" anchor="t" lIns="36576" rIns="36576" tIns="18288" bIns="18288">
+            <a:spAutoFit/>
+          </a:bodyPr>
+          <a:lstStyle/>
+          <a:p>
+            <a:pPr algn="l">
+              <a:spcAft>
                 <a:spcPts val="0"/>
               </a:spcAft>
             </a:pPr>
             <a:r>
-              <a:rPr sz="950" b="1" i="0">
-                <a:solidFill>
-                  <a:srgbClr val="172131"/>
-                </a:solidFill>
-                <a:latin typeface="Calibri"/>
-              </a:rPr>
-              <a:t>Reader + OCR</a:t>
-            </a:r>
-          </a:p>
-          <a:p>
-            <a:pPr algn="l">
-              <a:spcAft>
-                <a:spcPts val="0"/>
-              </a:spcAft>
-            </a:pPr>
-            <a:r>
-              <a:rPr sz="800" b="0" i="0">
+              <a:rPr sz="760" b="0" i="0">
                 <a:solidFill>
                   <a:srgbClr val="555F6D"/>
                 </a:solidFill>
                 <a:latin typeface="Calibri"/>
               </a:rPr>
-              <a:t>PDF/PPTX/DOCX, Tesseract</a:t>
-            </a:r>
-          </a:p>
-        </p:txBody>
-      </p:sp>
-      <p:sp>
-        <p:nvSpPr>
-          <p:cNvPr id="62" name="Rounded Rectangle 61"/>
+              <a:t>split · merge · agenda · glossary</a:t>
+            </a:r>
+          </a:p>
+        </p:txBody>
+      </p:sp>
+      <p:sp>
+        <p:nvSpPr>
+          <p:cNvPr id="80" name="Rounded Rectangle 79"/>
           <p:cNvSpPr/>
           <p:nvPr/>
         </p:nvSpPr>
         <p:spPr>
           <a:xfrm>
-            <a:off x="1956816" y="3419856"/>
-            <a:ext cx="1481328" cy="658368"/>
+            <a:off x="3666744" y="2231136"/>
+            <a:ext cx="1353312" cy="658368"/>
           </a:xfrm>
           <a:prstGeom prst="roundRect">
             <a:avLst>
@@ -13736,14 +14290,14 @@
       </p:sp>
       <p:sp>
         <p:nvSpPr>
-          <p:cNvPr id="63" name="Oval 62"/>
+          <p:cNvPr id="81" name="Oval 80"/>
           <p:cNvSpPr/>
           <p:nvPr/>
         </p:nvSpPr>
         <p:spPr>
           <a:xfrm>
-            <a:off x="2011680" y="3538728"/>
-            <a:ext cx="420624" cy="420624"/>
+            <a:off x="3703320" y="2286000"/>
+            <a:ext cx="292608" cy="292608"/>
           </a:xfrm>
           <a:prstGeom prst="ellipse">
             <a:avLst/>
@@ -13780,7 +14334,7 @@
       </p:sp>
       <p:pic>
         <p:nvPicPr>
-          <p:cNvPr id="64" name="Picture 63" descr="image.png"/>
+          <p:cNvPr id="82" name="Picture 81" descr="image.png"/>
           <p:cNvPicPr>
             <a:picLocks noChangeAspect="1"/>
           </p:cNvPicPr>
@@ -13794,8 +14348,8 @@
         </p:blipFill>
         <p:spPr>
           <a:xfrm>
-            <a:off x="2095804" y="3622852"/>
-            <a:ext cx="252374" cy="252374"/>
+            <a:off x="3761841" y="2344521"/>
+            <a:ext cx="175564" cy="175564"/>
           </a:xfrm>
           <a:prstGeom prst="rect">
             <a:avLst/>
@@ -13804,14 +14358,14 @@
       </p:pic>
       <p:sp>
         <p:nvSpPr>
-          <p:cNvPr id="65" name="TextBox 64"/>
+          <p:cNvPr id="83" name="TextBox 82"/>
           <p:cNvSpPr txBox="1"/>
           <p:nvPr/>
         </p:nvSpPr>
         <p:spPr>
           <a:xfrm>
-            <a:off x="2459736" y="3438144"/>
-            <a:ext cx="969264" cy="621792"/>
+            <a:off x="4023360" y="2249424"/>
+            <a:ext cx="987552" cy="329184"/>
           </a:xfrm>
           <a:prstGeom prst="rect">
             <a:avLst/>
@@ -13826,47 +14380,70 @@
           <a:p>
             <a:pPr algn="l">
               <a:spcAft>
+                <a:spcPts val="300"/>
+              </a:spcAft>
+            </a:pPr>
+            <a:r>
+              <a:rPr sz="840" b="1" i="0">
+                <a:solidFill>
+                  <a:srgbClr val="172131"/>
+                </a:solidFill>
+                <a:latin typeface="Calibri"/>
+              </a:rPr>
+              <a:t>Decision engine</a:t>
+            </a:r>
+          </a:p>
+        </p:txBody>
+      </p:sp>
+      <p:sp>
+        <p:nvSpPr>
+          <p:cNvPr id="84" name="TextBox 83"/>
+          <p:cNvSpPr txBox="1"/>
+          <p:nvPr/>
+        </p:nvSpPr>
+        <p:spPr>
+          <a:xfrm>
+            <a:off x="3694176" y="2578608"/>
+            <a:ext cx="1298448" cy="301752"/>
+          </a:xfrm>
+          <a:prstGeom prst="rect">
+            <a:avLst/>
+          </a:prstGeom>
+          <a:noFill/>
+        </p:spPr>
+        <p:txBody>
+          <a:bodyPr wrap="square" anchor="t" lIns="36576" rIns="36576" tIns="18288" bIns="18288">
+            <a:spAutoFit/>
+          </a:bodyPr>
+          <a:lstStyle/>
+          <a:p>
+            <a:pPr algn="l">
+              <a:spcAft>
                 <a:spcPts val="0"/>
               </a:spcAft>
             </a:pPr>
             <a:r>
-              <a:rPr sz="950" b="1" i="0">
-                <a:solidFill>
-                  <a:srgbClr val="172131"/>
-                </a:solidFill>
-                <a:latin typeface="Calibri"/>
-              </a:rPr>
-              <a:t>Planner</a:t>
-            </a:r>
-          </a:p>
-          <a:p>
-            <a:pPr algn="l">
-              <a:spcAft>
-                <a:spcPts val="0"/>
-              </a:spcAft>
-            </a:pPr>
-            <a:r>
-              <a:rPr sz="800" b="0" i="0">
+              <a:rPr sz="760" b="0" i="0">
                 <a:solidFill>
                   <a:srgbClr val="555F6D"/>
                 </a:solidFill>
                 <a:latin typeface="Calibri"/>
               </a:rPr>
-              <a:t>split · merge · agenda · quiz</a:t>
-            </a:r>
-          </a:p>
-        </p:txBody>
-      </p:sp>
-      <p:sp>
-        <p:nvSpPr>
-          <p:cNvPr id="66" name="Rounded Rectangle 65"/>
+              <a:t>27 detectors, reason + score</a:t>
+            </a:r>
+          </a:p>
+        </p:txBody>
+      </p:sp>
+      <p:sp>
+        <p:nvSpPr>
+          <p:cNvPr id="85" name="Rounded Rectangle 84"/>
           <p:cNvSpPr/>
           <p:nvPr/>
         </p:nvSpPr>
         <p:spPr>
           <a:xfrm>
-            <a:off x="3529584" y="3419856"/>
-            <a:ext cx="1481328" cy="658368"/>
+            <a:off x="3666744" y="2962656"/>
+            <a:ext cx="1353312" cy="658368"/>
           </a:xfrm>
           <a:prstGeom prst="roundRect">
             <a:avLst>
@@ -13907,14 +14484,14 @@
       </p:sp>
       <p:sp>
         <p:nvSpPr>
-          <p:cNvPr id="67" name="Oval 66"/>
+          <p:cNvPr id="86" name="Oval 85"/>
           <p:cNvSpPr/>
           <p:nvPr/>
         </p:nvSpPr>
         <p:spPr>
           <a:xfrm>
-            <a:off x="3584448" y="3538728"/>
-            <a:ext cx="420624" cy="420624"/>
+            <a:off x="3703320" y="3017520"/>
+            <a:ext cx="292608" cy="292608"/>
           </a:xfrm>
           <a:prstGeom prst="ellipse">
             <a:avLst/>
@@ -13951,7 +14528,7 @@
       </p:sp>
       <p:pic>
         <p:nvPicPr>
-          <p:cNvPr id="68" name="Picture 67" descr="image.png"/>
+          <p:cNvPr id="87" name="Picture 86" descr="image.png"/>
           <p:cNvPicPr>
             <a:picLocks noChangeAspect="1"/>
           </p:cNvPicPr>
@@ -13965,8 +14542,8 @@
         </p:blipFill>
         <p:spPr>
           <a:xfrm>
-            <a:off x="3668572" y="3622852"/>
-            <a:ext cx="252374" cy="252374"/>
+            <a:off x="3761841" y="3076041"/>
+            <a:ext cx="175564" cy="175564"/>
           </a:xfrm>
           <a:prstGeom prst="rect">
             <a:avLst/>
@@ -13975,14 +14552,14 @@
       </p:pic>
       <p:sp>
         <p:nvSpPr>
-          <p:cNvPr id="69" name="TextBox 68"/>
+          <p:cNvPr id="88" name="TextBox 87"/>
           <p:cNvSpPr txBox="1"/>
           <p:nvPr/>
         </p:nvSpPr>
         <p:spPr>
           <a:xfrm>
-            <a:off x="4032504" y="3438144"/>
-            <a:ext cx="969264" cy="621792"/>
+            <a:off x="4023360" y="2980944"/>
+            <a:ext cx="987552" cy="329184"/>
           </a:xfrm>
           <a:prstGeom prst="rect">
             <a:avLst/>
@@ -13997,47 +14574,70 @@
           <a:p>
             <a:pPr algn="l">
               <a:spcAft>
+                <a:spcPts val="300"/>
+              </a:spcAft>
+            </a:pPr>
+            <a:r>
+              <a:rPr sz="840" b="1" i="0">
+                <a:solidFill>
+                  <a:srgbClr val="172131"/>
+                </a:solidFill>
+                <a:latin typeface="Calibri"/>
+              </a:rPr>
+              <a:t>Layout engine</a:t>
+            </a:r>
+          </a:p>
+        </p:txBody>
+      </p:sp>
+      <p:sp>
+        <p:nvSpPr>
+          <p:cNvPr id="89" name="TextBox 88"/>
+          <p:cNvSpPr txBox="1"/>
+          <p:nvPr/>
+        </p:nvSpPr>
+        <p:spPr>
+          <a:xfrm>
+            <a:off x="3694176" y="3310128"/>
+            <a:ext cx="1298448" cy="301752"/>
+          </a:xfrm>
+          <a:prstGeom prst="rect">
+            <a:avLst/>
+          </a:prstGeom>
+          <a:noFill/>
+        </p:spPr>
+        <p:txBody>
+          <a:bodyPr wrap="square" anchor="t" lIns="36576" rIns="36576" tIns="18288" bIns="18288">
+            <a:spAutoFit/>
+          </a:bodyPr>
+          <a:lstStyle/>
+          <a:p>
+            <a:pPr algn="l">
+              <a:spcAft>
                 <a:spcPts val="0"/>
               </a:spcAft>
             </a:pPr>
             <a:r>
-              <a:rPr sz="950" b="1" i="0">
-                <a:solidFill>
-                  <a:srgbClr val="172131"/>
-                </a:solidFill>
-                <a:latin typeface="Calibri"/>
-              </a:rPr>
-              <a:t>Decision engine</a:t>
-            </a:r>
-          </a:p>
-          <a:p>
-            <a:pPr algn="l">
-              <a:spcAft>
-                <a:spcPts val="0"/>
-              </a:spcAft>
-            </a:pPr>
-            <a:r>
-              <a:rPr sz="800" b="0" i="0">
+              <a:rPr sz="760" b="0" i="0">
                 <a:solidFill>
                   <a:srgbClr val="555F6D"/>
                 </a:solidFill>
                 <a:latin typeface="Calibri"/>
               </a:rPr>
-              <a:t>27 detectors, reasons</a:t>
-            </a:r>
-          </a:p>
-        </p:txBody>
-      </p:sp>
-      <p:sp>
-        <p:nvSpPr>
-          <p:cNvPr id="70" name="Rounded Rectangle 69"/>
+              <a:t>glyph-measured, no broken words</a:t>
+            </a:r>
+          </a:p>
+        </p:txBody>
+      </p:sp>
+      <p:sp>
+        <p:nvSpPr>
+          <p:cNvPr id="90" name="Rounded Rectangle 89"/>
           <p:cNvSpPr/>
           <p:nvPr/>
         </p:nvSpPr>
         <p:spPr>
           <a:xfrm>
-            <a:off x="5102352" y="3419856"/>
-            <a:ext cx="1481328" cy="658368"/>
+            <a:off x="3666744" y="3694176"/>
+            <a:ext cx="1353312" cy="658368"/>
           </a:xfrm>
           <a:prstGeom prst="roundRect">
             <a:avLst>
@@ -14078,14 +14678,14 @@
       </p:sp>
       <p:sp>
         <p:nvSpPr>
-          <p:cNvPr id="71" name="Oval 70"/>
+          <p:cNvPr id="91" name="Oval 90"/>
           <p:cNvSpPr/>
           <p:nvPr/>
         </p:nvSpPr>
         <p:spPr>
           <a:xfrm>
-            <a:off x="5157216" y="3538728"/>
-            <a:ext cx="420624" cy="420624"/>
+            <a:off x="3703320" y="3749039"/>
+            <a:ext cx="292608" cy="292608"/>
           </a:xfrm>
           <a:prstGeom prst="ellipse">
             <a:avLst/>
@@ -14122,7 +14722,7 @@
       </p:sp>
       <p:pic>
         <p:nvPicPr>
-          <p:cNvPr id="72" name="Picture 71" descr="image.png"/>
+          <p:cNvPr id="92" name="Picture 91" descr="image.png"/>
           <p:cNvPicPr>
             <a:picLocks noChangeAspect="1"/>
           </p:cNvPicPr>
@@ -14136,8 +14736,8 @@
         </p:blipFill>
         <p:spPr>
           <a:xfrm>
-            <a:off x="5241340" y="3622852"/>
-            <a:ext cx="252374" cy="252374"/>
+            <a:off x="3761841" y="3807561"/>
+            <a:ext cx="175564" cy="175564"/>
           </a:xfrm>
           <a:prstGeom prst="rect">
             <a:avLst/>
@@ -14146,14 +14746,14 @@
       </p:pic>
       <p:sp>
         <p:nvSpPr>
-          <p:cNvPr id="73" name="TextBox 72"/>
+          <p:cNvPr id="93" name="TextBox 92"/>
           <p:cNvSpPr txBox="1"/>
           <p:nvPr/>
         </p:nvSpPr>
         <p:spPr>
           <a:xfrm>
-            <a:off x="5605272" y="3438144"/>
-            <a:ext cx="969264" cy="621792"/>
+            <a:off x="4023360" y="3712463"/>
+            <a:ext cx="987552" cy="329184"/>
           </a:xfrm>
           <a:prstGeom prst="rect">
             <a:avLst/>
@@ -14168,47 +14768,70 @@
           <a:p>
             <a:pPr algn="l">
               <a:spcAft>
+                <a:spcPts val="300"/>
+              </a:spcAft>
+            </a:pPr>
+            <a:r>
+              <a:rPr sz="840" b="1" i="0">
+                <a:solidFill>
+                  <a:srgbClr val="172131"/>
+                </a:solidFill>
+                <a:latin typeface="Calibri"/>
+              </a:rPr>
+              <a:t>Explainer solvers</a:t>
+            </a:r>
+          </a:p>
+        </p:txBody>
+      </p:sp>
+      <p:sp>
+        <p:nvSpPr>
+          <p:cNvPr id="94" name="TextBox 93"/>
+          <p:cNvSpPr txBox="1"/>
+          <p:nvPr/>
+        </p:nvSpPr>
+        <p:spPr>
+          <a:xfrm>
+            <a:off x="3694176" y="4041648"/>
+            <a:ext cx="1298448" cy="301752"/>
+          </a:xfrm>
+          <a:prstGeom prst="rect">
+            <a:avLst/>
+          </a:prstGeom>
+          <a:noFill/>
+        </p:spPr>
+        <p:txBody>
+          <a:bodyPr wrap="square" anchor="t" lIns="36576" rIns="36576" tIns="18288" bIns="18288">
+            <a:spAutoFit/>
+          </a:bodyPr>
+          <a:lstStyle/>
+          <a:p>
+            <a:pPr algn="l">
+              <a:spcAft>
                 <a:spcPts val="0"/>
               </a:spcAft>
             </a:pPr>
             <a:r>
-              <a:rPr sz="950" b="1" i="0">
-                <a:solidFill>
-                  <a:srgbClr val="172131"/>
-                </a:solidFill>
-                <a:latin typeface="Calibri"/>
-              </a:rPr>
-              <a:t>Layout engine</a:t>
-            </a:r>
-          </a:p>
-          <a:p>
-            <a:pPr algn="l">
-              <a:spcAft>
-                <a:spcPts val="0"/>
-              </a:spcAft>
-            </a:pPr>
-            <a:r>
-              <a:rPr sz="800" b="0" i="0">
+              <a:rPr sz="760" b="0" i="0">
                 <a:solidFill>
                   <a:srgbClr val="555F6D"/>
                 </a:solidFill>
                 <a:latin typeface="Calibri"/>
               </a:rPr>
-              <a:t>glyph-measured fitting</a:t>
-            </a:r>
-          </a:p>
-        </p:txBody>
-      </p:sp>
-      <p:sp>
-        <p:nvSpPr>
-          <p:cNvPr id="74" name="Rounded Rectangle 73"/>
+              <a:t>exact step-by-step (SymPy)</a:t>
+            </a:r>
+          </a:p>
+        </p:txBody>
+      </p:sp>
+      <p:sp>
+        <p:nvSpPr>
+          <p:cNvPr id="95" name="Rounded Rectangle 94"/>
           <p:cNvSpPr/>
           <p:nvPr/>
         </p:nvSpPr>
         <p:spPr>
           <a:xfrm>
-            <a:off x="6675120" y="3419856"/>
-            <a:ext cx="1481328" cy="658368"/>
+            <a:off x="3666744" y="4425696"/>
+            <a:ext cx="1353312" cy="658368"/>
           </a:xfrm>
           <a:prstGeom prst="roundRect">
             <a:avLst>
@@ -14249,14 +14872,14 @@
       </p:sp>
       <p:sp>
         <p:nvSpPr>
-          <p:cNvPr id="75" name="Oval 74"/>
+          <p:cNvPr id="96" name="Oval 95"/>
           <p:cNvSpPr/>
           <p:nvPr/>
         </p:nvSpPr>
         <p:spPr>
           <a:xfrm>
-            <a:off x="6729983" y="3538728"/>
-            <a:ext cx="420624" cy="420624"/>
+            <a:off x="3703320" y="4480559"/>
+            <a:ext cx="292608" cy="292608"/>
           </a:xfrm>
           <a:prstGeom prst="ellipse">
             <a:avLst/>
@@ -14293,7 +14916,7 @@
       </p:sp>
       <p:pic>
         <p:nvPicPr>
-          <p:cNvPr id="76" name="Picture 75" descr="image.png"/>
+          <p:cNvPr id="97" name="Picture 96" descr="image.png"/>
           <p:cNvPicPr>
             <a:picLocks noChangeAspect="1"/>
           </p:cNvPicPr>
@@ -14307,8 +14930,8 @@
         </p:blipFill>
         <p:spPr>
           <a:xfrm>
-            <a:off x="6814108" y="3622852"/>
-            <a:ext cx="252374" cy="252374"/>
+            <a:off x="3761841" y="4539081"/>
+            <a:ext cx="175564" cy="175564"/>
           </a:xfrm>
           <a:prstGeom prst="rect">
             <a:avLst/>
@@ -14317,14 +14940,14 @@
       </p:pic>
       <p:sp>
         <p:nvSpPr>
-          <p:cNvPr id="77" name="TextBox 76"/>
+          <p:cNvPr id="98" name="TextBox 97"/>
           <p:cNvSpPr txBox="1"/>
           <p:nvPr/>
         </p:nvSpPr>
         <p:spPr>
           <a:xfrm>
-            <a:off x="7178040" y="3438144"/>
-            <a:ext cx="969264" cy="621792"/>
+            <a:off x="4023360" y="4443983"/>
+            <a:ext cx="987552" cy="329184"/>
           </a:xfrm>
           <a:prstGeom prst="rect">
             <a:avLst/>
@@ -14339,54 +14962,77 @@
           <a:p>
             <a:pPr algn="l">
               <a:spcAft>
+                <a:spcPts val="300"/>
+              </a:spcAft>
+            </a:pPr>
+            <a:r>
+              <a:rPr sz="840" b="1" i="0">
+                <a:solidFill>
+                  <a:srgbClr val="172131"/>
+                </a:solidFill>
+                <a:latin typeface="Calibri"/>
+              </a:rPr>
+              <a:t>Quiz + lab selector</a:t>
+            </a:r>
+          </a:p>
+        </p:txBody>
+      </p:sp>
+      <p:sp>
+        <p:nvSpPr>
+          <p:cNvPr id="99" name="TextBox 98"/>
+          <p:cNvSpPr txBox="1"/>
+          <p:nvPr/>
+        </p:nvSpPr>
+        <p:spPr>
+          <a:xfrm>
+            <a:off x="3694176" y="4773168"/>
+            <a:ext cx="1298448" cy="301752"/>
+          </a:xfrm>
+          <a:prstGeom prst="rect">
+            <a:avLst/>
+          </a:prstGeom>
+          <a:noFill/>
+        </p:spPr>
+        <p:txBody>
+          <a:bodyPr wrap="square" anchor="t" lIns="36576" rIns="36576" tIns="18288" bIns="18288">
+            <a:spAutoFit/>
+          </a:bodyPr>
+          <a:lstStyle/>
+          <a:p>
+            <a:pPr algn="l">
+              <a:spcAft>
                 <a:spcPts val="0"/>
               </a:spcAft>
             </a:pPr>
             <a:r>
-              <a:rPr sz="950" b="1" i="0">
-                <a:solidFill>
-                  <a:srgbClr val="172131"/>
-                </a:solidFill>
-                <a:latin typeface="Calibri"/>
-              </a:rPr>
-              <a:t>Audit</a:t>
-            </a:r>
-          </a:p>
-          <a:p>
-            <a:pPr algn="l">
-              <a:spcAft>
-                <a:spcPts val="0"/>
-              </a:spcAft>
-            </a:pPr>
-            <a:r>
-              <a:rPr sz="800" b="0" i="0">
+              <a:rPr sz="760" b="0" i="0">
                 <a:solidFill>
                   <a:srgbClr val="555F6D"/>
                 </a:solidFill>
                 <a:latin typeface="Calibri"/>
               </a:rPr>
-              <a:t>overflow · breaks · facts</a:t>
+              <a:t>checkpoints, one lab per topic</a:t>
             </a:r>
           </a:p>
         </p:txBody>
       </p:sp>
       <p:cxnSp>
         <p:nvCxnSpPr>
-          <p:cNvPr id="78" name="Connector 77"/>
+          <p:cNvPr id="100" name="Connector 99"/>
           <p:cNvCxnSpPr/>
           <p:nvPr/>
         </p:nvCxnSpPr>
         <p:spPr>
           <a:xfrm>
-            <a:off x="4270248" y="4151376"/>
-            <a:ext cx="0" cy="82296"/>
+            <a:off x="5093208" y="3200400"/>
+            <a:ext cx="164592" cy="0"/>
           </a:xfrm>
           <a:prstGeom prst="line">
             <a:avLst/>
           </a:prstGeom>
-          <a:ln w="25400">
+          <a:ln w="28575">
             <a:solidFill>
-              <a:srgbClr val="F27A2E"/>
+              <a:srgbClr val="172131"/>
             </a:solidFill>
             <a:tailEnd type="triangle"/>
           </a:ln>
@@ -14408,18 +15054,57 @@
       </p:cxnSp>
       <p:sp>
         <p:nvSpPr>
-          <p:cNvPr id="79" name="Rounded Rectangle 78"/>
+          <p:cNvPr id="101" name="TextBox 100"/>
+          <p:cNvSpPr txBox="1"/>
+          <p:nvPr/>
+        </p:nvSpPr>
+        <p:spPr>
+          <a:xfrm>
+            <a:off x="4974336" y="2926080"/>
+            <a:ext cx="402336" cy="237744"/>
+          </a:xfrm>
+          <a:prstGeom prst="rect">
+            <a:avLst/>
+          </a:prstGeom>
+          <a:noFill/>
+        </p:spPr>
+        <p:txBody>
+          <a:bodyPr wrap="square" anchor="t" lIns="36576" rIns="36576" tIns="18288" bIns="18288">
+            <a:spAutoFit/>
+          </a:bodyPr>
+          <a:lstStyle/>
+          <a:p>
+            <a:pPr algn="ctr">
+              <a:spcAft>
+                <a:spcPts val="300"/>
+              </a:spcAft>
+            </a:pPr>
+            <a:r>
+              <a:rPr sz="680" b="0" i="1">
+                <a:solidFill>
+                  <a:srgbClr val="172131"/>
+                </a:solidFill>
+                <a:latin typeface="Calibri"/>
+              </a:rPr>
+              <a:t>calls</a:t>
+            </a:r>
+          </a:p>
+        </p:txBody>
+      </p:sp>
+      <p:sp>
+        <p:nvSpPr>
+          <p:cNvPr id="102" name="Rounded Rectangle 101"/>
           <p:cNvSpPr/>
           <p:nvPr/>
         </p:nvSpPr>
         <p:spPr>
           <a:xfrm>
-            <a:off x="274320" y="4233672"/>
-            <a:ext cx="8001000" cy="1024128"/>
+            <a:off x="5266944" y="1261872"/>
+            <a:ext cx="1481328" cy="3904487"/>
           </a:xfrm>
           <a:prstGeom prst="roundRect">
             <a:avLst>
-              <a:gd name="adj" fmla="val 6000"/>
+              <a:gd name="adj" fmla="val 5000"/>
             </a:avLst>
           </a:prstGeom>
           <a:solidFill>
@@ -14456,14 +15141,60 @@
       </p:sp>
       <p:sp>
         <p:nvSpPr>
-          <p:cNvPr id="80" name="TextBox 79"/>
+          <p:cNvPr id="103" name="Rounded Rectangle 102"/>
+          <p:cNvSpPr/>
+          <p:nvPr/>
+        </p:nvSpPr>
+        <p:spPr>
+          <a:xfrm>
+            <a:off x="5376672" y="1207008"/>
+            <a:ext cx="1261872" cy="219456"/>
+          </a:xfrm>
+          <a:prstGeom prst="roundRect">
+            <a:avLst>
+              <a:gd name="adj" fmla="val 50000"/>
+            </a:avLst>
+          </a:prstGeom>
+          <a:solidFill>
+            <a:srgbClr val="6B3FA0"/>
+          </a:solidFill>
+          <a:ln>
+            <a:noFill/>
+          </a:ln>
+          <a:effectLst/>
+        </p:spPr>
+        <p:style>
+          <a:lnRef idx="1">
+            <a:schemeClr val="accent1"/>
+          </a:lnRef>
+          <a:fillRef idx="3">
+            <a:schemeClr val="accent1"/>
+          </a:fillRef>
+          <a:effectRef idx="2">
+            <a:schemeClr val="accent1"/>
+          </a:effectRef>
+          <a:fontRef idx="minor">
+            <a:schemeClr val="lt1"/>
+          </a:fontRef>
+        </p:style>
+        <p:txBody>
+          <a:bodyPr rtlCol="0" anchor="ctr"/>
+          <a:lstStyle/>
+          <a:p>
+            <a:pPr algn="ctr"/>
+          </a:p>
+        </p:txBody>
+      </p:sp>
+      <p:sp>
+        <p:nvSpPr>
+          <p:cNvPr id="104" name="TextBox 103"/>
           <p:cNvSpPr txBox="1"/>
           <p:nvPr/>
         </p:nvSpPr>
         <p:spPr>
           <a:xfrm>
-            <a:off x="365760" y="4251959"/>
-            <a:ext cx="3657600" cy="256032"/>
+            <a:off x="5376672" y="1207008"/>
+            <a:ext cx="1261872" cy="219456"/>
           </a:xfrm>
           <a:prstGeom prst="rect">
             <a:avLst/>
@@ -14471,38 +15202,38 @@
           <a:noFill/>
         </p:spPr>
         <p:txBody>
-          <a:bodyPr wrap="square" anchor="t" lIns="36576" rIns="36576" tIns="18288" bIns="18288">
+          <a:bodyPr wrap="square" anchor="ctr" lIns="36576" rIns="36576" tIns="18288" bIns="18288">
             <a:spAutoFit/>
           </a:bodyPr>
           <a:lstStyle/>
           <a:p>
-            <a:pPr algn="l">
+            <a:pPr algn="ctr">
               <a:spcAft>
                 <a:spcPts val="300"/>
               </a:spcAft>
             </a:pPr>
             <a:r>
-              <a:rPr sz="1100" b="1" i="0">
-                <a:solidFill>
-                  <a:srgbClr val="6B3FA0"/>
-                </a:solidFill>
-                <a:latin typeface="Montserrat"/>
-              </a:rPr>
-              <a:t>4  AI layer (optional)</a:t>
-            </a:r>
-          </a:p>
-        </p:txBody>
-      </p:sp>
-      <p:sp>
-        <p:nvSpPr>
-          <p:cNvPr id="81" name="Rounded Rectangle 80"/>
+              <a:rPr sz="900" b="1" i="0">
+                <a:solidFill>
+                  <a:srgbClr val="FFFFFF"/>
+                </a:solidFill>
+                <a:latin typeface="Calibri"/>
+              </a:rPr>
+              <a:t>AI SERVICE</a:t>
+            </a:r>
+          </a:p>
+        </p:txBody>
+      </p:sp>
+      <p:sp>
+        <p:nvSpPr>
+          <p:cNvPr id="105" name="Rounded Rectangle 104"/>
           <p:cNvSpPr/>
           <p:nvPr/>
         </p:nvSpPr>
         <p:spPr>
           <a:xfrm>
-            <a:off x="384048" y="4526280"/>
-            <a:ext cx="1481328" cy="658368"/>
+            <a:off x="5330952" y="1499616"/>
+            <a:ext cx="1353312" cy="658368"/>
           </a:xfrm>
           <a:prstGeom prst="roundRect">
             <a:avLst>
@@ -14543,14 +15274,14 @@
       </p:sp>
       <p:sp>
         <p:nvSpPr>
-          <p:cNvPr id="82" name="Oval 81"/>
+          <p:cNvPr id="106" name="Oval 105"/>
           <p:cNvSpPr/>
           <p:nvPr/>
         </p:nvSpPr>
         <p:spPr>
           <a:xfrm>
-            <a:off x="438912" y="4645152"/>
-            <a:ext cx="420624" cy="420624"/>
+            <a:off x="5367528" y="1554480"/>
+            <a:ext cx="292608" cy="292608"/>
           </a:xfrm>
           <a:prstGeom prst="ellipse">
             <a:avLst/>
@@ -14587,7 +15318,7 @@
       </p:sp>
       <p:pic>
         <p:nvPicPr>
-          <p:cNvPr id="83" name="Picture 82" descr="image.png"/>
+          <p:cNvPr id="107" name="Picture 106" descr="image.png"/>
           <p:cNvPicPr>
             <a:picLocks noChangeAspect="1"/>
           </p:cNvPicPr>
@@ -14601,8 +15332,8 @@
         </p:blipFill>
         <p:spPr>
           <a:xfrm>
-            <a:off x="523036" y="4729276"/>
-            <a:ext cx="252374" cy="252374"/>
+            <a:off x="5426049" y="1613001"/>
+            <a:ext cx="175564" cy="175564"/>
           </a:xfrm>
           <a:prstGeom prst="rect">
             <a:avLst/>
@@ -14611,14 +15342,14 @@
       </p:pic>
       <p:sp>
         <p:nvSpPr>
-          <p:cNvPr id="84" name="TextBox 83"/>
+          <p:cNvPr id="108" name="TextBox 107"/>
           <p:cNvSpPr txBox="1"/>
           <p:nvPr/>
         </p:nvSpPr>
         <p:spPr>
           <a:xfrm>
-            <a:off x="886968" y="4544568"/>
-            <a:ext cx="969264" cy="621792"/>
+            <a:off x="5687568" y="1517904"/>
+            <a:ext cx="987552" cy="329184"/>
           </a:xfrm>
           <a:prstGeom prst="rect">
             <a:avLst/>
@@ -14633,27 +15364,50 @@
           <a:p>
             <a:pPr algn="l">
               <a:spcAft>
+                <a:spcPts val="300"/>
+              </a:spcAft>
+            </a:pPr>
+            <a:r>
+              <a:rPr sz="840" b="1" i="0">
+                <a:solidFill>
+                  <a:srgbClr val="172131"/>
+                </a:solidFill>
+                <a:latin typeface="Calibri"/>
+              </a:rPr>
+              <a:t>LLM router</a:t>
+            </a:r>
+          </a:p>
+        </p:txBody>
+      </p:sp>
+      <p:sp>
+        <p:nvSpPr>
+          <p:cNvPr id="109" name="TextBox 108"/>
+          <p:cNvSpPr txBox="1"/>
+          <p:nvPr/>
+        </p:nvSpPr>
+        <p:spPr>
+          <a:xfrm>
+            <a:off x="5358383" y="1847088"/>
+            <a:ext cx="1298448" cy="301752"/>
+          </a:xfrm>
+          <a:prstGeom prst="rect">
+            <a:avLst/>
+          </a:prstGeom>
+          <a:noFill/>
+        </p:spPr>
+        <p:txBody>
+          <a:bodyPr wrap="square" anchor="t" lIns="36576" rIns="36576" tIns="18288" bIns="18288">
+            <a:spAutoFit/>
+          </a:bodyPr>
+          <a:lstStyle/>
+          <a:p>
+            <a:pPr algn="l">
+              <a:spcAft>
                 <a:spcPts val="0"/>
               </a:spcAft>
             </a:pPr>
             <a:r>
-              <a:rPr sz="950" b="1" i="0">
-                <a:solidFill>
-                  <a:srgbClr val="172131"/>
-                </a:solidFill>
-                <a:latin typeface="Calibri"/>
-              </a:rPr>
-              <a:t>LLM router</a:t>
-            </a:r>
-          </a:p>
-          <a:p>
-            <a:pPr algn="l">
-              <a:spcAft>
-                <a:spcPts val="0"/>
-              </a:spcAft>
-            </a:pPr>
-            <a:r>
-              <a:rPr sz="800" b="0" i="0">
+              <a:rPr sz="760" b="0" i="0">
                 <a:solidFill>
                   <a:srgbClr val="555F6D"/>
                 </a:solidFill>
@@ -14666,14 +15420,14 @@
       </p:sp>
       <p:sp>
         <p:nvSpPr>
-          <p:cNvPr id="85" name="Rounded Rectangle 84"/>
+          <p:cNvPr id="110" name="Rounded Rectangle 109"/>
           <p:cNvSpPr/>
           <p:nvPr/>
         </p:nvSpPr>
         <p:spPr>
           <a:xfrm>
-            <a:off x="1956816" y="4526280"/>
-            <a:ext cx="1481328" cy="658368"/>
+            <a:off x="5330952" y="2231136"/>
+            <a:ext cx="1353312" cy="658368"/>
           </a:xfrm>
           <a:prstGeom prst="roundRect">
             <a:avLst>
@@ -14714,14 +15468,14 @@
       </p:sp>
       <p:sp>
         <p:nvSpPr>
-          <p:cNvPr id="86" name="Oval 85"/>
+          <p:cNvPr id="111" name="Oval 110"/>
           <p:cNvSpPr/>
           <p:nvPr/>
         </p:nvSpPr>
         <p:spPr>
           <a:xfrm>
-            <a:off x="2011680" y="4645152"/>
-            <a:ext cx="420624" cy="420624"/>
+            <a:off x="5367528" y="2286000"/>
+            <a:ext cx="292608" cy="292608"/>
           </a:xfrm>
           <a:prstGeom prst="ellipse">
             <a:avLst/>
@@ -14758,22 +15512,22 @@
       </p:sp>
       <p:pic>
         <p:nvPicPr>
-          <p:cNvPr id="87" name="Picture 86" descr="image.png"/>
+          <p:cNvPr id="112" name="Picture 111" descr="image.png"/>
           <p:cNvPicPr>
             <a:picLocks noChangeAspect="1"/>
           </p:cNvPicPr>
           <p:nvPr/>
         </p:nvPicPr>
         <p:blipFill>
-          <a:blip r:embed="rId18"/>
+          <a:blip r:embed="rId5"/>
           <a:stretch>
             <a:fillRect/>
           </a:stretch>
         </p:blipFill>
         <p:spPr>
           <a:xfrm>
-            <a:off x="2095804" y="4729276"/>
-            <a:ext cx="252374" cy="252374"/>
+            <a:off x="5426049" y="2344521"/>
+            <a:ext cx="175564" cy="175564"/>
           </a:xfrm>
           <a:prstGeom prst="rect">
             <a:avLst/>
@@ -14782,14 +15536,14 @@
       </p:pic>
       <p:sp>
         <p:nvSpPr>
-          <p:cNvPr id="88" name="TextBox 87"/>
+          <p:cNvPr id="113" name="TextBox 112"/>
           <p:cNvSpPr txBox="1"/>
           <p:nvPr/>
         </p:nvSpPr>
         <p:spPr>
           <a:xfrm>
-            <a:off x="2459736" y="4544568"/>
-            <a:ext cx="969264" cy="621792"/>
+            <a:off x="5687568" y="2249424"/>
+            <a:ext cx="987552" cy="329184"/>
           </a:xfrm>
           <a:prstGeom prst="rect">
             <a:avLst/>
@@ -14804,47 +15558,70 @@
           <a:p>
             <a:pPr algn="l">
               <a:spcAft>
+                <a:spcPts val="300"/>
+              </a:spcAft>
+            </a:pPr>
+            <a:r>
+              <a:rPr sz="840" b="1" i="0">
+                <a:solidFill>
+                  <a:srgbClr val="172131"/>
+                </a:solidFill>
+                <a:latin typeface="Calibri"/>
+              </a:rPr>
+              <a:t>AI polish</a:t>
+            </a:r>
+          </a:p>
+        </p:txBody>
+      </p:sp>
+      <p:sp>
+        <p:nvSpPr>
+          <p:cNvPr id="114" name="TextBox 113"/>
+          <p:cNvSpPr txBox="1"/>
+          <p:nvPr/>
+        </p:nvSpPr>
+        <p:spPr>
+          <a:xfrm>
+            <a:off x="5358383" y="2578608"/>
+            <a:ext cx="1298448" cy="301752"/>
+          </a:xfrm>
+          <a:prstGeom prst="rect">
+            <a:avLst/>
+          </a:prstGeom>
+          <a:noFill/>
+        </p:spPr>
+        <p:txBody>
+          <a:bodyPr wrap="square" anchor="t" lIns="36576" rIns="36576" tIns="18288" bIns="18288">
+            <a:spAutoFit/>
+          </a:bodyPr>
+          <a:lstStyle/>
+          <a:p>
+            <a:pPr algn="l">
+              <a:spcAft>
                 <a:spcPts val="0"/>
               </a:spcAft>
             </a:pPr>
             <a:r>
-              <a:rPr sz="950" b="1" i="0">
-                <a:solidFill>
-                  <a:srgbClr val="172131"/>
-                </a:solidFill>
-                <a:latin typeface="Calibri"/>
-              </a:rPr>
-              <a:t>AI polish</a:t>
-            </a:r>
-          </a:p>
-          <a:p>
-            <a:pPr algn="l">
-              <a:spcAft>
-                <a:spcPts val="0"/>
-              </a:spcAft>
-            </a:pPr>
-            <a:r>
-              <a:rPr sz="800" b="0" i="0">
+              <a:rPr sz="760" b="0" i="0">
                 <a:solidFill>
                   <a:srgbClr val="555F6D"/>
                 </a:solidFill>
                 <a:latin typeface="Calibri"/>
               </a:rPr>
-              <a:t>titles · explanations</a:t>
-            </a:r>
-          </a:p>
-        </p:txBody>
-      </p:sp>
-      <p:sp>
-        <p:nvSpPr>
-          <p:cNvPr id="89" name="Rounded Rectangle 88"/>
+              <a:t>assertion titles, explanations</a:t>
+            </a:r>
+          </a:p>
+        </p:txBody>
+      </p:sp>
+      <p:sp>
+        <p:nvSpPr>
+          <p:cNvPr id="115" name="Rounded Rectangle 114"/>
           <p:cNvSpPr/>
           <p:nvPr/>
         </p:nvSpPr>
         <p:spPr>
           <a:xfrm>
-            <a:off x="3529584" y="4526280"/>
-            <a:ext cx="1481328" cy="658368"/>
+            <a:off x="5330952" y="2962656"/>
+            <a:ext cx="1353312" cy="658368"/>
           </a:xfrm>
           <a:prstGeom prst="roundRect">
             <a:avLst>
@@ -14885,14 +15662,14 @@
       </p:sp>
       <p:sp>
         <p:nvSpPr>
-          <p:cNvPr id="90" name="Oval 89"/>
+          <p:cNvPr id="116" name="Oval 115"/>
           <p:cNvSpPr/>
           <p:nvPr/>
         </p:nvSpPr>
         <p:spPr>
           <a:xfrm>
-            <a:off x="3584448" y="4645152"/>
-            <a:ext cx="420624" cy="420624"/>
+            <a:off x="5367528" y="3017520"/>
+            <a:ext cx="292608" cy="292608"/>
           </a:xfrm>
           <a:prstGeom prst="ellipse">
             <a:avLst/>
@@ -14929,22 +15706,22 @@
       </p:sp>
       <p:pic>
         <p:nvPicPr>
-          <p:cNvPr id="91" name="Picture 90" descr="image.png"/>
+          <p:cNvPr id="117" name="Picture 116" descr="image.png"/>
           <p:cNvPicPr>
             <a:picLocks noChangeAspect="1"/>
           </p:cNvPicPr>
           <p:nvPr/>
         </p:nvPicPr>
         <p:blipFill>
-          <a:blip r:embed="rId19"/>
+          <a:blip r:embed="rId11"/>
           <a:stretch>
             <a:fillRect/>
           </a:stretch>
         </p:blipFill>
         <p:spPr>
           <a:xfrm>
-            <a:off x="3668572" y="4729276"/>
-            <a:ext cx="252374" cy="252374"/>
+            <a:off x="5426049" y="3076041"/>
+            <a:ext cx="175564" cy="175564"/>
           </a:xfrm>
           <a:prstGeom prst="rect">
             <a:avLst/>
@@ -14953,14 +15730,14 @@
       </p:pic>
       <p:sp>
         <p:nvSpPr>
-          <p:cNvPr id="92" name="TextBox 91"/>
+          <p:cNvPr id="118" name="TextBox 117"/>
           <p:cNvSpPr txBox="1"/>
           <p:nvPr/>
         </p:nvSpPr>
         <p:spPr>
           <a:xfrm>
-            <a:off x="4032504" y="4544568"/>
-            <a:ext cx="969264" cy="621792"/>
+            <a:off x="5687568" y="2980944"/>
+            <a:ext cx="987552" cy="329184"/>
           </a:xfrm>
           <a:prstGeom prst="rect">
             <a:avLst/>
@@ -14975,47 +15752,70 @@
           <a:p>
             <a:pPr algn="l">
               <a:spcAft>
+                <a:spcPts val="300"/>
+              </a:spcAft>
+            </a:pPr>
+            <a:r>
+              <a:rPr sz="840" b="1" i="0">
+                <a:solidFill>
+                  <a:srgbClr val="172131"/>
+                </a:solidFill>
+                <a:latin typeface="Calibri"/>
+              </a:rPr>
+              <a:t>Topic diagrams</a:t>
+            </a:r>
+          </a:p>
+        </p:txBody>
+      </p:sp>
+      <p:sp>
+        <p:nvSpPr>
+          <p:cNvPr id="119" name="TextBox 118"/>
+          <p:cNvSpPr txBox="1"/>
+          <p:nvPr/>
+        </p:nvSpPr>
+        <p:spPr>
+          <a:xfrm>
+            <a:off x="5358383" y="3310128"/>
+            <a:ext cx="1298448" cy="301752"/>
+          </a:xfrm>
+          <a:prstGeom prst="rect">
+            <a:avLst/>
+          </a:prstGeom>
+          <a:noFill/>
+        </p:spPr>
+        <p:txBody>
+          <a:bodyPr wrap="square" anchor="t" lIns="36576" rIns="36576" tIns="18288" bIns="18288">
+            <a:spAutoFit/>
+          </a:bodyPr>
+          <a:lstStyle/>
+          <a:p>
+            <a:pPr algn="l">
+              <a:spcAft>
                 <a:spcPts val="0"/>
               </a:spcAft>
             </a:pPr>
             <a:r>
-              <a:rPr sz="950" b="1" i="0">
-                <a:solidFill>
-                  <a:srgbClr val="172131"/>
-                </a:solidFill>
-                <a:latin typeface="Calibri"/>
-              </a:rPr>
-              <a:t>Topic diagrams</a:t>
-            </a:r>
-          </a:p>
-          <a:p>
-            <a:pPr algn="l">
-              <a:spcAft>
-                <a:spcPts val="0"/>
-              </a:spcAft>
-            </a:pPr>
-            <a:r>
-              <a:rPr sz="800" b="0" i="0">
+              <a:rPr sz="760" b="0" i="0">
                 <a:solidFill>
                   <a:srgbClr val="555F6D"/>
                 </a:solidFill>
                 <a:latin typeface="Calibri"/>
               </a:rPr>
-              <a:t>validated SVG</a:t>
-            </a:r>
-          </a:p>
-        </p:txBody>
-      </p:sp>
-      <p:sp>
-        <p:nvSpPr>
-          <p:cNvPr id="93" name="Rounded Rectangle 92"/>
+              <a:t>validated SVG + HTML page</a:t>
+            </a:r>
+          </a:p>
+        </p:txBody>
+      </p:sp>
+      <p:sp>
+        <p:nvSpPr>
+          <p:cNvPr id="120" name="Rounded Rectangle 119"/>
           <p:cNvSpPr/>
           <p:nvPr/>
         </p:nvSpPr>
         <p:spPr>
           <a:xfrm>
-            <a:off x="5102352" y="4526280"/>
-            <a:ext cx="1481328" cy="658368"/>
+            <a:off x="5330952" y="3694176"/>
+            <a:ext cx="1353312" cy="658368"/>
           </a:xfrm>
           <a:prstGeom prst="roundRect">
             <a:avLst>
@@ -15056,14 +15856,14 @@
       </p:sp>
       <p:sp>
         <p:nvSpPr>
-          <p:cNvPr id="94" name="Oval 93"/>
+          <p:cNvPr id="121" name="Oval 120"/>
           <p:cNvSpPr/>
           <p:nvPr/>
         </p:nvSpPr>
         <p:spPr>
           <a:xfrm>
-            <a:off x="5157216" y="4645152"/>
-            <a:ext cx="420624" cy="420624"/>
+            <a:off x="5367528" y="3749039"/>
+            <a:ext cx="292608" cy="292608"/>
           </a:xfrm>
           <a:prstGeom prst="ellipse">
             <a:avLst/>
@@ -15100,22 +15900,22 @@
       </p:sp>
       <p:pic>
         <p:nvPicPr>
-          <p:cNvPr id="95" name="Picture 94" descr="image.png"/>
+          <p:cNvPr id="122" name="Picture 121" descr="image.png"/>
           <p:cNvPicPr>
             <a:picLocks noChangeAspect="1"/>
           </p:cNvPicPr>
           <p:nvPr/>
         </p:nvPicPr>
         <p:blipFill>
-          <a:blip r:embed="rId20"/>
+          <a:blip r:embed="rId18"/>
           <a:stretch>
             <a:fillRect/>
           </a:stretch>
         </p:blipFill>
         <p:spPr>
           <a:xfrm>
-            <a:off x="5241340" y="4729276"/>
-            <a:ext cx="252374" cy="252374"/>
+            <a:off x="5426049" y="3807561"/>
+            <a:ext cx="175564" cy="175564"/>
           </a:xfrm>
           <a:prstGeom prst="rect">
             <a:avLst/>
@@ -15124,14 +15924,14 @@
       </p:pic>
       <p:sp>
         <p:nvSpPr>
-          <p:cNvPr id="96" name="TextBox 95"/>
+          <p:cNvPr id="123" name="TextBox 122"/>
           <p:cNvSpPr txBox="1"/>
           <p:nvPr/>
         </p:nvSpPr>
         <p:spPr>
           <a:xfrm>
-            <a:off x="5605272" y="4544568"/>
-            <a:ext cx="969264" cy="621792"/>
+            <a:off x="5687568" y="3712463"/>
+            <a:ext cx="987552" cy="329184"/>
           </a:xfrm>
           <a:prstGeom prst="rect">
             <a:avLst/>
@@ -15146,47 +15946,70 @@
           <a:p>
             <a:pPr algn="l">
               <a:spcAft>
+                <a:spcPts val="300"/>
+              </a:spcAft>
+            </a:pPr>
+            <a:r>
+              <a:rPr sz="840" b="1" i="0">
+                <a:solidFill>
+                  <a:srgbClr val="172131"/>
+                </a:solidFill>
+                <a:latin typeface="Calibri"/>
+              </a:rPr>
+              <a:t>AI labs</a:t>
+            </a:r>
+          </a:p>
+        </p:txBody>
+      </p:sp>
+      <p:sp>
+        <p:nvSpPr>
+          <p:cNvPr id="124" name="TextBox 123"/>
+          <p:cNvSpPr txBox="1"/>
+          <p:nvPr/>
+        </p:nvSpPr>
+        <p:spPr>
+          <a:xfrm>
+            <a:off x="5358383" y="4041648"/>
+            <a:ext cx="1298448" cy="301752"/>
+          </a:xfrm>
+          <a:prstGeom prst="rect">
+            <a:avLst/>
+          </a:prstGeom>
+          <a:noFill/>
+        </p:spPr>
+        <p:txBody>
+          <a:bodyPr wrap="square" anchor="t" lIns="36576" rIns="36576" tIns="18288" bIns="18288">
+            <a:spAutoFit/>
+          </a:bodyPr>
+          <a:lstStyle/>
+          <a:p>
+            <a:pPr algn="l">
+              <a:spcAft>
                 <a:spcPts val="0"/>
               </a:spcAft>
             </a:pPr>
             <a:r>
-              <a:rPr sz="950" b="1" i="0">
-                <a:solidFill>
-                  <a:srgbClr val="172131"/>
-                </a:solidFill>
-                <a:latin typeface="Calibri"/>
-              </a:rPr>
-              <a:t>AI labs</a:t>
-            </a:r>
-          </a:p>
-          <a:p>
-            <a:pPr algn="l">
-              <a:spcAft>
-                <a:spcPts val="0"/>
-              </a:spcAft>
-            </a:pPr>
-            <a:r>
-              <a:rPr sz="800" b="0" i="0">
+              <a:rPr sz="760" b="0" i="0">
                 <a:solidFill>
                   <a:srgbClr val="555F6D"/>
                 </a:solidFill>
                 <a:latin typeface="Calibri"/>
               </a:rPr>
-              <a:t>Node-checked JS</a:t>
-            </a:r>
-          </a:p>
-        </p:txBody>
-      </p:sp>
-      <p:sp>
-        <p:nvSpPr>
-          <p:cNvPr id="97" name="Rounded Rectangle 96"/>
+              <a:t>JS checked with node --check</a:t>
+            </a:r>
+          </a:p>
+        </p:txBody>
+      </p:sp>
+      <p:sp>
+        <p:nvSpPr>
+          <p:cNvPr id="125" name="Rounded Rectangle 124"/>
           <p:cNvSpPr/>
           <p:nvPr/>
         </p:nvSpPr>
         <p:spPr>
           <a:xfrm>
-            <a:off x="6675120" y="4526280"/>
-            <a:ext cx="1481328" cy="658368"/>
+            <a:off x="5330952" y="4425696"/>
+            <a:ext cx="1353312" cy="658368"/>
           </a:xfrm>
           <a:prstGeom prst="roundRect">
             <a:avLst>
@@ -15227,14 +16050,14 @@
       </p:sp>
       <p:sp>
         <p:nvSpPr>
-          <p:cNvPr id="98" name="Oval 97"/>
+          <p:cNvPr id="126" name="Oval 125"/>
           <p:cNvSpPr/>
           <p:nvPr/>
         </p:nvSpPr>
         <p:spPr>
           <a:xfrm>
-            <a:off x="6729983" y="4645152"/>
-            <a:ext cx="420624" cy="420624"/>
+            <a:off x="5367528" y="4480559"/>
+            <a:ext cx="292608" cy="292608"/>
           </a:xfrm>
           <a:prstGeom prst="ellipse">
             <a:avLst/>
@@ -15271,22 +16094,22 @@
       </p:sp>
       <p:pic>
         <p:nvPicPr>
-          <p:cNvPr id="99" name="Picture 98" descr="image.png"/>
+          <p:cNvPr id="127" name="Picture 126" descr="image.png"/>
           <p:cNvPicPr>
             <a:picLocks noChangeAspect="1"/>
           </p:cNvPicPr>
           <p:nvPr/>
         </p:nvPicPr>
         <p:blipFill>
-          <a:blip r:embed="rId21"/>
+          <a:blip r:embed="rId19"/>
           <a:stretch>
             <a:fillRect/>
           </a:stretch>
         </p:blipFill>
         <p:spPr>
           <a:xfrm>
-            <a:off x="6814108" y="4729276"/>
-            <a:ext cx="252374" cy="252374"/>
+            <a:off x="5426049" y="4539081"/>
+            <a:ext cx="175564" cy="175564"/>
           </a:xfrm>
           <a:prstGeom prst="rect">
             <a:avLst/>
@@ -15295,14 +16118,14 @@
       </p:pic>
       <p:sp>
         <p:nvSpPr>
-          <p:cNvPr id="100" name="TextBox 99"/>
+          <p:cNvPr id="128" name="TextBox 127"/>
           <p:cNvSpPr txBox="1"/>
           <p:nvPr/>
         </p:nvSpPr>
         <p:spPr>
           <a:xfrm>
-            <a:off x="7178040" y="4544568"/>
-            <a:ext cx="969264" cy="621792"/>
+            <a:off x="5687568" y="4443983"/>
+            <a:ext cx="987552" cy="329184"/>
           </a:xfrm>
           <a:prstGeom prst="rect">
             <a:avLst/>
@@ -15317,54 +16140,77 @@
           <a:p>
             <a:pPr algn="l">
               <a:spcAft>
+                <a:spcPts val="300"/>
+              </a:spcAft>
+            </a:pPr>
+            <a:r>
+              <a:rPr sz="840" b="1" i="0">
+                <a:solidFill>
+                  <a:srgbClr val="172131"/>
+                </a:solidFill>
+                <a:latin typeface="Calibri"/>
+              </a:rPr>
+              <a:t>Offline fallback</a:t>
+            </a:r>
+          </a:p>
+        </p:txBody>
+      </p:sp>
+      <p:sp>
+        <p:nvSpPr>
+          <p:cNvPr id="129" name="TextBox 128"/>
+          <p:cNvSpPr txBox="1"/>
+          <p:nvPr/>
+        </p:nvSpPr>
+        <p:spPr>
+          <a:xfrm>
+            <a:off x="5358383" y="4773168"/>
+            <a:ext cx="1298448" cy="301752"/>
+          </a:xfrm>
+          <a:prstGeom prst="rect">
+            <a:avLst/>
+          </a:prstGeom>
+          <a:noFill/>
+        </p:spPr>
+        <p:txBody>
+          <a:bodyPr wrap="square" anchor="t" lIns="36576" rIns="36576" tIns="18288" bIns="18288">
+            <a:spAutoFit/>
+          </a:bodyPr>
+          <a:lstStyle/>
+          <a:p>
+            <a:pPr algn="l">
+              <a:spcAft>
                 <a:spcPts val="0"/>
               </a:spcAft>
             </a:pPr>
             <a:r>
-              <a:rPr sz="950" b="1" i="0">
-                <a:solidFill>
-                  <a:srgbClr val="172131"/>
-                </a:solidFill>
-                <a:latin typeface="Calibri"/>
-              </a:rPr>
-              <a:t>Offline rules</a:t>
-            </a:r>
-          </a:p>
-          <a:p>
-            <a:pPr algn="l">
-              <a:spcAft>
-                <a:spcPts val="0"/>
-              </a:spcAft>
-            </a:pPr>
-            <a:r>
-              <a:rPr sz="800" b="0" i="0">
+              <a:rPr sz="760" b="0" i="0">
                 <a:solidFill>
                   <a:srgbClr val="555F6D"/>
                 </a:solidFill>
                 <a:latin typeface="Calibri"/>
               </a:rPr>
-              <a:t>always available</a:t>
+              <a:t>rules, scenes, structure labs</a:t>
             </a:r>
           </a:p>
         </p:txBody>
       </p:sp>
       <p:cxnSp>
         <p:nvCxnSpPr>
-          <p:cNvPr id="101" name="Connector 100"/>
+          <p:cNvPr id="130" name="Connector 129"/>
           <p:cNvCxnSpPr/>
           <p:nvPr/>
         </p:nvCxnSpPr>
         <p:spPr>
           <a:xfrm>
-            <a:off x="4270248" y="5257800"/>
-            <a:ext cx="0" cy="82296"/>
+            <a:off x="6757416" y="3200400"/>
+            <a:ext cx="164592" cy="0"/>
           </a:xfrm>
           <a:prstGeom prst="line">
             <a:avLst/>
           </a:prstGeom>
-          <a:ln w="25400">
+          <a:ln w="28575">
             <a:solidFill>
-              <a:srgbClr val="6B3FA0"/>
+              <a:srgbClr val="172131"/>
             </a:solidFill>
             <a:tailEnd type="triangle"/>
           </a:ln>
@@ -15386,18 +16232,57 @@
       </p:cxnSp>
       <p:sp>
         <p:nvSpPr>
-          <p:cNvPr id="102" name="Rounded Rectangle 101"/>
+          <p:cNvPr id="131" name="TextBox 130"/>
+          <p:cNvSpPr txBox="1"/>
+          <p:nvPr/>
+        </p:nvSpPr>
+        <p:spPr>
+          <a:xfrm>
+            <a:off x="6638544" y="2926080"/>
+            <a:ext cx="402336" cy="237744"/>
+          </a:xfrm>
+          <a:prstGeom prst="rect">
+            <a:avLst/>
+          </a:prstGeom>
+          <a:noFill/>
+        </p:spPr>
+        <p:txBody>
+          <a:bodyPr wrap="square" anchor="t" lIns="36576" rIns="36576" tIns="18288" bIns="18288">
+            <a:spAutoFit/>
+          </a:bodyPr>
+          <a:lstStyle/>
+          <a:p>
+            <a:pPr algn="ctr">
+              <a:spcAft>
+                <a:spcPts val="300"/>
+              </a:spcAft>
+            </a:pPr>
+            <a:r>
+              <a:rPr sz="680" b="0" i="1">
+                <a:solidFill>
+                  <a:srgbClr val="172131"/>
+                </a:solidFill>
+                <a:latin typeface="Calibri"/>
+              </a:rPr>
+              <a:t>assets</a:t>
+            </a:r>
+          </a:p>
+        </p:txBody>
+      </p:sp>
+      <p:sp>
+        <p:nvSpPr>
+          <p:cNvPr id="132" name="Rounded Rectangle 131"/>
           <p:cNvSpPr/>
           <p:nvPr/>
         </p:nvSpPr>
         <p:spPr>
           <a:xfrm>
-            <a:off x="274320" y="5340096"/>
-            <a:ext cx="8001000" cy="1024128"/>
+            <a:off x="6931152" y="1261872"/>
+            <a:ext cx="1481328" cy="3904487"/>
           </a:xfrm>
           <a:prstGeom prst="roundRect">
             <a:avLst>
-              <a:gd name="adj" fmla="val 6000"/>
+              <a:gd name="adj" fmla="val 5000"/>
             </a:avLst>
           </a:prstGeom>
           <a:solidFill>
@@ -15434,14 +16319,60 @@
       </p:sp>
       <p:sp>
         <p:nvSpPr>
-          <p:cNvPr id="103" name="TextBox 102"/>
+          <p:cNvPr id="133" name="Rounded Rectangle 132"/>
+          <p:cNvSpPr/>
+          <p:nvPr/>
+        </p:nvSpPr>
+        <p:spPr>
+          <a:xfrm>
+            <a:off x="7040880" y="1207008"/>
+            <a:ext cx="1261872" cy="219456"/>
+          </a:xfrm>
+          <a:prstGeom prst="roundRect">
+            <a:avLst>
+              <a:gd name="adj" fmla="val 50000"/>
+            </a:avLst>
+          </a:prstGeom>
+          <a:solidFill>
+            <a:srgbClr val="16845B"/>
+          </a:solidFill>
+          <a:ln>
+            <a:noFill/>
+          </a:ln>
+          <a:effectLst/>
+        </p:spPr>
+        <p:style>
+          <a:lnRef idx="1">
+            <a:schemeClr val="accent1"/>
+          </a:lnRef>
+          <a:fillRef idx="3">
+            <a:schemeClr val="accent1"/>
+          </a:fillRef>
+          <a:effectRef idx="2">
+            <a:schemeClr val="accent1"/>
+          </a:effectRef>
+          <a:fontRef idx="minor">
+            <a:schemeClr val="lt1"/>
+          </a:fontRef>
+        </p:style>
+        <p:txBody>
+          <a:bodyPr rtlCol="0" anchor="ctr"/>
+          <a:lstStyle/>
+          <a:p>
+            <a:pPr algn="ctr"/>
+          </a:p>
+        </p:txBody>
+      </p:sp>
+      <p:sp>
+        <p:nvSpPr>
+          <p:cNvPr id="134" name="TextBox 133"/>
           <p:cNvSpPr txBox="1"/>
           <p:nvPr/>
         </p:nvSpPr>
         <p:spPr>
           <a:xfrm>
-            <a:off x="365760" y="5358383"/>
-            <a:ext cx="3657600" cy="256032"/>
+            <a:off x="7040880" y="1207008"/>
+            <a:ext cx="1261872" cy="219456"/>
           </a:xfrm>
           <a:prstGeom prst="rect">
             <a:avLst/>
@@ -15449,38 +16380,38 @@
           <a:noFill/>
         </p:spPr>
         <p:txBody>
-          <a:bodyPr wrap="square" anchor="t" lIns="36576" rIns="36576" tIns="18288" bIns="18288">
+          <a:bodyPr wrap="square" anchor="ctr" lIns="36576" rIns="36576" tIns="18288" bIns="18288">
             <a:spAutoFit/>
           </a:bodyPr>
           <a:lstStyle/>
           <a:p>
-            <a:pPr algn="l">
+            <a:pPr algn="ctr">
               <a:spcAft>
                 <a:spcPts val="300"/>
               </a:spcAft>
             </a:pPr>
             <a:r>
-              <a:rPr sz="1100" b="1" i="0">
-                <a:solidFill>
-                  <a:srgbClr val="16845B"/>
-                </a:solidFill>
-                <a:latin typeface="Montserrat"/>
-              </a:rPr>
-              <a:t>5  Output &amp; data layer</a:t>
-            </a:r>
-          </a:p>
-        </p:txBody>
-      </p:sp>
-      <p:sp>
-        <p:nvSpPr>
-          <p:cNvPr id="104" name="Rounded Rectangle 103"/>
+              <a:rPr sz="900" b="1" i="0">
+                <a:solidFill>
+                  <a:srgbClr val="FFFFFF"/>
+                </a:solidFill>
+                <a:latin typeface="Calibri"/>
+              </a:rPr>
+              <a:t>OUTPUT</a:t>
+            </a:r>
+          </a:p>
+        </p:txBody>
+      </p:sp>
+      <p:sp>
+        <p:nvSpPr>
+          <p:cNvPr id="135" name="Rounded Rectangle 134"/>
           <p:cNvSpPr/>
           <p:nvPr/>
         </p:nvSpPr>
         <p:spPr>
           <a:xfrm>
-            <a:off x="384048" y="5632704"/>
-            <a:ext cx="1481328" cy="658368"/>
+            <a:off x="6995160" y="1499616"/>
+            <a:ext cx="1353312" cy="658368"/>
           </a:xfrm>
           <a:prstGeom prst="roundRect">
             <a:avLst>
@@ -15521,14 +16452,14 @@
       </p:sp>
       <p:sp>
         <p:nvSpPr>
-          <p:cNvPr id="105" name="Oval 104"/>
+          <p:cNvPr id="136" name="Oval 135"/>
           <p:cNvSpPr/>
           <p:nvPr/>
         </p:nvSpPr>
         <p:spPr>
           <a:xfrm>
-            <a:off x="438912" y="5751576"/>
-            <a:ext cx="420624" cy="420624"/>
+            <a:off x="7031736" y="1554480"/>
+            <a:ext cx="292608" cy="292608"/>
           </a:xfrm>
           <a:prstGeom prst="ellipse">
             <a:avLst/>
@@ -15565,22 +16496,22 @@
       </p:sp>
       <p:pic>
         <p:nvPicPr>
-          <p:cNvPr id="106" name="Picture 105" descr="image.png"/>
+          <p:cNvPr id="137" name="Picture 136" descr="image.png"/>
           <p:cNvPicPr>
             <a:picLocks noChangeAspect="1"/>
           </p:cNvPicPr>
           <p:nvPr/>
         </p:nvPicPr>
         <p:blipFill>
-          <a:blip r:embed="rId3"/>
+          <a:blip r:embed="rId20"/>
           <a:stretch>
             <a:fillRect/>
           </a:stretch>
         </p:blipFill>
         <p:spPr>
           <a:xfrm>
-            <a:off x="523036" y="5835700"/>
-            <a:ext cx="252374" cy="252374"/>
+            <a:off x="7090257" y="1613001"/>
+            <a:ext cx="175564" cy="175564"/>
           </a:xfrm>
           <a:prstGeom prst="rect">
             <a:avLst/>
@@ -15589,14 +16520,14 @@
       </p:pic>
       <p:sp>
         <p:nvSpPr>
-          <p:cNvPr id="107" name="TextBox 106"/>
+          <p:cNvPr id="138" name="TextBox 137"/>
           <p:cNvSpPr txBox="1"/>
           <p:nvPr/>
         </p:nvSpPr>
         <p:spPr>
           <a:xfrm>
-            <a:off x="886968" y="5650992"/>
-            <a:ext cx="969264" cy="621792"/>
+            <a:off x="7351776" y="1517904"/>
+            <a:ext cx="987552" cy="329184"/>
           </a:xfrm>
           <a:prstGeom prst="rect">
             <a:avLst/>
@@ -15611,47 +16542,70 @@
           <a:p>
             <a:pPr algn="l">
               <a:spcAft>
+                <a:spcPts val="300"/>
+              </a:spcAft>
+            </a:pPr>
+            <a:r>
+              <a:rPr sz="840" b="1" i="0">
+                <a:solidFill>
+                  <a:srgbClr val="172131"/>
+                </a:solidFill>
+                <a:latin typeface="Calibri"/>
+              </a:rPr>
+              <a:t>Editable PPTX</a:t>
+            </a:r>
+          </a:p>
+        </p:txBody>
+      </p:sp>
+      <p:sp>
+        <p:nvSpPr>
+          <p:cNvPr id="139" name="TextBox 138"/>
+          <p:cNvSpPr txBox="1"/>
+          <p:nvPr/>
+        </p:nvSpPr>
+        <p:spPr>
+          <a:xfrm>
+            <a:off x="7022592" y="1847088"/>
+            <a:ext cx="1298448" cy="301752"/>
+          </a:xfrm>
+          <a:prstGeom prst="rect">
+            <a:avLst/>
+          </a:prstGeom>
+          <a:noFill/>
+        </p:spPr>
+        <p:txBody>
+          <a:bodyPr wrap="square" anchor="t" lIns="36576" rIns="36576" tIns="18288" bIns="18288">
+            <a:spAutoFit/>
+          </a:bodyPr>
+          <a:lstStyle/>
+          <a:p>
+            <a:pPr algn="l">
+              <a:spcAft>
                 <a:spcPts val="0"/>
               </a:spcAft>
             </a:pPr>
             <a:r>
-              <a:rPr sz="950" b="1" i="0">
-                <a:solidFill>
-                  <a:srgbClr val="172131"/>
-                </a:solidFill>
-                <a:latin typeface="Calibri"/>
-              </a:rPr>
-              <a:t>PPTX builder</a:t>
-            </a:r>
-          </a:p>
-          <a:p>
-            <a:pPr algn="l">
-              <a:spcAft>
-                <a:spcPts val="0"/>
-              </a:spcAft>
-            </a:pPr>
-            <a:r>
-              <a:rPr sz="800" b="0" i="0">
+              <a:rPr sz="760" b="0" i="0">
                 <a:solidFill>
                   <a:srgbClr val="555F6D"/>
                 </a:solidFill>
                 <a:latin typeface="Calibri"/>
               </a:rPr>
-              <a:t>python-pptx</a:t>
-            </a:r>
-          </a:p>
-        </p:txBody>
-      </p:sp>
-      <p:sp>
-        <p:nvSpPr>
-          <p:cNvPr id="108" name="Rounded Rectangle 107"/>
+              <a:t>native shapes, linked pictures</a:t>
+            </a:r>
+          </a:p>
+        </p:txBody>
+      </p:sp>
+      <p:sp>
+        <p:nvSpPr>
+          <p:cNvPr id="140" name="Rounded Rectangle 139"/>
           <p:cNvSpPr/>
           <p:nvPr/>
         </p:nvSpPr>
         <p:spPr>
           <a:xfrm>
-            <a:off x="1956816" y="5632704"/>
-            <a:ext cx="1481328" cy="658368"/>
+            <a:off x="6995160" y="2231136"/>
+            <a:ext cx="1353312" cy="658368"/>
           </a:xfrm>
           <a:prstGeom prst="roundRect">
             <a:avLst>
@@ -15692,14 +16646,14 @@
       </p:sp>
       <p:sp>
         <p:nvSpPr>
-          <p:cNvPr id="109" name="Oval 108"/>
+          <p:cNvPr id="141" name="Oval 140"/>
           <p:cNvSpPr/>
           <p:nvPr/>
         </p:nvSpPr>
         <p:spPr>
           <a:xfrm>
-            <a:off x="2011680" y="5751576"/>
-            <a:ext cx="420624" cy="420624"/>
+            <a:off x="7031736" y="2286000"/>
+            <a:ext cx="292608" cy="292608"/>
           </a:xfrm>
           <a:prstGeom prst="ellipse">
             <a:avLst/>
@@ -15736,22 +16690,22 @@
       </p:sp>
       <p:pic>
         <p:nvPicPr>
-          <p:cNvPr id="110" name="Picture 109" descr="image.png"/>
+          <p:cNvPr id="142" name="Picture 141" descr="image.png"/>
           <p:cNvPicPr>
             <a:picLocks noChangeAspect="1"/>
           </p:cNvPicPr>
           <p:nvPr/>
         </p:nvPicPr>
         <p:blipFill>
-          <a:blip r:embed="rId22"/>
+          <a:blip r:embed="rId21"/>
           <a:stretch>
             <a:fillRect/>
           </a:stretch>
         </p:blipFill>
         <p:spPr>
           <a:xfrm>
-            <a:off x="2095804" y="5835700"/>
-            <a:ext cx="252374" cy="252374"/>
+            <a:off x="7090257" y="2344521"/>
+            <a:ext cx="175564" cy="175564"/>
           </a:xfrm>
           <a:prstGeom prst="rect">
             <a:avLst/>
@@ -15760,14 +16714,14 @@
       </p:pic>
       <p:sp>
         <p:nvSpPr>
-          <p:cNvPr id="111" name="TextBox 110"/>
+          <p:cNvPr id="143" name="TextBox 142"/>
           <p:cNvSpPr txBox="1"/>
           <p:nvPr/>
         </p:nvSpPr>
         <p:spPr>
           <a:xfrm>
-            <a:off x="2459736" y="5650992"/>
-            <a:ext cx="969264" cy="621792"/>
+            <a:off x="7351776" y="2249424"/>
+            <a:ext cx="987552" cy="329184"/>
           </a:xfrm>
           <a:prstGeom prst="rect">
             <a:avLst/>
@@ -15782,47 +16736,70 @@
           <a:p>
             <a:pPr algn="l">
               <a:spcAft>
+                <a:spcPts val="300"/>
+              </a:spcAft>
+            </a:pPr>
+            <a:r>
+              <a:rPr sz="840" b="1" i="0">
+                <a:solidFill>
+                  <a:srgbClr val="172131"/>
+                </a:solidFill>
+                <a:latin typeface="Calibri"/>
+              </a:rPr>
+              <a:t>Web deck</a:t>
+            </a:r>
+          </a:p>
+        </p:txBody>
+      </p:sp>
+      <p:sp>
+        <p:nvSpPr>
+          <p:cNvPr id="144" name="TextBox 143"/>
+          <p:cNvSpPr txBox="1"/>
+          <p:nvPr/>
+        </p:nvSpPr>
+        <p:spPr>
+          <a:xfrm>
+            <a:off x="7022592" y="2578608"/>
+            <a:ext cx="1298448" cy="301752"/>
+          </a:xfrm>
+          <a:prstGeom prst="rect">
+            <a:avLst/>
+          </a:prstGeom>
+          <a:noFill/>
+        </p:spPr>
+        <p:txBody>
+          <a:bodyPr wrap="square" anchor="t" lIns="36576" rIns="36576" tIns="18288" bIns="18288">
+            <a:spAutoFit/>
+          </a:bodyPr>
+          <a:lstStyle/>
+          <a:p>
+            <a:pPr algn="l">
+              <a:spcAft>
                 <a:spcPts val="0"/>
               </a:spcAft>
             </a:pPr>
             <a:r>
-              <a:rPr sz="950" b="1" i="0">
-                <a:solidFill>
-                  <a:srgbClr val="172131"/>
-                </a:solidFill>
-                <a:latin typeface="Calibri"/>
-              </a:rPr>
-              <a:t>Web builder</a:t>
-            </a:r>
-          </a:p>
-          <a:p>
-            <a:pPr algn="l">
-              <a:spcAft>
-                <a:spcPts val="0"/>
-              </a:spcAft>
-            </a:pPr>
-            <a:r>
-              <a:rPr sz="800" b="0" i="0">
+              <a:rPr sz="760" b="0" i="0">
                 <a:solidFill>
                   <a:srgbClr val="555F6D"/>
                 </a:solidFill>
                 <a:latin typeface="Calibri"/>
               </a:rPr>
-              <a:t>self-contained HTML</a:t>
-            </a:r>
-          </a:p>
-        </p:txBody>
-      </p:sp>
-      <p:sp>
-        <p:nvSpPr>
-          <p:cNvPr id="112" name="Rounded Rectangle 111"/>
+              <a:t>Reveal.js, reveals, overlays</a:t>
+            </a:r>
+          </a:p>
+        </p:txBody>
+      </p:sp>
+      <p:sp>
+        <p:nvSpPr>
+          <p:cNvPr id="145" name="Rounded Rectangle 144"/>
           <p:cNvSpPr/>
           <p:nvPr/>
         </p:nvSpPr>
         <p:spPr>
           <a:xfrm>
-            <a:off x="3529584" y="5632704"/>
-            <a:ext cx="1481328" cy="658368"/>
+            <a:off x="6995160" y="2962656"/>
+            <a:ext cx="1353312" cy="658368"/>
           </a:xfrm>
           <a:prstGeom prst="roundRect">
             <a:avLst>
@@ -15863,14 +16840,14 @@
       </p:sp>
       <p:sp>
         <p:nvSpPr>
-          <p:cNvPr id="113" name="Oval 112"/>
+          <p:cNvPr id="146" name="Oval 145"/>
           <p:cNvSpPr/>
           <p:nvPr/>
         </p:nvSpPr>
         <p:spPr>
           <a:xfrm>
-            <a:off x="3584448" y="5751576"/>
-            <a:ext cx="420624" cy="420624"/>
+            <a:off x="7031736" y="3017520"/>
+            <a:ext cx="292608" cy="292608"/>
           </a:xfrm>
           <a:prstGeom prst="ellipse">
             <a:avLst/>
@@ -15907,22 +16884,22 @@
       </p:sp>
       <p:pic>
         <p:nvPicPr>
-          <p:cNvPr id="114" name="Picture 113" descr="image.png"/>
+          <p:cNvPr id="147" name="Picture 146" descr="image.png"/>
           <p:cNvPicPr>
             <a:picLocks noChangeAspect="1"/>
           </p:cNvPicPr>
           <p:nvPr/>
         </p:nvPicPr>
         <p:blipFill>
-          <a:blip r:embed="rId23"/>
+          <a:blip r:embed="rId22"/>
           <a:stretch>
             <a:fillRect/>
           </a:stretch>
         </p:blipFill>
         <p:spPr>
           <a:xfrm>
-            <a:off x="3668572" y="5835700"/>
-            <a:ext cx="252374" cy="252374"/>
+            <a:off x="7090257" y="3076041"/>
+            <a:ext cx="175564" cy="175564"/>
           </a:xfrm>
           <a:prstGeom prst="rect">
             <a:avLst/>
@@ -15931,14 +16908,14 @@
       </p:pic>
       <p:sp>
         <p:nvSpPr>
-          <p:cNvPr id="115" name="TextBox 114"/>
+          <p:cNvPr id="148" name="TextBox 147"/>
           <p:cNvSpPr txBox="1"/>
           <p:nvPr/>
         </p:nvSpPr>
         <p:spPr>
           <a:xfrm>
-            <a:off x="4032504" y="5650992"/>
-            <a:ext cx="969264" cy="621792"/>
+            <a:off x="7351776" y="2980944"/>
+            <a:ext cx="987552" cy="329184"/>
           </a:xfrm>
           <a:prstGeom prst="rect">
             <a:avLst/>
@@ -15953,47 +16930,70 @@
           <a:p>
             <a:pPr algn="l">
               <a:spcAft>
+                <a:spcPts val="300"/>
+              </a:spcAft>
+            </a:pPr>
+            <a:r>
+              <a:rPr sz="840" b="1" i="0">
+                <a:solidFill>
+                  <a:srgbClr val="172131"/>
+                </a:solidFill>
+                <a:latin typeface="Calibri"/>
+              </a:rPr>
+              <a:t>Study pack</a:t>
+            </a:r>
+          </a:p>
+        </p:txBody>
+      </p:sp>
+      <p:sp>
+        <p:nvSpPr>
+          <p:cNvPr id="149" name="TextBox 148"/>
+          <p:cNvSpPr txBox="1"/>
+          <p:nvPr/>
+        </p:nvSpPr>
+        <p:spPr>
+          <a:xfrm>
+            <a:off x="7022592" y="3310128"/>
+            <a:ext cx="1298448" cy="301752"/>
+          </a:xfrm>
+          <a:prstGeom prst="rect">
+            <a:avLst/>
+          </a:prstGeom>
+          <a:noFill/>
+        </p:spPr>
+        <p:txBody>
+          <a:bodyPr wrap="square" anchor="t" lIns="36576" rIns="36576" tIns="18288" bIns="18288">
+            <a:spAutoFit/>
+          </a:bodyPr>
+          <a:lstStyle/>
+          <a:p>
+            <a:pPr algn="l">
+              <a:spcAft>
                 <a:spcPts val="0"/>
               </a:spcAft>
             </a:pPr>
             <a:r>
-              <a:rPr sz="950" b="1" i="0">
-                <a:solidFill>
-                  <a:srgbClr val="172131"/>
-                </a:solidFill>
-                <a:latin typeface="Calibri"/>
-              </a:rPr>
-              <a:t>Study pack</a:t>
-            </a:r>
-          </a:p>
-          <a:p>
-            <a:pPr algn="l">
-              <a:spcAft>
-                <a:spcPts val="0"/>
-              </a:spcAft>
-            </a:pPr>
-            <a:r>
-              <a:rPr sz="800" b="0" i="0">
+              <a:rPr sz="760" b="0" i="0">
                 <a:solidFill>
                   <a:srgbClr val="555F6D"/>
                 </a:solidFill>
                 <a:latin typeface="Calibri"/>
               </a:rPr>
-              <a:t>cards · Anki · quiz bank</a:t>
-            </a:r>
-          </a:p>
-        </p:txBody>
-      </p:sp>
-      <p:sp>
-        <p:nvSpPr>
-          <p:cNvPr id="116" name="Rounded Rectangle 115"/>
+              <a:t>flashcards · Anki · quiz bank</a:t>
+            </a:r>
+          </a:p>
+        </p:txBody>
+      </p:sp>
+      <p:sp>
+        <p:nvSpPr>
+          <p:cNvPr id="150" name="Rounded Rectangle 149"/>
           <p:cNvSpPr/>
           <p:nvPr/>
         </p:nvSpPr>
         <p:spPr>
           <a:xfrm>
-            <a:off x="5102352" y="5632704"/>
-            <a:ext cx="1481328" cy="658368"/>
+            <a:off x="6995160" y="3694176"/>
+            <a:ext cx="1353312" cy="658368"/>
           </a:xfrm>
           <a:prstGeom prst="roundRect">
             <a:avLst>
@@ -16034,14 +17034,14 @@
       </p:sp>
       <p:sp>
         <p:nvSpPr>
-          <p:cNvPr id="117" name="Oval 116"/>
+          <p:cNvPr id="151" name="Oval 150"/>
           <p:cNvSpPr/>
           <p:nvPr/>
         </p:nvSpPr>
         <p:spPr>
           <a:xfrm>
-            <a:off x="5157216" y="5751576"/>
-            <a:ext cx="420624" cy="420624"/>
+            <a:off x="7031736" y="3749039"/>
+            <a:ext cx="292608" cy="292608"/>
           </a:xfrm>
           <a:prstGeom prst="ellipse">
             <a:avLst/>
@@ -16078,22 +17078,22 @@
       </p:sp>
       <p:pic>
         <p:nvPicPr>
-          <p:cNvPr id="118" name="Picture 117" descr="image.png"/>
+          <p:cNvPr id="152" name="Picture 151" descr="image.png"/>
           <p:cNvPicPr>
             <a:picLocks noChangeAspect="1"/>
           </p:cNvPicPr>
           <p:nvPr/>
         </p:nvPicPr>
         <p:blipFill>
-          <a:blip r:embed="rId24"/>
+          <a:blip r:embed="rId23"/>
           <a:stretch>
             <a:fillRect/>
           </a:stretch>
         </p:blipFill>
         <p:spPr>
           <a:xfrm>
-            <a:off x="5241340" y="5835700"/>
-            <a:ext cx="252374" cy="252374"/>
+            <a:off x="7090257" y="3807561"/>
+            <a:ext cx="175564" cy="175564"/>
           </a:xfrm>
           <a:prstGeom prst="rect">
             <a:avLst/>
@@ -16102,14 +17102,14 @@
       </p:pic>
       <p:sp>
         <p:nvSpPr>
-          <p:cNvPr id="119" name="TextBox 118"/>
+          <p:cNvPr id="153" name="TextBox 152"/>
           <p:cNvSpPr txBox="1"/>
           <p:nvPr/>
         </p:nvSpPr>
         <p:spPr>
           <a:xfrm>
-            <a:off x="5605272" y="5650992"/>
-            <a:ext cx="969264" cy="621792"/>
+            <a:off x="7351776" y="3712463"/>
+            <a:ext cx="987552" cy="329184"/>
           </a:xfrm>
           <a:prstGeom prst="rect">
             <a:avLst/>
@@ -16124,47 +17124,70 @@
           <a:p>
             <a:pPr algn="l">
               <a:spcAft>
+                <a:spcPts val="300"/>
+              </a:spcAft>
+            </a:pPr>
+            <a:r>
+              <a:rPr sz="840" b="1" i="0">
+                <a:solidFill>
+                  <a:srgbClr val="172131"/>
+                </a:solidFill>
+                <a:latin typeface="Calibri"/>
+              </a:rPr>
+              <a:t>Share link</a:t>
+            </a:r>
+          </a:p>
+        </p:txBody>
+      </p:sp>
+      <p:sp>
+        <p:nvSpPr>
+          <p:cNvPr id="154" name="TextBox 153"/>
+          <p:cNvSpPr txBox="1"/>
+          <p:nvPr/>
+        </p:nvSpPr>
+        <p:spPr>
+          <a:xfrm>
+            <a:off x="7022592" y="4041648"/>
+            <a:ext cx="1298448" cy="301752"/>
+          </a:xfrm>
+          <a:prstGeom prst="rect">
+            <a:avLst/>
+          </a:prstGeom>
+          <a:noFill/>
+        </p:spPr>
+        <p:txBody>
+          <a:bodyPr wrap="square" anchor="t" lIns="36576" rIns="36576" tIns="18288" bIns="18288">
+            <a:spAutoFit/>
+          </a:bodyPr>
+          <a:lstStyle/>
+          <a:p>
+            <a:pPr algn="l">
+              <a:spcAft>
                 <a:spcPts val="0"/>
               </a:spcAft>
             </a:pPr>
             <a:r>
-              <a:rPr sz="950" b="1" i="0">
-                <a:solidFill>
-                  <a:srgbClr val="172131"/>
-                </a:solidFill>
-                <a:latin typeface="Calibri"/>
-              </a:rPr>
-              <a:t>SQLite + files</a:t>
-            </a:r>
-          </a:p>
-          <a:p>
-            <a:pPr algn="l">
-              <a:spcAft>
-                <a:spcPts val="0"/>
-              </a:spcAft>
-            </a:pPr>
-            <a:r>
-              <a:rPr sz="800" b="0" i="0">
+              <a:rPr sz="760" b="0" i="0">
                 <a:solidFill>
                   <a:srgbClr val="555F6D"/>
                 </a:solidFill>
                 <a:latin typeface="Calibri"/>
               </a:rPr>
-              <a:t>users · jobs · decks</a:t>
-            </a:r>
-          </a:p>
-        </p:txBody>
-      </p:sp>
-      <p:sp>
-        <p:nvSpPr>
-          <p:cNvPr id="120" name="Rounded Rectangle 119"/>
+              <a:t>view-only, no login</a:t>
+            </a:r>
+          </a:p>
+        </p:txBody>
+      </p:sp>
+      <p:sp>
+        <p:nvSpPr>
+          <p:cNvPr id="155" name="Rounded Rectangle 154"/>
           <p:cNvSpPr/>
           <p:nvPr/>
         </p:nvSpPr>
         <p:spPr>
           <a:xfrm>
-            <a:off x="6675120" y="5632704"/>
-            <a:ext cx="1481328" cy="658368"/>
+            <a:off x="6995160" y="4425696"/>
+            <a:ext cx="1353312" cy="658368"/>
           </a:xfrm>
           <a:prstGeom prst="roundRect">
             <a:avLst>
@@ -16205,14 +17228,14 @@
       </p:sp>
       <p:sp>
         <p:nvSpPr>
-          <p:cNvPr id="121" name="Oval 120"/>
+          <p:cNvPr id="156" name="Oval 155"/>
           <p:cNvSpPr/>
           <p:nvPr/>
         </p:nvSpPr>
         <p:spPr>
           <a:xfrm>
-            <a:off x="6729983" y="5751576"/>
-            <a:ext cx="420624" cy="420624"/>
+            <a:off x="7031736" y="4480559"/>
+            <a:ext cx="292608" cy="292608"/>
           </a:xfrm>
           <a:prstGeom prst="ellipse">
             <a:avLst/>
@@ -16249,7 +17272,288 @@
       </p:sp>
       <p:pic>
         <p:nvPicPr>
-          <p:cNvPr id="122" name="Picture 121" descr="image.png"/>
+          <p:cNvPr id="157" name="Picture 156" descr="image.png"/>
+          <p:cNvPicPr>
+            <a:picLocks noChangeAspect="1"/>
+          </p:cNvPicPr>
+          <p:nvPr/>
+        </p:nvPicPr>
+        <p:blipFill>
+          <a:blip r:embed="rId24"/>
+          <a:stretch>
+            <a:fillRect/>
+          </a:stretch>
+        </p:blipFill>
+        <p:spPr>
+          <a:xfrm>
+            <a:off x="7090257" y="4539081"/>
+            <a:ext cx="175564" cy="175564"/>
+          </a:xfrm>
+          <a:prstGeom prst="rect">
+            <a:avLst/>
+          </a:prstGeom>
+        </p:spPr>
+      </p:pic>
+      <p:sp>
+        <p:nvSpPr>
+          <p:cNvPr id="158" name="TextBox 157"/>
+          <p:cNvSpPr txBox="1"/>
+          <p:nvPr/>
+        </p:nvSpPr>
+        <p:spPr>
+          <a:xfrm>
+            <a:off x="7351776" y="4443983"/>
+            <a:ext cx="987552" cy="329184"/>
+          </a:xfrm>
+          <a:prstGeom prst="rect">
+            <a:avLst/>
+          </a:prstGeom>
+          <a:noFill/>
+        </p:spPr>
+        <p:txBody>
+          <a:bodyPr wrap="square" anchor="ctr" lIns="36576" rIns="36576" tIns="18288" bIns="18288">
+            <a:spAutoFit/>
+          </a:bodyPr>
+          <a:lstStyle/>
+          <a:p>
+            <a:pPr algn="l">
+              <a:spcAft>
+                <a:spcPts val="300"/>
+              </a:spcAft>
+            </a:pPr>
+            <a:r>
+              <a:rPr sz="840" b="1" i="0">
+                <a:solidFill>
+                  <a:srgbClr val="172131"/>
+                </a:solidFill>
+                <a:latin typeface="Calibri"/>
+              </a:rPr>
+              <a:t>Deck tutor</a:t>
+            </a:r>
+          </a:p>
+        </p:txBody>
+      </p:sp>
+      <p:sp>
+        <p:nvSpPr>
+          <p:cNvPr id="159" name="TextBox 158"/>
+          <p:cNvSpPr txBox="1"/>
+          <p:nvPr/>
+        </p:nvSpPr>
+        <p:spPr>
+          <a:xfrm>
+            <a:off x="7022592" y="4773168"/>
+            <a:ext cx="1298448" cy="301752"/>
+          </a:xfrm>
+          <a:prstGeom prst="rect">
+            <a:avLst/>
+          </a:prstGeom>
+          <a:noFill/>
+        </p:spPr>
+        <p:txBody>
+          <a:bodyPr wrap="square" anchor="t" lIns="36576" rIns="36576" tIns="18288" bIns="18288">
+            <a:spAutoFit/>
+          </a:bodyPr>
+          <a:lstStyle/>
+          <a:p>
+            <a:pPr algn="l">
+              <a:spcAft>
+                <a:spcPts val="0"/>
+              </a:spcAft>
+            </a:pPr>
+            <a:r>
+              <a:rPr sz="760" b="0" i="0">
+                <a:solidFill>
+                  <a:srgbClr val="555F6D"/>
+                </a:solidFill>
+                <a:latin typeface="Calibri"/>
+              </a:rPr>
+              <a:t>answers from the deck only</a:t>
+            </a:r>
+          </a:p>
+        </p:txBody>
+      </p:sp>
+      <p:sp>
+        <p:nvSpPr>
+          <p:cNvPr id="160" name="Rounded Rectangle 159"/>
+          <p:cNvSpPr/>
+          <p:nvPr/>
+        </p:nvSpPr>
+        <p:spPr>
+          <a:xfrm>
+            <a:off x="274320" y="5257800"/>
+            <a:ext cx="8183879" cy="658368"/>
+          </a:xfrm>
+          <a:prstGeom prst="roundRect">
+            <a:avLst>
+              <a:gd name="adj" fmla="val 8000"/>
+            </a:avLst>
+          </a:prstGeom>
+          <a:solidFill>
+            <a:srgbClr val="F4F6FA"/>
+          </a:solidFill>
+          <a:ln w="12700">
+            <a:solidFill>
+              <a:srgbClr val="C9D0DA"/>
+            </a:solidFill>
+          </a:ln>
+          <a:effectLst/>
+        </p:spPr>
+        <p:style>
+          <a:lnRef idx="1">
+            <a:schemeClr val="accent1"/>
+          </a:lnRef>
+          <a:fillRef idx="3">
+            <a:schemeClr val="accent1"/>
+          </a:fillRef>
+          <a:effectRef idx="2">
+            <a:schemeClr val="accent1"/>
+          </a:effectRef>
+          <a:fontRef idx="minor">
+            <a:schemeClr val="lt1"/>
+          </a:fontRef>
+        </p:style>
+        <p:txBody>
+          <a:bodyPr rtlCol="0" anchor="ctr"/>
+          <a:lstStyle/>
+          <a:p>
+            <a:pPr algn="ctr"/>
+          </a:p>
+        </p:txBody>
+      </p:sp>
+      <p:sp>
+        <p:nvSpPr>
+          <p:cNvPr id="161" name="TextBox 160"/>
+          <p:cNvSpPr txBox="1"/>
+          <p:nvPr/>
+        </p:nvSpPr>
+        <p:spPr>
+          <a:xfrm>
+            <a:off x="347472" y="5266944"/>
+            <a:ext cx="2743200" cy="201168"/>
+          </a:xfrm>
+          <a:prstGeom prst="rect">
+            <a:avLst/>
+          </a:prstGeom>
+          <a:noFill/>
+        </p:spPr>
+        <p:txBody>
+          <a:bodyPr wrap="square" anchor="t" lIns="36576" rIns="36576" tIns="18288" bIns="18288">
+            <a:spAutoFit/>
+          </a:bodyPr>
+          <a:lstStyle/>
+          <a:p>
+            <a:pPr algn="l">
+              <a:spcAft>
+                <a:spcPts val="300"/>
+              </a:spcAft>
+            </a:pPr>
+            <a:r>
+              <a:rPr sz="850" b="1" i="0">
+                <a:solidFill>
+                  <a:srgbClr val="555F6D"/>
+                </a:solidFill>
+                <a:latin typeface="Calibri"/>
+              </a:rPr>
+              <a:t>DEPLOYMENT AND OPERATIONS · open-source / free tier</a:t>
+            </a:r>
+          </a:p>
+        </p:txBody>
+      </p:sp>
+      <p:sp>
+        <p:nvSpPr>
+          <p:cNvPr id="162" name="Rounded Rectangle 161"/>
+          <p:cNvSpPr/>
+          <p:nvPr/>
+        </p:nvSpPr>
+        <p:spPr>
+          <a:xfrm>
+            <a:off x="384048" y="5486400"/>
+            <a:ext cx="1444752" cy="384048"/>
+          </a:xfrm>
+          <a:prstGeom prst="roundRect">
+            <a:avLst>
+              <a:gd name="adj" fmla="val 20000"/>
+            </a:avLst>
+          </a:prstGeom>
+          <a:solidFill>
+            <a:srgbClr val="FFFFFF"/>
+          </a:solidFill>
+          <a:ln w="9525">
+            <a:solidFill>
+              <a:srgbClr val="C9D0DA"/>
+            </a:solidFill>
+          </a:ln>
+          <a:effectLst/>
+        </p:spPr>
+        <p:style>
+          <a:lnRef idx="1">
+            <a:schemeClr val="accent1"/>
+          </a:lnRef>
+          <a:fillRef idx="3">
+            <a:schemeClr val="accent1"/>
+          </a:fillRef>
+          <a:effectRef idx="2">
+            <a:schemeClr val="accent1"/>
+          </a:effectRef>
+          <a:fontRef idx="minor">
+            <a:schemeClr val="lt1"/>
+          </a:fontRef>
+        </p:style>
+        <p:txBody>
+          <a:bodyPr rtlCol="0" anchor="ctr"/>
+          <a:lstStyle/>
+          <a:p>
+            <a:pPr algn="ctr"/>
+          </a:p>
+        </p:txBody>
+      </p:sp>
+      <p:sp>
+        <p:nvSpPr>
+          <p:cNvPr id="163" name="Oval 162"/>
+          <p:cNvSpPr/>
+          <p:nvPr/>
+        </p:nvSpPr>
+        <p:spPr>
+          <a:xfrm>
+            <a:off x="429768" y="5522976"/>
+            <a:ext cx="310896" cy="310896"/>
+          </a:xfrm>
+          <a:prstGeom prst="ellipse">
+            <a:avLst/>
+          </a:prstGeom>
+          <a:solidFill>
+            <a:srgbClr val="172131"/>
+          </a:solidFill>
+          <a:ln>
+            <a:noFill/>
+          </a:ln>
+          <a:effectLst/>
+        </p:spPr>
+        <p:style>
+          <a:lnRef idx="1">
+            <a:schemeClr val="accent1"/>
+          </a:lnRef>
+          <a:fillRef idx="3">
+            <a:schemeClr val="accent1"/>
+          </a:fillRef>
+          <a:effectRef idx="2">
+            <a:schemeClr val="accent1"/>
+          </a:effectRef>
+          <a:fontRef idx="minor">
+            <a:schemeClr val="lt1"/>
+          </a:fontRef>
+        </p:style>
+        <p:txBody>
+          <a:bodyPr rtlCol="0" anchor="ctr"/>
+          <a:lstStyle/>
+          <a:p>
+            <a:pPr algn="ctr"/>
+          </a:p>
+        </p:txBody>
+      </p:sp>
+      <p:pic>
+        <p:nvPicPr>
+          <p:cNvPr id="164" name="Picture 163" descr="image.png"/>
           <p:cNvPicPr>
             <a:picLocks noChangeAspect="1"/>
           </p:cNvPicPr>
@@ -16263,8 +17567,8 @@
         </p:blipFill>
         <p:spPr>
           <a:xfrm>
-            <a:off x="6814108" y="5835700"/>
-            <a:ext cx="252374" cy="252374"/>
+            <a:off x="491947" y="5585155"/>
+            <a:ext cx="186537" cy="186537"/>
           </a:xfrm>
           <a:prstGeom prst="rect">
             <a:avLst/>
@@ -16273,14 +17577,14 @@
       </p:pic>
       <p:sp>
         <p:nvSpPr>
-          <p:cNvPr id="123" name="TextBox 122"/>
+          <p:cNvPr id="165" name="TextBox 164"/>
           <p:cNvSpPr txBox="1"/>
           <p:nvPr/>
         </p:nvSpPr>
         <p:spPr>
           <a:xfrm>
-            <a:off x="7178040" y="5650992"/>
-            <a:ext cx="969264" cy="621792"/>
+            <a:off x="768096" y="5486400"/>
+            <a:ext cx="1051560" cy="384048"/>
           </a:xfrm>
           <a:prstGeom prst="rect">
             <a:avLst/>
@@ -16299,13 +17603,13 @@
               </a:spcAft>
             </a:pPr>
             <a:r>
-              <a:rPr sz="950" b="1" i="0">
+              <a:rPr sz="819" b="1" i="0">
                 <a:solidFill>
                   <a:srgbClr val="172131"/>
                 </a:solidFill>
                 <a:latin typeface="Calibri"/>
               </a:rPr>
-              <a:t>Caches</a:t>
+              <a:t>GitHub</a:t>
             </a:r>
           </a:p>
           <a:p>
@@ -16315,39 +17619,75 @@
               </a:spcAft>
             </a:pPr>
             <a:r>
-              <a:rPr sz="800" b="0" i="0">
+              <a:rPr sz="700" b="0" i="0">
                 <a:solidFill>
                   <a:srgbClr val="555F6D"/>
                 </a:solidFill>
                 <a:latin typeface="Calibri"/>
               </a:rPr>
-              <a:t>LLM · art · OCR · labs</a:t>
-            </a:r>
-          </a:p>
-        </p:txBody>
-      </p:sp>
-      <p:sp>
-        <p:nvSpPr>
-          <p:cNvPr id="124" name="Rounded Rectangle 123"/>
+              <a:t>source · 755 tests</a:t>
+            </a:r>
+          </a:p>
+        </p:txBody>
+      </p:sp>
+      <p:cxnSp>
+        <p:nvCxnSpPr>
+          <p:cNvPr id="166" name="Connector 165"/>
+          <p:cNvCxnSpPr/>
+          <p:nvPr/>
+        </p:nvCxnSpPr>
+        <p:spPr>
+          <a:xfrm>
+            <a:off x="1837944" y="5678424"/>
+            <a:ext cx="155448" cy="0"/>
+          </a:xfrm>
+          <a:prstGeom prst="line">
+            <a:avLst/>
+          </a:prstGeom>
+          <a:ln w="19050">
+            <a:solidFill>
+              <a:srgbClr val="555F6D"/>
+            </a:solidFill>
+            <a:tailEnd type="triangle"/>
+          </a:ln>
+        </p:spPr>
+        <p:style>
+          <a:lnRef idx="2">
+            <a:schemeClr val="accent1"/>
+          </a:lnRef>
+          <a:fillRef idx="0">
+            <a:schemeClr val="accent1"/>
+          </a:fillRef>
+          <a:effectRef idx="1">
+            <a:schemeClr val="accent1"/>
+          </a:effectRef>
+          <a:fontRef idx="minor">
+            <a:schemeClr val="tx1"/>
+          </a:fontRef>
+        </p:style>
+      </p:cxnSp>
+      <p:sp>
+        <p:nvSpPr>
+          <p:cNvPr id="167" name="Rounded Rectangle 166"/>
           <p:cNvSpPr/>
           <p:nvPr/>
         </p:nvSpPr>
         <p:spPr>
           <a:xfrm>
-            <a:off x="8458200" y="914400"/>
-            <a:ext cx="3474720" cy="5559552"/>
+            <a:off x="2002536" y="5486400"/>
+            <a:ext cx="1444752" cy="384048"/>
           </a:xfrm>
           <a:prstGeom prst="roundRect">
             <a:avLst>
-              <a:gd name="adj" fmla="val 4000"/>
+              <a:gd name="adj" fmla="val 20000"/>
             </a:avLst>
           </a:prstGeom>
           <a:solidFill>
-            <a:srgbClr val="E8F0FC"/>
+            <a:srgbClr val="FFFFFF"/>
           </a:solidFill>
-          <a:ln w="12700">
+          <a:ln w="9525">
             <a:solidFill>
-              <a:srgbClr val="1F5FBF"/>
+              <a:srgbClr val="C9D0DA"/>
             </a:solidFill>
           </a:ln>
           <a:effectLst/>
@@ -16376,19 +17716,860 @@
       </p:sp>
       <p:sp>
         <p:nvSpPr>
-          <p:cNvPr id="125" name="Rounded Rectangle 124"/>
+          <p:cNvPr id="168" name="Oval 167"/>
           <p:cNvSpPr/>
           <p:nvPr/>
         </p:nvSpPr>
         <p:spPr>
           <a:xfrm>
-            <a:off x="8458200" y="914400"/>
-            <a:ext cx="3474720" cy="329184"/>
+            <a:off x="2048255" y="5522976"/>
+            <a:ext cx="310896" cy="310896"/>
+          </a:xfrm>
+          <a:prstGeom prst="ellipse">
+            <a:avLst/>
+          </a:prstGeom>
+          <a:solidFill>
+            <a:srgbClr val="172131"/>
+          </a:solidFill>
+          <a:ln>
+            <a:noFill/>
+          </a:ln>
+          <a:effectLst/>
+        </p:spPr>
+        <p:style>
+          <a:lnRef idx="1">
+            <a:schemeClr val="accent1"/>
+          </a:lnRef>
+          <a:fillRef idx="3">
+            <a:schemeClr val="accent1"/>
+          </a:fillRef>
+          <a:effectRef idx="2">
+            <a:schemeClr val="accent1"/>
+          </a:effectRef>
+          <a:fontRef idx="minor">
+            <a:schemeClr val="lt1"/>
+          </a:fontRef>
+        </p:style>
+        <p:txBody>
+          <a:bodyPr rtlCol="0" anchor="ctr"/>
+          <a:lstStyle/>
+          <a:p>
+            <a:pPr algn="ctr"/>
+          </a:p>
+        </p:txBody>
+      </p:sp>
+      <p:pic>
+        <p:nvPicPr>
+          <p:cNvPr id="169" name="Picture 168" descr="image.png"/>
+          <p:cNvPicPr>
+            <a:picLocks noChangeAspect="1"/>
+          </p:cNvPicPr>
+          <p:nvPr/>
+        </p:nvPicPr>
+        <p:blipFill>
+          <a:blip r:embed="rId21"/>
+          <a:stretch>
+            <a:fillRect/>
+          </a:stretch>
+        </p:blipFill>
+        <p:spPr>
+          <a:xfrm>
+            <a:off x="2110435" y="5585155"/>
+            <a:ext cx="186537" cy="186537"/>
+          </a:xfrm>
+          <a:prstGeom prst="rect">
+            <a:avLst/>
+          </a:prstGeom>
+        </p:spPr>
+      </p:pic>
+      <p:sp>
+        <p:nvSpPr>
+          <p:cNvPr id="170" name="TextBox 169"/>
+          <p:cNvSpPr txBox="1"/>
+          <p:nvPr/>
+        </p:nvSpPr>
+        <p:spPr>
+          <a:xfrm>
+            <a:off x="2386584" y="5486400"/>
+            <a:ext cx="1051560" cy="384048"/>
+          </a:xfrm>
+          <a:prstGeom prst="rect">
+            <a:avLst/>
+          </a:prstGeom>
+          <a:noFill/>
+        </p:spPr>
+        <p:txBody>
+          <a:bodyPr wrap="square" anchor="ctr" lIns="36576" rIns="36576" tIns="18288" bIns="18288">
+            <a:spAutoFit/>
+          </a:bodyPr>
+          <a:lstStyle/>
+          <a:p>
+            <a:pPr algn="l">
+              <a:spcAft>
+                <a:spcPts val="0"/>
+              </a:spcAft>
+            </a:pPr>
+            <a:r>
+              <a:rPr sz="819" b="1" i="0">
+                <a:solidFill>
+                  <a:srgbClr val="172131"/>
+                </a:solidFill>
+                <a:latin typeface="Calibri"/>
+              </a:rPr>
+              <a:t>Vercel / Netlify</a:t>
+            </a:r>
+          </a:p>
+          <a:p>
+            <a:pPr algn="l">
+              <a:spcAft>
+                <a:spcPts val="0"/>
+              </a:spcAft>
+            </a:pPr>
+            <a:r>
+              <a:rPr sz="700" b="0" i="0">
+                <a:solidFill>
+                  <a:srgbClr val="555F6D"/>
+                </a:solidFill>
+                <a:latin typeface="Calibri"/>
+              </a:rPr>
+              <a:t>React static build</a:t>
+            </a:r>
+          </a:p>
+        </p:txBody>
+      </p:sp>
+      <p:cxnSp>
+        <p:nvCxnSpPr>
+          <p:cNvPr id="171" name="Connector 170"/>
+          <p:cNvCxnSpPr/>
+          <p:nvPr/>
+        </p:nvCxnSpPr>
+        <p:spPr>
+          <a:xfrm>
+            <a:off x="3456432" y="5678424"/>
+            <a:ext cx="155448" cy="0"/>
+          </a:xfrm>
+          <a:prstGeom prst="line">
+            <a:avLst/>
+          </a:prstGeom>
+          <a:ln w="19050">
+            <a:solidFill>
+              <a:srgbClr val="555F6D"/>
+            </a:solidFill>
+            <a:tailEnd type="triangle"/>
+          </a:ln>
+        </p:spPr>
+        <p:style>
+          <a:lnRef idx="2">
+            <a:schemeClr val="accent1"/>
+          </a:lnRef>
+          <a:fillRef idx="0">
+            <a:schemeClr val="accent1"/>
+          </a:fillRef>
+          <a:effectRef idx="1">
+            <a:schemeClr val="accent1"/>
+          </a:effectRef>
+          <a:fontRef idx="minor">
+            <a:schemeClr val="tx1"/>
+          </a:fontRef>
+        </p:style>
+      </p:cxnSp>
+      <p:sp>
+        <p:nvSpPr>
+          <p:cNvPr id="172" name="Rounded Rectangle 171"/>
+          <p:cNvSpPr/>
+          <p:nvPr/>
+        </p:nvSpPr>
+        <p:spPr>
+          <a:xfrm>
+            <a:off x="3621024" y="5486400"/>
+            <a:ext cx="1444752" cy="384048"/>
           </a:xfrm>
           <a:prstGeom prst="roundRect">
             <a:avLst>
-              <a:gd name="adj" fmla="val 25000"/>
+              <a:gd name="adj" fmla="val 20000"/>
             </a:avLst>
+          </a:prstGeom>
+          <a:solidFill>
+            <a:srgbClr val="FFFFFF"/>
+          </a:solidFill>
+          <a:ln w="9525">
+            <a:solidFill>
+              <a:srgbClr val="C9D0DA"/>
+            </a:solidFill>
+          </a:ln>
+          <a:effectLst/>
+        </p:spPr>
+        <p:style>
+          <a:lnRef idx="1">
+            <a:schemeClr val="accent1"/>
+          </a:lnRef>
+          <a:fillRef idx="3">
+            <a:schemeClr val="accent1"/>
+          </a:fillRef>
+          <a:effectRef idx="2">
+            <a:schemeClr val="accent1"/>
+          </a:effectRef>
+          <a:fontRef idx="minor">
+            <a:schemeClr val="lt1"/>
+          </a:fontRef>
+        </p:style>
+        <p:txBody>
+          <a:bodyPr rtlCol="0" anchor="ctr"/>
+          <a:lstStyle/>
+          <a:p>
+            <a:pPr algn="ctr"/>
+          </a:p>
+        </p:txBody>
+      </p:sp>
+      <p:sp>
+        <p:nvSpPr>
+          <p:cNvPr id="173" name="Oval 172"/>
+          <p:cNvSpPr/>
+          <p:nvPr/>
+        </p:nvSpPr>
+        <p:spPr>
+          <a:xfrm>
+            <a:off x="3666744" y="5522976"/>
+            <a:ext cx="310896" cy="310896"/>
+          </a:xfrm>
+          <a:prstGeom prst="ellipse">
+            <a:avLst/>
+          </a:prstGeom>
+          <a:solidFill>
+            <a:srgbClr val="172131"/>
+          </a:solidFill>
+          <a:ln>
+            <a:noFill/>
+          </a:ln>
+          <a:effectLst/>
+        </p:spPr>
+        <p:style>
+          <a:lnRef idx="1">
+            <a:schemeClr val="accent1"/>
+          </a:lnRef>
+          <a:fillRef idx="3">
+            <a:schemeClr val="accent1"/>
+          </a:fillRef>
+          <a:effectRef idx="2">
+            <a:schemeClr val="accent1"/>
+          </a:effectRef>
+          <a:fontRef idx="minor">
+            <a:schemeClr val="lt1"/>
+          </a:fontRef>
+        </p:style>
+        <p:txBody>
+          <a:bodyPr rtlCol="0" anchor="ctr"/>
+          <a:lstStyle/>
+          <a:p>
+            <a:pPr algn="ctr"/>
+          </a:p>
+        </p:txBody>
+      </p:sp>
+      <p:pic>
+        <p:nvPicPr>
+          <p:cNvPr id="174" name="Picture 173" descr="image.png"/>
+          <p:cNvPicPr>
+            <a:picLocks noChangeAspect="1"/>
+          </p:cNvPicPr>
+          <p:nvPr/>
+        </p:nvPicPr>
+        <p:blipFill>
+          <a:blip r:embed="rId26"/>
+          <a:stretch>
+            <a:fillRect/>
+          </a:stretch>
+        </p:blipFill>
+        <p:spPr>
+          <a:xfrm>
+            <a:off x="3728923" y="5585155"/>
+            <a:ext cx="186537" cy="186537"/>
+          </a:xfrm>
+          <a:prstGeom prst="rect">
+            <a:avLst/>
+          </a:prstGeom>
+        </p:spPr>
+      </p:pic>
+      <p:sp>
+        <p:nvSpPr>
+          <p:cNvPr id="175" name="TextBox 174"/>
+          <p:cNvSpPr txBox="1"/>
+          <p:nvPr/>
+        </p:nvSpPr>
+        <p:spPr>
+          <a:xfrm>
+            <a:off x="4005072" y="5486400"/>
+            <a:ext cx="1051560" cy="384048"/>
+          </a:xfrm>
+          <a:prstGeom prst="rect">
+            <a:avLst/>
+          </a:prstGeom>
+          <a:noFill/>
+        </p:spPr>
+        <p:txBody>
+          <a:bodyPr wrap="square" anchor="ctr" lIns="36576" rIns="36576" tIns="18288" bIns="18288">
+            <a:spAutoFit/>
+          </a:bodyPr>
+          <a:lstStyle/>
+          <a:p>
+            <a:pPr algn="l">
+              <a:spcAft>
+                <a:spcPts val="0"/>
+              </a:spcAft>
+            </a:pPr>
+            <a:r>
+              <a:rPr sz="819" b="1" i="0">
+                <a:solidFill>
+                  <a:srgbClr val="172131"/>
+                </a:solidFill>
+                <a:latin typeface="Calibri"/>
+              </a:rPr>
+              <a:t>Docker on Render</a:t>
+            </a:r>
+          </a:p>
+          <a:p>
+            <a:pPr algn="l">
+              <a:spcAft>
+                <a:spcPts val="0"/>
+              </a:spcAft>
+            </a:pPr>
+            <a:r>
+              <a:rPr sz="700" b="0" i="0">
+                <a:solidFill>
+                  <a:srgbClr val="555F6D"/>
+                </a:solidFill>
+                <a:latin typeface="Calibri"/>
+              </a:rPr>
+              <a:t>FastAPI + LibreOffice + OCR</a:t>
+            </a:r>
+          </a:p>
+        </p:txBody>
+      </p:sp>
+      <p:cxnSp>
+        <p:nvCxnSpPr>
+          <p:cNvPr id="176" name="Connector 175"/>
+          <p:cNvCxnSpPr/>
+          <p:nvPr/>
+        </p:nvCxnSpPr>
+        <p:spPr>
+          <a:xfrm>
+            <a:off x="5074920" y="5678424"/>
+            <a:ext cx="155448" cy="0"/>
+          </a:xfrm>
+          <a:prstGeom prst="line">
+            <a:avLst/>
+          </a:prstGeom>
+          <a:ln w="19050">
+            <a:solidFill>
+              <a:srgbClr val="555F6D"/>
+            </a:solidFill>
+            <a:tailEnd type="triangle"/>
+          </a:ln>
+        </p:spPr>
+        <p:style>
+          <a:lnRef idx="2">
+            <a:schemeClr val="accent1"/>
+          </a:lnRef>
+          <a:fillRef idx="0">
+            <a:schemeClr val="accent1"/>
+          </a:fillRef>
+          <a:effectRef idx="1">
+            <a:schemeClr val="accent1"/>
+          </a:effectRef>
+          <a:fontRef idx="minor">
+            <a:schemeClr val="tx1"/>
+          </a:fontRef>
+        </p:style>
+      </p:cxnSp>
+      <p:sp>
+        <p:nvSpPr>
+          <p:cNvPr id="177" name="Rounded Rectangle 176"/>
+          <p:cNvSpPr/>
+          <p:nvPr/>
+        </p:nvSpPr>
+        <p:spPr>
+          <a:xfrm>
+            <a:off x="5239512" y="5486400"/>
+            <a:ext cx="1444752" cy="384048"/>
+          </a:xfrm>
+          <a:prstGeom prst="roundRect">
+            <a:avLst>
+              <a:gd name="adj" fmla="val 20000"/>
+            </a:avLst>
+          </a:prstGeom>
+          <a:solidFill>
+            <a:srgbClr val="FFFFFF"/>
+          </a:solidFill>
+          <a:ln w="9525">
+            <a:solidFill>
+              <a:srgbClr val="C9D0DA"/>
+            </a:solidFill>
+          </a:ln>
+          <a:effectLst/>
+        </p:spPr>
+        <p:style>
+          <a:lnRef idx="1">
+            <a:schemeClr val="accent1"/>
+          </a:lnRef>
+          <a:fillRef idx="3">
+            <a:schemeClr val="accent1"/>
+          </a:fillRef>
+          <a:effectRef idx="2">
+            <a:schemeClr val="accent1"/>
+          </a:effectRef>
+          <a:fontRef idx="minor">
+            <a:schemeClr val="lt1"/>
+          </a:fontRef>
+        </p:style>
+        <p:txBody>
+          <a:bodyPr rtlCol="0" anchor="ctr"/>
+          <a:lstStyle/>
+          <a:p>
+            <a:pPr algn="ctr"/>
+          </a:p>
+        </p:txBody>
+      </p:sp>
+      <p:sp>
+        <p:nvSpPr>
+          <p:cNvPr id="178" name="Oval 177"/>
+          <p:cNvSpPr/>
+          <p:nvPr/>
+        </p:nvSpPr>
+        <p:spPr>
+          <a:xfrm>
+            <a:off x="5285232" y="5522976"/>
+            <a:ext cx="310896" cy="310896"/>
+          </a:xfrm>
+          <a:prstGeom prst="ellipse">
+            <a:avLst/>
+          </a:prstGeom>
+          <a:solidFill>
+            <a:srgbClr val="172131"/>
+          </a:solidFill>
+          <a:ln>
+            <a:noFill/>
+          </a:ln>
+          <a:effectLst/>
+        </p:spPr>
+        <p:style>
+          <a:lnRef idx="1">
+            <a:schemeClr val="accent1"/>
+          </a:lnRef>
+          <a:fillRef idx="3">
+            <a:schemeClr val="accent1"/>
+          </a:fillRef>
+          <a:effectRef idx="2">
+            <a:schemeClr val="accent1"/>
+          </a:effectRef>
+          <a:fontRef idx="minor">
+            <a:schemeClr val="lt1"/>
+          </a:fontRef>
+        </p:style>
+        <p:txBody>
+          <a:bodyPr rtlCol="0" anchor="ctr"/>
+          <a:lstStyle/>
+          <a:p>
+            <a:pPr algn="ctr"/>
+          </a:p>
+        </p:txBody>
+      </p:sp>
+      <p:pic>
+        <p:nvPicPr>
+          <p:cNvPr id="179" name="Picture 178" descr="image.png"/>
+          <p:cNvPicPr>
+            <a:picLocks noChangeAspect="1"/>
+          </p:cNvPicPr>
+          <p:nvPr/>
+        </p:nvPicPr>
+        <p:blipFill>
+          <a:blip r:embed="rId27"/>
+          <a:stretch>
+            <a:fillRect/>
+          </a:stretch>
+        </p:blipFill>
+        <p:spPr>
+          <a:xfrm>
+            <a:off x="5347411" y="5585155"/>
+            <a:ext cx="186537" cy="186537"/>
+          </a:xfrm>
+          <a:prstGeom prst="rect">
+            <a:avLst/>
+          </a:prstGeom>
+        </p:spPr>
+      </p:pic>
+      <p:sp>
+        <p:nvSpPr>
+          <p:cNvPr id="180" name="TextBox 179"/>
+          <p:cNvSpPr txBox="1"/>
+          <p:nvPr/>
+        </p:nvSpPr>
+        <p:spPr>
+          <a:xfrm>
+            <a:off x="5623560" y="5486400"/>
+            <a:ext cx="1051560" cy="384048"/>
+          </a:xfrm>
+          <a:prstGeom prst="rect">
+            <a:avLst/>
+          </a:prstGeom>
+          <a:noFill/>
+        </p:spPr>
+        <p:txBody>
+          <a:bodyPr wrap="square" anchor="ctr" lIns="36576" rIns="36576" tIns="18288" bIns="18288">
+            <a:spAutoFit/>
+          </a:bodyPr>
+          <a:lstStyle/>
+          <a:p>
+            <a:pPr algn="l">
+              <a:spcAft>
+                <a:spcPts val="0"/>
+              </a:spcAft>
+            </a:pPr>
+            <a:r>
+              <a:rPr sz="819" b="1" i="0">
+                <a:solidFill>
+                  <a:srgbClr val="172131"/>
+                </a:solidFill>
+                <a:latin typeface="Calibri"/>
+              </a:rPr>
+              <a:t>SQLite volume</a:t>
+            </a:r>
+          </a:p>
+          <a:p>
+            <a:pPr algn="l">
+              <a:spcAft>
+                <a:spcPts val="0"/>
+              </a:spcAft>
+            </a:pPr>
+            <a:r>
+              <a:rPr sz="700" b="0" i="0">
+                <a:solidFill>
+                  <a:srgbClr val="555F6D"/>
+                </a:solidFill>
+                <a:latin typeface="Calibri"/>
+              </a:rPr>
+              <a:t>users · decks · caches</a:t>
+            </a:r>
+          </a:p>
+        </p:txBody>
+      </p:sp>
+      <p:cxnSp>
+        <p:nvCxnSpPr>
+          <p:cNvPr id="181" name="Connector 180"/>
+          <p:cNvCxnSpPr/>
+          <p:nvPr/>
+        </p:nvCxnSpPr>
+        <p:spPr>
+          <a:xfrm>
+            <a:off x="6693408" y="5678424"/>
+            <a:ext cx="155448" cy="0"/>
+          </a:xfrm>
+          <a:prstGeom prst="line">
+            <a:avLst/>
+          </a:prstGeom>
+          <a:ln w="19050">
+            <a:solidFill>
+              <a:srgbClr val="555F6D"/>
+            </a:solidFill>
+            <a:tailEnd type="triangle"/>
+          </a:ln>
+        </p:spPr>
+        <p:style>
+          <a:lnRef idx="2">
+            <a:schemeClr val="accent1"/>
+          </a:lnRef>
+          <a:fillRef idx="0">
+            <a:schemeClr val="accent1"/>
+          </a:fillRef>
+          <a:effectRef idx="1">
+            <a:schemeClr val="accent1"/>
+          </a:effectRef>
+          <a:fontRef idx="minor">
+            <a:schemeClr val="tx1"/>
+          </a:fontRef>
+        </p:style>
+      </p:cxnSp>
+      <p:sp>
+        <p:nvSpPr>
+          <p:cNvPr id="182" name="Rounded Rectangle 181"/>
+          <p:cNvSpPr/>
+          <p:nvPr/>
+        </p:nvSpPr>
+        <p:spPr>
+          <a:xfrm>
+            <a:off x="6858000" y="5486400"/>
+            <a:ext cx="1444752" cy="384048"/>
+          </a:xfrm>
+          <a:prstGeom prst="roundRect">
+            <a:avLst>
+              <a:gd name="adj" fmla="val 20000"/>
+            </a:avLst>
+          </a:prstGeom>
+          <a:solidFill>
+            <a:srgbClr val="FFFFFF"/>
+          </a:solidFill>
+          <a:ln w="9525">
+            <a:solidFill>
+              <a:srgbClr val="C9D0DA"/>
+            </a:solidFill>
+          </a:ln>
+          <a:effectLst/>
+        </p:spPr>
+        <p:style>
+          <a:lnRef idx="1">
+            <a:schemeClr val="accent1"/>
+          </a:lnRef>
+          <a:fillRef idx="3">
+            <a:schemeClr val="accent1"/>
+          </a:fillRef>
+          <a:effectRef idx="2">
+            <a:schemeClr val="accent1"/>
+          </a:effectRef>
+          <a:fontRef idx="minor">
+            <a:schemeClr val="lt1"/>
+          </a:fontRef>
+        </p:style>
+        <p:txBody>
+          <a:bodyPr rtlCol="0" anchor="ctr"/>
+          <a:lstStyle/>
+          <a:p>
+            <a:pPr algn="ctr"/>
+          </a:p>
+        </p:txBody>
+      </p:sp>
+      <p:sp>
+        <p:nvSpPr>
+          <p:cNvPr id="183" name="Oval 182"/>
+          <p:cNvSpPr/>
+          <p:nvPr/>
+        </p:nvSpPr>
+        <p:spPr>
+          <a:xfrm>
+            <a:off x="6903720" y="5522976"/>
+            <a:ext cx="310896" cy="310896"/>
+          </a:xfrm>
+          <a:prstGeom prst="ellipse">
+            <a:avLst/>
+          </a:prstGeom>
+          <a:solidFill>
+            <a:srgbClr val="172131"/>
+          </a:solidFill>
+          <a:ln>
+            <a:noFill/>
+          </a:ln>
+          <a:effectLst/>
+        </p:spPr>
+        <p:style>
+          <a:lnRef idx="1">
+            <a:schemeClr val="accent1"/>
+          </a:lnRef>
+          <a:fillRef idx="3">
+            <a:schemeClr val="accent1"/>
+          </a:fillRef>
+          <a:effectRef idx="2">
+            <a:schemeClr val="accent1"/>
+          </a:effectRef>
+          <a:fontRef idx="minor">
+            <a:schemeClr val="lt1"/>
+          </a:fontRef>
+        </p:style>
+        <p:txBody>
+          <a:bodyPr rtlCol="0" anchor="ctr"/>
+          <a:lstStyle/>
+          <a:p>
+            <a:pPr algn="ctr"/>
+          </a:p>
+        </p:txBody>
+      </p:sp>
+      <p:pic>
+        <p:nvPicPr>
+          <p:cNvPr id="184" name="Picture 183" descr="image.png"/>
+          <p:cNvPicPr>
+            <a:picLocks noChangeAspect="1"/>
+          </p:cNvPicPr>
+          <p:nvPr/>
+        </p:nvPicPr>
+        <p:blipFill>
+          <a:blip r:embed="rId28"/>
+          <a:stretch>
+            <a:fillRect/>
+          </a:stretch>
+        </p:blipFill>
+        <p:spPr>
+          <a:xfrm>
+            <a:off x="6965899" y="5585155"/>
+            <a:ext cx="186537" cy="186537"/>
+          </a:xfrm>
+          <a:prstGeom prst="rect">
+            <a:avLst/>
+          </a:prstGeom>
+        </p:spPr>
+      </p:pic>
+      <p:sp>
+        <p:nvSpPr>
+          <p:cNvPr id="185" name="TextBox 184"/>
+          <p:cNvSpPr txBox="1"/>
+          <p:nvPr/>
+        </p:nvSpPr>
+        <p:spPr>
+          <a:xfrm>
+            <a:off x="7242048" y="5486400"/>
+            <a:ext cx="1051560" cy="384048"/>
+          </a:xfrm>
+          <a:prstGeom prst="rect">
+            <a:avLst/>
+          </a:prstGeom>
+          <a:noFill/>
+        </p:spPr>
+        <p:txBody>
+          <a:bodyPr wrap="square" anchor="ctr" lIns="36576" rIns="36576" tIns="18288" bIns="18288">
+            <a:spAutoFit/>
+          </a:bodyPr>
+          <a:lstStyle/>
+          <a:p>
+            <a:pPr algn="l">
+              <a:spcAft>
+                <a:spcPts val="0"/>
+              </a:spcAft>
+            </a:pPr>
+            <a:r>
+              <a:rPr sz="819" b="1" i="0">
+                <a:solidFill>
+                  <a:srgbClr val="172131"/>
+                </a:solidFill>
+                <a:latin typeface="Calibri"/>
+              </a:rPr>
+              <a:t>Monitoring</a:t>
+            </a:r>
+          </a:p>
+          <a:p>
+            <a:pPr algn="l">
+              <a:spcAft>
+                <a:spcPts val="0"/>
+              </a:spcAft>
+            </a:pPr>
+            <a:r>
+              <a:rPr sz="700" b="0" i="0">
+                <a:solidFill>
+                  <a:srgbClr val="555F6D"/>
+                </a:solidFill>
+                <a:latin typeface="Calibri"/>
+              </a:rPr>
+              <a:t>health · audit · logs</a:t>
+            </a:r>
+          </a:p>
+        </p:txBody>
+      </p:sp>
+      <p:sp>
+        <p:nvSpPr>
+          <p:cNvPr id="186" name="Pentagon 185"/>
+          <p:cNvSpPr/>
+          <p:nvPr/>
+        </p:nvSpPr>
+        <p:spPr>
+          <a:xfrm>
+            <a:off x="274320" y="5989320"/>
+            <a:ext cx="1993392" cy="530352"/>
+          </a:xfrm>
+          <a:prstGeom prst="homePlate">
+            <a:avLst/>
+          </a:prstGeom>
+          <a:solidFill>
+            <a:srgbClr val="0E7C86"/>
+          </a:solidFill>
+          <a:ln>
+            <a:noFill/>
+          </a:ln>
+          <a:effectLst/>
+        </p:spPr>
+        <p:style>
+          <a:lnRef idx="1">
+            <a:schemeClr val="accent1"/>
+          </a:lnRef>
+          <a:fillRef idx="3">
+            <a:schemeClr val="accent1"/>
+          </a:fillRef>
+          <a:effectRef idx="2">
+            <a:schemeClr val="accent1"/>
+          </a:effectRef>
+          <a:fontRef idx="minor">
+            <a:schemeClr val="lt1"/>
+          </a:fontRef>
+        </p:style>
+        <p:txBody>
+          <a:bodyPr rtlCol="0" anchor="ctr"/>
+          <a:lstStyle/>
+          <a:p>
+            <a:pPr algn="ctr"/>
+          </a:p>
+        </p:txBody>
+      </p:sp>
+      <p:sp>
+        <p:nvSpPr>
+          <p:cNvPr id="187" name="TextBox 186"/>
+          <p:cNvSpPr txBox="1"/>
+          <p:nvPr/>
+        </p:nvSpPr>
+        <p:spPr>
+          <a:xfrm>
+            <a:off x="347472" y="5989320"/>
+            <a:ext cx="1783080" cy="530352"/>
+          </a:xfrm>
+          <a:prstGeom prst="rect">
+            <a:avLst/>
+          </a:prstGeom>
+          <a:noFill/>
+        </p:spPr>
+        <p:txBody>
+          <a:bodyPr wrap="square" anchor="ctr" lIns="36576" rIns="36576" tIns="18288" bIns="18288">
+            <a:spAutoFit/>
+          </a:bodyPr>
+          <a:lstStyle/>
+          <a:p>
+            <a:pPr algn="l">
+              <a:spcAft>
+                <a:spcPts val="0"/>
+              </a:spcAft>
+            </a:pPr>
+            <a:r>
+              <a:rPr sz="950" b="1" i="0">
+                <a:solidFill>
+                  <a:srgbClr val="FFFFFF"/>
+                </a:solidFill>
+                <a:latin typeface="Calibri"/>
+              </a:rPr>
+              <a:t>1 · Read faithfully</a:t>
+            </a:r>
+          </a:p>
+          <a:p>
+            <a:pPr algn="l">
+              <a:spcAft>
+                <a:spcPts val="0"/>
+              </a:spcAft>
+            </a:pPr>
+            <a:r>
+              <a:rPr sz="800" b="0" i="0">
+                <a:solidFill>
+                  <a:srgbClr val="FFFFFF"/>
+                </a:solidFill>
+                <a:latin typeface="Calibri"/>
+              </a:rPr>
+              <a:t>every page, every figure kept</a:t>
+            </a:r>
+          </a:p>
+        </p:txBody>
+      </p:sp>
+      <p:sp>
+        <p:nvSpPr>
+          <p:cNvPr id="188" name="Pentagon 187"/>
+          <p:cNvSpPr/>
+          <p:nvPr/>
+        </p:nvSpPr>
+        <p:spPr>
+          <a:xfrm>
+            <a:off x="2331720" y="5989320"/>
+            <a:ext cx="1993392" cy="530352"/>
+          </a:xfrm>
+          <a:prstGeom prst="homePlate">
+            <a:avLst/>
           </a:prstGeom>
           <a:solidFill>
             <a:srgbClr val="1F5FBF"/>
@@ -16422,17 +18603,272 @@
       </p:sp>
       <p:sp>
         <p:nvSpPr>
-          <p:cNvPr id="126" name="Rectangle 125"/>
+          <p:cNvPr id="189" name="TextBox 188"/>
+          <p:cNvSpPr txBox="1"/>
+          <p:nvPr/>
+        </p:nvSpPr>
+        <p:spPr>
+          <a:xfrm>
+            <a:off x="2404872" y="5989320"/>
+            <a:ext cx="1783080" cy="530352"/>
+          </a:xfrm>
+          <a:prstGeom prst="rect">
+            <a:avLst/>
+          </a:prstGeom>
+          <a:noFill/>
+        </p:spPr>
+        <p:txBody>
+          <a:bodyPr wrap="square" anchor="ctr" lIns="36576" rIns="36576" tIns="18288" bIns="18288">
+            <a:spAutoFit/>
+          </a:bodyPr>
+          <a:lstStyle/>
+          <a:p>
+            <a:pPr algn="l">
+              <a:spcAft>
+                <a:spcPts val="0"/>
+              </a:spcAft>
+            </a:pPr>
+            <a:r>
+              <a:rPr sz="950" b="1" i="0">
+                <a:solidFill>
+                  <a:srgbClr val="FFFFFF"/>
+                </a:solidFill>
+                <a:latin typeface="Calibri"/>
+              </a:rPr>
+              <a:t>2 · Decide with rules</a:t>
+            </a:r>
+          </a:p>
+          <a:p>
+            <a:pPr algn="l">
+              <a:spcAft>
+                <a:spcPts val="0"/>
+              </a:spcAft>
+            </a:pPr>
+            <a:r>
+              <a:rPr sz="800" b="0" i="0">
+                <a:solidFill>
+                  <a:srgbClr val="FFFFFF"/>
+                </a:solidFill>
+                <a:latin typeface="Calibri"/>
+              </a:rPr>
+              <a:t>explainable visual per slide</a:t>
+            </a:r>
+          </a:p>
+        </p:txBody>
+      </p:sp>
+      <p:sp>
+        <p:nvSpPr>
+          <p:cNvPr id="190" name="Pentagon 189"/>
           <p:cNvSpPr/>
           <p:nvPr/>
         </p:nvSpPr>
         <p:spPr>
           <a:xfrm>
-            <a:off x="8458200" y="1078992"/>
-            <a:ext cx="3474720" cy="164592"/>
-          </a:xfrm>
-          <a:prstGeom prst="rect">
-            <a:avLst/>
+            <a:off x="4389120" y="5989320"/>
+            <a:ext cx="1993392" cy="530352"/>
+          </a:xfrm>
+          <a:prstGeom prst="homePlate">
+            <a:avLst/>
+          </a:prstGeom>
+          <a:solidFill>
+            <a:srgbClr val="F27A2E"/>
+          </a:solidFill>
+          <a:ln>
+            <a:noFill/>
+          </a:ln>
+          <a:effectLst/>
+        </p:spPr>
+        <p:style>
+          <a:lnRef idx="1">
+            <a:schemeClr val="accent1"/>
+          </a:lnRef>
+          <a:fillRef idx="3">
+            <a:schemeClr val="accent1"/>
+          </a:fillRef>
+          <a:effectRef idx="2">
+            <a:schemeClr val="accent1"/>
+          </a:effectRef>
+          <a:fontRef idx="minor">
+            <a:schemeClr val="lt1"/>
+          </a:fontRef>
+        </p:style>
+        <p:txBody>
+          <a:bodyPr rtlCol="0" anchor="ctr"/>
+          <a:lstStyle/>
+          <a:p>
+            <a:pPr algn="ctr"/>
+          </a:p>
+        </p:txBody>
+      </p:sp>
+      <p:sp>
+        <p:nvSpPr>
+          <p:cNvPr id="191" name="TextBox 190"/>
+          <p:cNvSpPr txBox="1"/>
+          <p:nvPr/>
+        </p:nvSpPr>
+        <p:spPr>
+          <a:xfrm>
+            <a:off x="4462272" y="5989320"/>
+            <a:ext cx="1783080" cy="530352"/>
+          </a:xfrm>
+          <a:prstGeom prst="rect">
+            <a:avLst/>
+          </a:prstGeom>
+          <a:noFill/>
+        </p:spPr>
+        <p:txBody>
+          <a:bodyPr wrap="square" anchor="ctr" lIns="36576" rIns="36576" tIns="18288" bIns="18288">
+            <a:spAutoFit/>
+          </a:bodyPr>
+          <a:lstStyle/>
+          <a:p>
+            <a:pPr algn="l">
+              <a:spcAft>
+                <a:spcPts val="0"/>
+              </a:spcAft>
+            </a:pPr>
+            <a:r>
+              <a:rPr sz="950" b="1" i="0">
+                <a:solidFill>
+                  <a:srgbClr val="FFFFFF"/>
+                </a:solidFill>
+                <a:latin typeface="Calibri"/>
+              </a:rPr>
+              <a:t>3 · Enrich with AI</a:t>
+            </a:r>
+          </a:p>
+          <a:p>
+            <a:pPr algn="l">
+              <a:spcAft>
+                <a:spcPts val="0"/>
+              </a:spcAft>
+            </a:pPr>
+            <a:r>
+              <a:rPr sz="800" b="0" i="0">
+                <a:solidFill>
+                  <a:srgbClr val="FFFFFF"/>
+                </a:solidFill>
+                <a:latin typeface="Calibri"/>
+              </a:rPr>
+              <a:t>checked titles, diagrams, labs</a:t>
+            </a:r>
+          </a:p>
+        </p:txBody>
+      </p:sp>
+      <p:sp>
+        <p:nvSpPr>
+          <p:cNvPr id="192" name="Pentagon 191"/>
+          <p:cNvSpPr/>
+          <p:nvPr/>
+        </p:nvSpPr>
+        <p:spPr>
+          <a:xfrm>
+            <a:off x="6446520" y="5989320"/>
+            <a:ext cx="1993392" cy="530352"/>
+          </a:xfrm>
+          <a:prstGeom prst="homePlate">
+            <a:avLst/>
+          </a:prstGeom>
+          <a:solidFill>
+            <a:srgbClr val="172131"/>
+          </a:solidFill>
+          <a:ln>
+            <a:noFill/>
+          </a:ln>
+          <a:effectLst/>
+        </p:spPr>
+        <p:style>
+          <a:lnRef idx="1">
+            <a:schemeClr val="accent1"/>
+          </a:lnRef>
+          <a:fillRef idx="3">
+            <a:schemeClr val="accent1"/>
+          </a:fillRef>
+          <a:effectRef idx="2">
+            <a:schemeClr val="accent1"/>
+          </a:effectRef>
+          <a:fontRef idx="minor">
+            <a:schemeClr val="lt1"/>
+          </a:fontRef>
+        </p:style>
+        <p:txBody>
+          <a:bodyPr rtlCol="0" anchor="ctr"/>
+          <a:lstStyle/>
+          <a:p>
+            <a:pPr algn="ctr"/>
+          </a:p>
+        </p:txBody>
+      </p:sp>
+      <p:sp>
+        <p:nvSpPr>
+          <p:cNvPr id="193" name="TextBox 192"/>
+          <p:cNvSpPr txBox="1"/>
+          <p:nvPr/>
+        </p:nvSpPr>
+        <p:spPr>
+          <a:xfrm>
+            <a:off x="6519672" y="5989320"/>
+            <a:ext cx="1783080" cy="530352"/>
+          </a:xfrm>
+          <a:prstGeom prst="rect">
+            <a:avLst/>
+          </a:prstGeom>
+          <a:noFill/>
+        </p:spPr>
+        <p:txBody>
+          <a:bodyPr wrap="square" anchor="ctr" lIns="36576" rIns="36576" tIns="18288" bIns="18288">
+            <a:spAutoFit/>
+          </a:bodyPr>
+          <a:lstStyle/>
+          <a:p>
+            <a:pPr algn="l">
+              <a:spcAft>
+                <a:spcPts val="0"/>
+              </a:spcAft>
+            </a:pPr>
+            <a:r>
+              <a:rPr sz="950" b="1" i="0">
+                <a:solidFill>
+                  <a:srgbClr val="FFFFFF"/>
+                </a:solidFill>
+                <a:latin typeface="Calibri"/>
+              </a:rPr>
+              <a:t>4 · Build and audit</a:t>
+            </a:r>
+          </a:p>
+          <a:p>
+            <a:pPr algn="l">
+              <a:spcAft>
+                <a:spcPts val="0"/>
+              </a:spcAft>
+            </a:pPr>
+            <a:r>
+              <a:rPr sz="800" b="0" i="0">
+                <a:solidFill>
+                  <a:srgbClr val="FFFFFF"/>
+                </a:solidFill>
+                <a:latin typeface="Calibri"/>
+              </a:rPr>
+              <a:t>PPTX + web deck, no breaks</a:t>
+            </a:r>
+          </a:p>
+        </p:txBody>
+      </p:sp>
+      <p:sp>
+        <p:nvSpPr>
+          <p:cNvPr id="194" name="Rounded Rectangle 193"/>
+          <p:cNvSpPr/>
+          <p:nvPr/>
+        </p:nvSpPr>
+        <p:spPr>
+          <a:xfrm>
+            <a:off x="8595360" y="896112"/>
+            <a:ext cx="3337560" cy="292608"/>
+          </a:xfrm>
+          <a:prstGeom prst="roundRect">
+            <a:avLst>
+              <a:gd name="adj" fmla="val 40000"/>
+            </a:avLst>
           </a:prstGeom>
           <a:solidFill>
             <a:srgbClr val="1F5FBF"/>
@@ -16464,9 +18900,1729 @@
           </a:p>
         </p:txBody>
       </p:sp>
+      <p:sp>
+        <p:nvSpPr>
+          <p:cNvPr id="195" name="TextBox 194"/>
+          <p:cNvSpPr txBox="1"/>
+          <p:nvPr/>
+        </p:nvSpPr>
+        <p:spPr>
+          <a:xfrm>
+            <a:off x="8595360" y="896112"/>
+            <a:ext cx="3337560" cy="292608"/>
+          </a:xfrm>
+          <a:prstGeom prst="rect">
+            <a:avLst/>
+          </a:prstGeom>
+          <a:noFill/>
+        </p:spPr>
+        <p:txBody>
+          <a:bodyPr wrap="square" anchor="ctr" lIns="36576" rIns="36576" tIns="18288" bIns="18288">
+            <a:spAutoFit/>
+          </a:bodyPr>
+          <a:lstStyle/>
+          <a:p>
+            <a:pPr algn="ctr">
+              <a:spcAft>
+                <a:spcPts val="300"/>
+              </a:spcAft>
+            </a:pPr>
+            <a:r>
+              <a:rPr sz="1200" b="1" i="0">
+                <a:solidFill>
+                  <a:srgbClr val="FFFFFF"/>
+                </a:solidFill>
+                <a:latin typeface="Calibri"/>
+              </a:rPr>
+              <a:t>Technologies to be used</a:t>
+            </a:r>
+          </a:p>
+        </p:txBody>
+      </p:sp>
+      <p:sp>
+        <p:nvSpPr>
+          <p:cNvPr id="196" name="Rounded Rectangle 195"/>
+          <p:cNvSpPr/>
+          <p:nvPr/>
+        </p:nvSpPr>
+        <p:spPr>
+          <a:xfrm>
+            <a:off x="8796528" y="1280160"/>
+            <a:ext cx="457200" cy="457200"/>
+          </a:xfrm>
+          <a:prstGeom prst="roundRect">
+            <a:avLst>
+              <a:gd name="adj" fmla="val 25000"/>
+            </a:avLst>
+          </a:prstGeom>
+          <a:solidFill>
+            <a:srgbClr val="149ECA"/>
+          </a:solidFill>
+          <a:ln>
+            <a:noFill/>
+          </a:ln>
+          <a:effectLst/>
+        </p:spPr>
+        <p:style>
+          <a:lnRef idx="1">
+            <a:schemeClr val="accent1"/>
+          </a:lnRef>
+          <a:fillRef idx="3">
+            <a:schemeClr val="accent1"/>
+          </a:fillRef>
+          <a:effectRef idx="2">
+            <a:schemeClr val="accent1"/>
+          </a:effectRef>
+          <a:fontRef idx="minor">
+            <a:schemeClr val="lt1"/>
+          </a:fontRef>
+        </p:style>
+        <p:txBody>
+          <a:bodyPr rtlCol="0" anchor="ctr"/>
+          <a:lstStyle/>
+          <a:p>
+            <a:pPr algn="ctr"/>
+          </a:p>
+        </p:txBody>
+      </p:sp>
       <p:pic>
         <p:nvPicPr>
-          <p:cNvPr id="127" name="Picture 126" descr="image.png"/>
+          <p:cNvPr id="197" name="Picture 196" descr="image.png"/>
+          <p:cNvPicPr>
+            <a:picLocks noChangeAspect="1"/>
+          </p:cNvPicPr>
+          <p:nvPr/>
+        </p:nvPicPr>
+        <p:blipFill>
+          <a:blip r:embed="rId29"/>
+          <a:stretch>
+            <a:fillRect/>
+          </a:stretch>
+        </p:blipFill>
+        <p:spPr>
+          <a:xfrm>
+            <a:off x="8887967" y="1371600"/>
+            <a:ext cx="274320" cy="274320"/>
+          </a:xfrm>
+          <a:prstGeom prst="rect">
+            <a:avLst/>
+          </a:prstGeom>
+        </p:spPr>
+      </p:pic>
+      <p:sp>
+        <p:nvSpPr>
+          <p:cNvPr id="198" name="TextBox 197"/>
+          <p:cNvSpPr txBox="1"/>
+          <p:nvPr/>
+        </p:nvSpPr>
+        <p:spPr>
+          <a:xfrm>
+            <a:off x="8595359" y="1737360"/>
+            <a:ext cx="868680" cy="219456"/>
+          </a:xfrm>
+          <a:prstGeom prst="rect">
+            <a:avLst/>
+          </a:prstGeom>
+          <a:noFill/>
+        </p:spPr>
+        <p:txBody>
+          <a:bodyPr wrap="square" anchor="t" lIns="36576" rIns="36576" tIns="18288" bIns="18288">
+            <a:spAutoFit/>
+          </a:bodyPr>
+          <a:lstStyle/>
+          <a:p>
+            <a:pPr algn="ctr">
+              <a:spcAft>
+                <a:spcPts val="300"/>
+              </a:spcAft>
+            </a:pPr>
+            <a:r>
+              <a:rPr sz="780" b="1" i="0">
+                <a:solidFill>
+                  <a:srgbClr val="172131"/>
+                </a:solidFill>
+                <a:latin typeface="Calibri"/>
+              </a:rPr>
+              <a:t>React</a:t>
+            </a:r>
+          </a:p>
+        </p:txBody>
+      </p:sp>
+      <p:sp>
+        <p:nvSpPr>
+          <p:cNvPr id="199" name="Rounded Rectangle 198"/>
+          <p:cNvSpPr/>
+          <p:nvPr/>
+        </p:nvSpPr>
+        <p:spPr>
+          <a:xfrm>
+            <a:off x="9619488" y="1280160"/>
+            <a:ext cx="457200" cy="457200"/>
+          </a:xfrm>
+          <a:prstGeom prst="roundRect">
+            <a:avLst>
+              <a:gd name="adj" fmla="val 25000"/>
+            </a:avLst>
+          </a:prstGeom>
+          <a:solidFill>
+            <a:srgbClr val="8B5CF6"/>
+          </a:solidFill>
+          <a:ln>
+            <a:noFill/>
+          </a:ln>
+          <a:effectLst/>
+        </p:spPr>
+        <p:style>
+          <a:lnRef idx="1">
+            <a:schemeClr val="accent1"/>
+          </a:lnRef>
+          <a:fillRef idx="3">
+            <a:schemeClr val="accent1"/>
+          </a:fillRef>
+          <a:effectRef idx="2">
+            <a:schemeClr val="accent1"/>
+          </a:effectRef>
+          <a:fontRef idx="minor">
+            <a:schemeClr val="lt1"/>
+          </a:fontRef>
+        </p:style>
+        <p:txBody>
+          <a:bodyPr rtlCol="0" anchor="ctr"/>
+          <a:lstStyle/>
+          <a:p>
+            <a:pPr algn="ctr"/>
+          </a:p>
+        </p:txBody>
+      </p:sp>
+      <p:pic>
+        <p:nvPicPr>
+          <p:cNvPr id="200" name="Picture 199" descr="image.png"/>
+          <p:cNvPicPr>
+            <a:picLocks noChangeAspect="1"/>
+          </p:cNvPicPr>
+          <p:nvPr/>
+        </p:nvPicPr>
+        <p:blipFill>
+          <a:blip r:embed="rId30"/>
+          <a:stretch>
+            <a:fillRect/>
+          </a:stretch>
+        </p:blipFill>
+        <p:spPr>
+          <a:xfrm>
+            <a:off x="9710928" y="1371600"/>
+            <a:ext cx="274320" cy="274320"/>
+          </a:xfrm>
+          <a:prstGeom prst="rect">
+            <a:avLst/>
+          </a:prstGeom>
+        </p:spPr>
+      </p:pic>
+      <p:sp>
+        <p:nvSpPr>
+          <p:cNvPr id="201" name="TextBox 200"/>
+          <p:cNvSpPr txBox="1"/>
+          <p:nvPr/>
+        </p:nvSpPr>
+        <p:spPr>
+          <a:xfrm>
+            <a:off x="9418319" y="1737360"/>
+            <a:ext cx="868680" cy="219456"/>
+          </a:xfrm>
+          <a:prstGeom prst="rect">
+            <a:avLst/>
+          </a:prstGeom>
+          <a:noFill/>
+        </p:spPr>
+        <p:txBody>
+          <a:bodyPr wrap="square" anchor="t" lIns="36576" rIns="36576" tIns="18288" bIns="18288">
+            <a:spAutoFit/>
+          </a:bodyPr>
+          <a:lstStyle/>
+          <a:p>
+            <a:pPr algn="ctr">
+              <a:spcAft>
+                <a:spcPts val="300"/>
+              </a:spcAft>
+            </a:pPr>
+            <a:r>
+              <a:rPr sz="780" b="1" i="0">
+                <a:solidFill>
+                  <a:srgbClr val="172131"/>
+                </a:solidFill>
+                <a:latin typeface="Calibri"/>
+              </a:rPr>
+              <a:t>Vite</a:t>
+            </a:r>
+          </a:p>
+        </p:txBody>
+      </p:sp>
+      <p:sp>
+        <p:nvSpPr>
+          <p:cNvPr id="202" name="Rounded Rectangle 201"/>
+          <p:cNvSpPr/>
+          <p:nvPr/>
+        </p:nvSpPr>
+        <p:spPr>
+          <a:xfrm>
+            <a:off x="10442448" y="1280160"/>
+            <a:ext cx="457200" cy="457200"/>
+          </a:xfrm>
+          <a:prstGeom prst="roundRect">
+            <a:avLst>
+              <a:gd name="adj" fmla="val 25000"/>
+            </a:avLst>
+          </a:prstGeom>
+          <a:solidFill>
+            <a:srgbClr val="06B6D4"/>
+          </a:solidFill>
+          <a:ln>
+            <a:noFill/>
+          </a:ln>
+          <a:effectLst/>
+        </p:spPr>
+        <p:style>
+          <a:lnRef idx="1">
+            <a:schemeClr val="accent1"/>
+          </a:lnRef>
+          <a:fillRef idx="3">
+            <a:schemeClr val="accent1"/>
+          </a:fillRef>
+          <a:effectRef idx="2">
+            <a:schemeClr val="accent1"/>
+          </a:effectRef>
+          <a:fontRef idx="minor">
+            <a:schemeClr val="lt1"/>
+          </a:fontRef>
+        </p:style>
+        <p:txBody>
+          <a:bodyPr rtlCol="0" anchor="ctr"/>
+          <a:lstStyle/>
+          <a:p>
+            <a:pPr algn="ctr"/>
+          </a:p>
+        </p:txBody>
+      </p:sp>
+      <p:pic>
+        <p:nvPicPr>
+          <p:cNvPr id="203" name="Picture 202" descr="image.png"/>
+          <p:cNvPicPr>
+            <a:picLocks noChangeAspect="1"/>
+          </p:cNvPicPr>
+          <p:nvPr/>
+        </p:nvPicPr>
+        <p:blipFill>
+          <a:blip r:embed="rId31"/>
+          <a:stretch>
+            <a:fillRect/>
+          </a:stretch>
+        </p:blipFill>
+        <p:spPr>
+          <a:xfrm>
+            <a:off x="10533888" y="1371600"/>
+            <a:ext cx="274320" cy="274320"/>
+          </a:xfrm>
+          <a:prstGeom prst="rect">
+            <a:avLst/>
+          </a:prstGeom>
+        </p:spPr>
+      </p:pic>
+      <p:sp>
+        <p:nvSpPr>
+          <p:cNvPr id="204" name="TextBox 203"/>
+          <p:cNvSpPr txBox="1"/>
+          <p:nvPr/>
+        </p:nvSpPr>
+        <p:spPr>
+          <a:xfrm>
+            <a:off x="10241280" y="1737360"/>
+            <a:ext cx="868680" cy="219456"/>
+          </a:xfrm>
+          <a:prstGeom prst="rect">
+            <a:avLst/>
+          </a:prstGeom>
+          <a:noFill/>
+        </p:spPr>
+        <p:txBody>
+          <a:bodyPr wrap="square" anchor="t" lIns="36576" rIns="36576" tIns="18288" bIns="18288">
+            <a:spAutoFit/>
+          </a:bodyPr>
+          <a:lstStyle/>
+          <a:p>
+            <a:pPr algn="ctr">
+              <a:spcAft>
+                <a:spcPts val="300"/>
+              </a:spcAft>
+            </a:pPr>
+            <a:r>
+              <a:rPr sz="780" b="1" i="0">
+                <a:solidFill>
+                  <a:srgbClr val="172131"/>
+                </a:solidFill>
+                <a:latin typeface="Calibri"/>
+              </a:rPr>
+              <a:t>Tailwind</a:t>
+            </a:r>
+          </a:p>
+        </p:txBody>
+      </p:sp>
+      <p:sp>
+        <p:nvSpPr>
+          <p:cNvPr id="205" name="Rounded Rectangle 204"/>
+          <p:cNvSpPr/>
+          <p:nvPr/>
+        </p:nvSpPr>
+        <p:spPr>
+          <a:xfrm>
+            <a:off x="11265407" y="1280160"/>
+            <a:ext cx="457200" cy="457200"/>
+          </a:xfrm>
+          <a:prstGeom prst="roundRect">
+            <a:avLst>
+              <a:gd name="adj" fmla="val 25000"/>
+            </a:avLst>
+          </a:prstGeom>
+          <a:solidFill>
+            <a:srgbClr val="E09F1F"/>
+          </a:solidFill>
+          <a:ln>
+            <a:noFill/>
+          </a:ln>
+          <a:effectLst/>
+        </p:spPr>
+        <p:style>
+          <a:lnRef idx="1">
+            <a:schemeClr val="accent1"/>
+          </a:lnRef>
+          <a:fillRef idx="3">
+            <a:schemeClr val="accent1"/>
+          </a:fillRef>
+          <a:effectRef idx="2">
+            <a:schemeClr val="accent1"/>
+          </a:effectRef>
+          <a:fontRef idx="minor">
+            <a:schemeClr val="lt1"/>
+          </a:fontRef>
+        </p:style>
+        <p:txBody>
+          <a:bodyPr rtlCol="0" anchor="ctr"/>
+          <a:lstStyle/>
+          <a:p>
+            <a:pPr algn="ctr"/>
+          </a:p>
+        </p:txBody>
+      </p:sp>
+      <p:pic>
+        <p:nvPicPr>
+          <p:cNvPr id="206" name="Picture 205" descr="image.png"/>
+          <p:cNvPicPr>
+            <a:picLocks noChangeAspect="1"/>
+          </p:cNvPicPr>
+          <p:nvPr/>
+        </p:nvPicPr>
+        <p:blipFill>
+          <a:blip r:embed="rId20"/>
+          <a:stretch>
+            <a:fillRect/>
+          </a:stretch>
+        </p:blipFill>
+        <p:spPr>
+          <a:xfrm>
+            <a:off x="11356847" y="1371600"/>
+            <a:ext cx="274320" cy="274320"/>
+          </a:xfrm>
+          <a:prstGeom prst="rect">
+            <a:avLst/>
+          </a:prstGeom>
+        </p:spPr>
+      </p:pic>
+      <p:sp>
+        <p:nvSpPr>
+          <p:cNvPr id="207" name="TextBox 206"/>
+          <p:cNvSpPr txBox="1"/>
+          <p:nvPr/>
+        </p:nvSpPr>
+        <p:spPr>
+          <a:xfrm>
+            <a:off x="11064239" y="1737360"/>
+            <a:ext cx="868680" cy="219456"/>
+          </a:xfrm>
+          <a:prstGeom prst="rect">
+            <a:avLst/>
+          </a:prstGeom>
+          <a:noFill/>
+        </p:spPr>
+        <p:txBody>
+          <a:bodyPr wrap="square" anchor="t" lIns="36576" rIns="36576" tIns="18288" bIns="18288">
+            <a:spAutoFit/>
+          </a:bodyPr>
+          <a:lstStyle/>
+          <a:p>
+            <a:pPr algn="ctr">
+              <a:spcAft>
+                <a:spcPts val="300"/>
+              </a:spcAft>
+            </a:pPr>
+            <a:r>
+              <a:rPr sz="780" b="1" i="0">
+                <a:solidFill>
+                  <a:srgbClr val="172131"/>
+                </a:solidFill>
+                <a:latin typeface="Calibri"/>
+              </a:rPr>
+              <a:t>Reveal.js</a:t>
+            </a:r>
+          </a:p>
+        </p:txBody>
+      </p:sp>
+      <p:sp>
+        <p:nvSpPr>
+          <p:cNvPr id="208" name="Rounded Rectangle 207"/>
+          <p:cNvSpPr/>
+          <p:nvPr/>
+        </p:nvSpPr>
+        <p:spPr>
+          <a:xfrm>
+            <a:off x="8796528" y="1993391"/>
+            <a:ext cx="457200" cy="457200"/>
+          </a:xfrm>
+          <a:prstGeom prst="roundRect">
+            <a:avLst>
+              <a:gd name="adj" fmla="val 25000"/>
+            </a:avLst>
+          </a:prstGeom>
+          <a:solidFill>
+            <a:srgbClr val="306FA8"/>
+          </a:solidFill>
+          <a:ln>
+            <a:noFill/>
+          </a:ln>
+          <a:effectLst/>
+        </p:spPr>
+        <p:style>
+          <a:lnRef idx="1">
+            <a:schemeClr val="accent1"/>
+          </a:lnRef>
+          <a:fillRef idx="3">
+            <a:schemeClr val="accent1"/>
+          </a:fillRef>
+          <a:effectRef idx="2">
+            <a:schemeClr val="accent1"/>
+          </a:effectRef>
+          <a:fontRef idx="minor">
+            <a:schemeClr val="lt1"/>
+          </a:fontRef>
+        </p:style>
+        <p:txBody>
+          <a:bodyPr rtlCol="0" anchor="ctr"/>
+          <a:lstStyle/>
+          <a:p>
+            <a:pPr algn="ctr"/>
+          </a:p>
+        </p:txBody>
+      </p:sp>
+      <p:pic>
+        <p:nvPicPr>
+          <p:cNvPr id="209" name="Picture 208" descr="image.png"/>
+          <p:cNvPicPr>
+            <a:picLocks noChangeAspect="1"/>
+          </p:cNvPicPr>
+          <p:nvPr/>
+        </p:nvPicPr>
+        <p:blipFill>
+          <a:blip r:embed="rId18"/>
+          <a:stretch>
+            <a:fillRect/>
+          </a:stretch>
+        </p:blipFill>
+        <p:spPr>
+          <a:xfrm>
+            <a:off x="8887967" y="2084831"/>
+            <a:ext cx="274320" cy="274320"/>
+          </a:xfrm>
+          <a:prstGeom prst="rect">
+            <a:avLst/>
+          </a:prstGeom>
+        </p:spPr>
+      </p:pic>
+      <p:sp>
+        <p:nvSpPr>
+          <p:cNvPr id="210" name="TextBox 209"/>
+          <p:cNvSpPr txBox="1"/>
+          <p:nvPr/>
+        </p:nvSpPr>
+        <p:spPr>
+          <a:xfrm>
+            <a:off x="8595359" y="2450591"/>
+            <a:ext cx="868680" cy="219456"/>
+          </a:xfrm>
+          <a:prstGeom prst="rect">
+            <a:avLst/>
+          </a:prstGeom>
+          <a:noFill/>
+        </p:spPr>
+        <p:txBody>
+          <a:bodyPr wrap="square" anchor="t" lIns="36576" rIns="36576" tIns="18288" bIns="18288">
+            <a:spAutoFit/>
+          </a:bodyPr>
+          <a:lstStyle/>
+          <a:p>
+            <a:pPr algn="ctr">
+              <a:spcAft>
+                <a:spcPts val="300"/>
+              </a:spcAft>
+            </a:pPr>
+            <a:r>
+              <a:rPr sz="780" b="1" i="0">
+                <a:solidFill>
+                  <a:srgbClr val="172131"/>
+                </a:solidFill>
+                <a:latin typeface="Calibri"/>
+              </a:rPr>
+              <a:t>Python</a:t>
+            </a:r>
+          </a:p>
+        </p:txBody>
+      </p:sp>
+      <p:sp>
+        <p:nvSpPr>
+          <p:cNvPr id="211" name="Rounded Rectangle 210"/>
+          <p:cNvSpPr/>
+          <p:nvPr/>
+        </p:nvSpPr>
+        <p:spPr>
+          <a:xfrm>
+            <a:off x="9619488" y="1993391"/>
+            <a:ext cx="457200" cy="457200"/>
+          </a:xfrm>
+          <a:prstGeom prst="roundRect">
+            <a:avLst>
+              <a:gd name="adj" fmla="val 25000"/>
+            </a:avLst>
+          </a:prstGeom>
+          <a:solidFill>
+            <a:srgbClr val="009688"/>
+          </a:solidFill>
+          <a:ln>
+            <a:noFill/>
+          </a:ln>
+          <a:effectLst/>
+        </p:spPr>
+        <p:style>
+          <a:lnRef idx="1">
+            <a:schemeClr val="accent1"/>
+          </a:lnRef>
+          <a:fillRef idx="3">
+            <a:schemeClr val="accent1"/>
+          </a:fillRef>
+          <a:effectRef idx="2">
+            <a:schemeClr val="accent1"/>
+          </a:effectRef>
+          <a:fontRef idx="minor">
+            <a:schemeClr val="lt1"/>
+          </a:fontRef>
+        </p:style>
+        <p:txBody>
+          <a:bodyPr rtlCol="0" anchor="ctr"/>
+          <a:lstStyle/>
+          <a:p>
+            <a:pPr algn="ctr"/>
+          </a:p>
+        </p:txBody>
+      </p:sp>
+      <p:pic>
+        <p:nvPicPr>
+          <p:cNvPr id="212" name="Picture 211" descr="image.png"/>
+          <p:cNvPicPr>
+            <a:picLocks noChangeAspect="1"/>
+          </p:cNvPicPr>
+          <p:nvPr/>
+        </p:nvPicPr>
+        <p:blipFill>
+          <a:blip r:embed="rId30"/>
+          <a:stretch>
+            <a:fillRect/>
+          </a:stretch>
+        </p:blipFill>
+        <p:spPr>
+          <a:xfrm>
+            <a:off x="9710928" y="2084831"/>
+            <a:ext cx="274320" cy="274320"/>
+          </a:xfrm>
+          <a:prstGeom prst="rect">
+            <a:avLst/>
+          </a:prstGeom>
+        </p:spPr>
+      </p:pic>
+      <p:sp>
+        <p:nvSpPr>
+          <p:cNvPr id="213" name="TextBox 212"/>
+          <p:cNvSpPr txBox="1"/>
+          <p:nvPr/>
+        </p:nvSpPr>
+        <p:spPr>
+          <a:xfrm>
+            <a:off x="9418319" y="2450591"/>
+            <a:ext cx="868680" cy="219456"/>
+          </a:xfrm>
+          <a:prstGeom prst="rect">
+            <a:avLst/>
+          </a:prstGeom>
+          <a:noFill/>
+        </p:spPr>
+        <p:txBody>
+          <a:bodyPr wrap="square" anchor="t" lIns="36576" rIns="36576" tIns="18288" bIns="18288">
+            <a:spAutoFit/>
+          </a:bodyPr>
+          <a:lstStyle/>
+          <a:p>
+            <a:pPr algn="ctr">
+              <a:spcAft>
+                <a:spcPts val="300"/>
+              </a:spcAft>
+            </a:pPr>
+            <a:r>
+              <a:rPr sz="780" b="1" i="0">
+                <a:solidFill>
+                  <a:srgbClr val="172131"/>
+                </a:solidFill>
+                <a:latin typeface="Calibri"/>
+              </a:rPr>
+              <a:t>FastAPI</a:t>
+            </a:r>
+          </a:p>
+        </p:txBody>
+      </p:sp>
+      <p:sp>
+        <p:nvSpPr>
+          <p:cNvPr id="214" name="Rounded Rectangle 213"/>
+          <p:cNvSpPr/>
+          <p:nvPr/>
+        </p:nvSpPr>
+        <p:spPr>
+          <a:xfrm>
+            <a:off x="10442448" y="1993391"/>
+            <a:ext cx="457200" cy="457200"/>
+          </a:xfrm>
+          <a:prstGeom prst="roundRect">
+            <a:avLst>
+              <a:gd name="adj" fmla="val 25000"/>
+            </a:avLst>
+          </a:prstGeom>
+          <a:solidFill>
+            <a:srgbClr val="0F5F8C"/>
+          </a:solidFill>
+          <a:ln>
+            <a:noFill/>
+          </a:ln>
+          <a:effectLst/>
+        </p:spPr>
+        <p:style>
+          <a:lnRef idx="1">
+            <a:schemeClr val="accent1"/>
+          </a:lnRef>
+          <a:fillRef idx="3">
+            <a:schemeClr val="accent1"/>
+          </a:fillRef>
+          <a:effectRef idx="2">
+            <a:schemeClr val="accent1"/>
+          </a:effectRef>
+          <a:fontRef idx="minor">
+            <a:schemeClr val="lt1"/>
+          </a:fontRef>
+        </p:style>
+        <p:txBody>
+          <a:bodyPr rtlCol="0" anchor="ctr"/>
+          <a:lstStyle/>
+          <a:p>
+            <a:pPr algn="ctr"/>
+          </a:p>
+        </p:txBody>
+      </p:sp>
+      <p:pic>
+        <p:nvPicPr>
+          <p:cNvPr id="215" name="Picture 214" descr="image.png"/>
+          <p:cNvPicPr>
+            <a:picLocks noChangeAspect="1"/>
+          </p:cNvPicPr>
+          <p:nvPr/>
+        </p:nvPicPr>
+        <p:blipFill>
+          <a:blip r:embed="rId27"/>
+          <a:stretch>
+            <a:fillRect/>
+          </a:stretch>
+        </p:blipFill>
+        <p:spPr>
+          <a:xfrm>
+            <a:off x="10533888" y="2084831"/>
+            <a:ext cx="274320" cy="274320"/>
+          </a:xfrm>
+          <a:prstGeom prst="rect">
+            <a:avLst/>
+          </a:prstGeom>
+        </p:spPr>
+      </p:pic>
+      <p:sp>
+        <p:nvSpPr>
+          <p:cNvPr id="216" name="TextBox 215"/>
+          <p:cNvSpPr txBox="1"/>
+          <p:nvPr/>
+        </p:nvSpPr>
+        <p:spPr>
+          <a:xfrm>
+            <a:off x="10241280" y="2450591"/>
+            <a:ext cx="868680" cy="219456"/>
+          </a:xfrm>
+          <a:prstGeom prst="rect">
+            <a:avLst/>
+          </a:prstGeom>
+          <a:noFill/>
+        </p:spPr>
+        <p:txBody>
+          <a:bodyPr wrap="square" anchor="t" lIns="36576" rIns="36576" tIns="18288" bIns="18288">
+            <a:spAutoFit/>
+          </a:bodyPr>
+          <a:lstStyle/>
+          <a:p>
+            <a:pPr algn="ctr">
+              <a:spcAft>
+                <a:spcPts val="300"/>
+              </a:spcAft>
+            </a:pPr>
+            <a:r>
+              <a:rPr sz="780" b="1" i="0">
+                <a:solidFill>
+                  <a:srgbClr val="172131"/>
+                </a:solidFill>
+                <a:latin typeface="Calibri"/>
+              </a:rPr>
+              <a:t>SQLite</a:t>
+            </a:r>
+          </a:p>
+        </p:txBody>
+      </p:sp>
+      <p:sp>
+        <p:nvSpPr>
+          <p:cNvPr id="217" name="Rounded Rectangle 216"/>
+          <p:cNvSpPr/>
+          <p:nvPr/>
+        </p:nvSpPr>
+        <p:spPr>
+          <a:xfrm>
+            <a:off x="11265407" y="1993391"/>
+            <a:ext cx="457200" cy="457200"/>
+          </a:xfrm>
+          <a:prstGeom prst="roundRect">
+            <a:avLst>
+              <a:gd name="adj" fmla="val 25000"/>
+            </a:avLst>
+          </a:prstGeom>
+          <a:solidFill>
+            <a:srgbClr val="C03030"/>
+          </a:solidFill>
+          <a:ln>
+            <a:noFill/>
+          </a:ln>
+          <a:effectLst/>
+        </p:spPr>
+        <p:style>
+          <a:lnRef idx="1">
+            <a:schemeClr val="accent1"/>
+          </a:lnRef>
+          <a:fillRef idx="3">
+            <a:schemeClr val="accent1"/>
+          </a:fillRef>
+          <a:effectRef idx="2">
+            <a:schemeClr val="accent1"/>
+          </a:effectRef>
+          <a:fontRef idx="minor">
+            <a:schemeClr val="lt1"/>
+          </a:fontRef>
+        </p:style>
+        <p:txBody>
+          <a:bodyPr rtlCol="0" anchor="ctr"/>
+          <a:lstStyle/>
+          <a:p>
+            <a:pPr algn="ctr"/>
+          </a:p>
+        </p:txBody>
+      </p:sp>
+      <p:pic>
+        <p:nvPicPr>
+          <p:cNvPr id="218" name="Picture 217" descr="image.png"/>
+          <p:cNvPicPr>
+            <a:picLocks noChangeAspect="1"/>
+          </p:cNvPicPr>
+          <p:nvPr/>
+        </p:nvPicPr>
+        <p:blipFill>
+          <a:blip r:embed="rId3"/>
+          <a:stretch>
+            <a:fillRect/>
+          </a:stretch>
+        </p:blipFill>
+        <p:spPr>
+          <a:xfrm>
+            <a:off x="11356847" y="2084831"/>
+            <a:ext cx="274320" cy="274320"/>
+          </a:xfrm>
+          <a:prstGeom prst="rect">
+            <a:avLst/>
+          </a:prstGeom>
+        </p:spPr>
+      </p:pic>
+      <p:sp>
+        <p:nvSpPr>
+          <p:cNvPr id="219" name="TextBox 218"/>
+          <p:cNvSpPr txBox="1"/>
+          <p:nvPr/>
+        </p:nvSpPr>
+        <p:spPr>
+          <a:xfrm>
+            <a:off x="11064239" y="2450591"/>
+            <a:ext cx="868680" cy="219456"/>
+          </a:xfrm>
+          <a:prstGeom prst="rect">
+            <a:avLst/>
+          </a:prstGeom>
+          <a:noFill/>
+        </p:spPr>
+        <p:txBody>
+          <a:bodyPr wrap="square" anchor="t" lIns="36576" rIns="36576" tIns="18288" bIns="18288">
+            <a:spAutoFit/>
+          </a:bodyPr>
+          <a:lstStyle/>
+          <a:p>
+            <a:pPr algn="ctr">
+              <a:spcAft>
+                <a:spcPts val="300"/>
+              </a:spcAft>
+            </a:pPr>
+            <a:r>
+              <a:rPr sz="780" b="1" i="0">
+                <a:solidFill>
+                  <a:srgbClr val="172131"/>
+                </a:solidFill>
+                <a:latin typeface="Calibri"/>
+              </a:rPr>
+              <a:t>PyMuPDF</a:t>
+            </a:r>
+          </a:p>
+        </p:txBody>
+      </p:sp>
+      <p:sp>
+        <p:nvSpPr>
+          <p:cNvPr id="220" name="Rounded Rectangle 219"/>
+          <p:cNvSpPr/>
+          <p:nvPr/>
+        </p:nvSpPr>
+        <p:spPr>
+          <a:xfrm>
+            <a:off x="8796528" y="2706624"/>
+            <a:ext cx="457200" cy="457200"/>
+          </a:xfrm>
+          <a:prstGeom prst="roundRect">
+            <a:avLst>
+              <a:gd name="adj" fmla="val 25000"/>
+            </a:avLst>
+          </a:prstGeom>
+          <a:solidFill>
+            <a:srgbClr val="18A303"/>
+          </a:solidFill>
+          <a:ln>
+            <a:noFill/>
+          </a:ln>
+          <a:effectLst/>
+        </p:spPr>
+        <p:style>
+          <a:lnRef idx="1">
+            <a:schemeClr val="accent1"/>
+          </a:lnRef>
+          <a:fillRef idx="3">
+            <a:schemeClr val="accent1"/>
+          </a:fillRef>
+          <a:effectRef idx="2">
+            <a:schemeClr val="accent1"/>
+          </a:effectRef>
+          <a:fontRef idx="minor">
+            <a:schemeClr val="lt1"/>
+          </a:fontRef>
+        </p:style>
+        <p:txBody>
+          <a:bodyPr rtlCol="0" anchor="ctr"/>
+          <a:lstStyle/>
+          <a:p>
+            <a:pPr algn="ctr"/>
+          </a:p>
+        </p:txBody>
+      </p:sp>
+      <p:pic>
+        <p:nvPicPr>
+          <p:cNvPr id="221" name="Picture 220" descr="image.png"/>
+          <p:cNvPicPr>
+            <a:picLocks noChangeAspect="1"/>
+          </p:cNvPicPr>
+          <p:nvPr/>
+        </p:nvPicPr>
+        <p:blipFill>
+          <a:blip r:embed="rId7"/>
+          <a:stretch>
+            <a:fillRect/>
+          </a:stretch>
+        </p:blipFill>
+        <p:spPr>
+          <a:xfrm>
+            <a:off x="8887967" y="2798064"/>
+            <a:ext cx="274320" cy="274320"/>
+          </a:xfrm>
+          <a:prstGeom prst="rect">
+            <a:avLst/>
+          </a:prstGeom>
+        </p:spPr>
+      </p:pic>
+      <p:sp>
+        <p:nvSpPr>
+          <p:cNvPr id="222" name="TextBox 221"/>
+          <p:cNvSpPr txBox="1"/>
+          <p:nvPr/>
+        </p:nvSpPr>
+        <p:spPr>
+          <a:xfrm>
+            <a:off x="8595359" y="3163824"/>
+            <a:ext cx="868680" cy="219456"/>
+          </a:xfrm>
+          <a:prstGeom prst="rect">
+            <a:avLst/>
+          </a:prstGeom>
+          <a:noFill/>
+        </p:spPr>
+        <p:txBody>
+          <a:bodyPr wrap="square" anchor="t" lIns="36576" rIns="36576" tIns="18288" bIns="18288">
+            <a:spAutoFit/>
+          </a:bodyPr>
+          <a:lstStyle/>
+          <a:p>
+            <a:pPr algn="ctr">
+              <a:spcAft>
+                <a:spcPts val="300"/>
+              </a:spcAft>
+            </a:pPr>
+            <a:r>
+              <a:rPr sz="780" b="1" i="0">
+                <a:solidFill>
+                  <a:srgbClr val="172131"/>
+                </a:solidFill>
+                <a:latin typeface="Calibri"/>
+              </a:rPr>
+              <a:t>LibreOffice</a:t>
+            </a:r>
+          </a:p>
+        </p:txBody>
+      </p:sp>
+      <p:sp>
+        <p:nvSpPr>
+          <p:cNvPr id="223" name="Rounded Rectangle 222"/>
+          <p:cNvSpPr/>
+          <p:nvPr/>
+        </p:nvSpPr>
+        <p:spPr>
+          <a:xfrm>
+            <a:off x="9619488" y="2706624"/>
+            <a:ext cx="457200" cy="457200"/>
+          </a:xfrm>
+          <a:prstGeom prst="roundRect">
+            <a:avLst>
+              <a:gd name="adj" fmla="val 25000"/>
+            </a:avLst>
+          </a:prstGeom>
+          <a:solidFill>
+            <a:srgbClr val="555F6D"/>
+          </a:solidFill>
+          <a:ln>
+            <a:noFill/>
+          </a:ln>
+          <a:effectLst/>
+        </p:spPr>
+        <p:style>
+          <a:lnRef idx="1">
+            <a:schemeClr val="accent1"/>
+          </a:lnRef>
+          <a:fillRef idx="3">
+            <a:schemeClr val="accent1"/>
+          </a:fillRef>
+          <a:effectRef idx="2">
+            <a:schemeClr val="accent1"/>
+          </a:effectRef>
+          <a:fontRef idx="minor">
+            <a:schemeClr val="lt1"/>
+          </a:fontRef>
+        </p:style>
+        <p:txBody>
+          <a:bodyPr rtlCol="0" anchor="ctr"/>
+          <a:lstStyle/>
+          <a:p>
+            <a:pPr algn="ctr"/>
+          </a:p>
+        </p:txBody>
+      </p:sp>
+      <p:pic>
+        <p:nvPicPr>
+          <p:cNvPr id="224" name="Picture 223" descr="image.png"/>
+          <p:cNvPicPr>
+            <a:picLocks noChangeAspect="1"/>
+          </p:cNvPicPr>
+          <p:nvPr/>
+        </p:nvPicPr>
+        <p:blipFill>
+          <a:blip r:embed="rId9"/>
+          <a:stretch>
+            <a:fillRect/>
+          </a:stretch>
+        </p:blipFill>
+        <p:spPr>
+          <a:xfrm>
+            <a:off x="9710928" y="2798064"/>
+            <a:ext cx="274320" cy="274320"/>
+          </a:xfrm>
+          <a:prstGeom prst="rect">
+            <a:avLst/>
+          </a:prstGeom>
+        </p:spPr>
+      </p:pic>
+      <p:sp>
+        <p:nvSpPr>
+          <p:cNvPr id="225" name="TextBox 224"/>
+          <p:cNvSpPr txBox="1"/>
+          <p:nvPr/>
+        </p:nvSpPr>
+        <p:spPr>
+          <a:xfrm>
+            <a:off x="9418319" y="3163824"/>
+            <a:ext cx="868680" cy="219456"/>
+          </a:xfrm>
+          <a:prstGeom prst="rect">
+            <a:avLst/>
+          </a:prstGeom>
+          <a:noFill/>
+        </p:spPr>
+        <p:txBody>
+          <a:bodyPr wrap="square" anchor="t" lIns="36576" rIns="36576" tIns="18288" bIns="18288">
+            <a:spAutoFit/>
+          </a:bodyPr>
+          <a:lstStyle/>
+          <a:p>
+            <a:pPr algn="ctr">
+              <a:spcAft>
+                <a:spcPts val="300"/>
+              </a:spcAft>
+            </a:pPr>
+            <a:r>
+              <a:rPr sz="780" b="1" i="0">
+                <a:solidFill>
+                  <a:srgbClr val="172131"/>
+                </a:solidFill>
+                <a:latin typeface="Calibri"/>
+              </a:rPr>
+              <a:t>Tesseract</a:t>
+            </a:r>
+          </a:p>
+        </p:txBody>
+      </p:sp>
+      <p:sp>
+        <p:nvSpPr>
+          <p:cNvPr id="226" name="Rounded Rectangle 225"/>
+          <p:cNvSpPr/>
+          <p:nvPr/>
+        </p:nvSpPr>
+        <p:spPr>
+          <a:xfrm>
+            <a:off x="10442448" y="2706624"/>
+            <a:ext cx="457200" cy="457200"/>
+          </a:xfrm>
+          <a:prstGeom prst="roundRect">
+            <a:avLst>
+              <a:gd name="adj" fmla="val 25000"/>
+            </a:avLst>
+          </a:prstGeom>
+          <a:solidFill>
+            <a:srgbClr val="4285F4"/>
+          </a:solidFill>
+          <a:ln>
+            <a:noFill/>
+          </a:ln>
+          <a:effectLst/>
+        </p:spPr>
+        <p:style>
+          <a:lnRef idx="1">
+            <a:schemeClr val="accent1"/>
+          </a:lnRef>
+          <a:fillRef idx="3">
+            <a:schemeClr val="accent1"/>
+          </a:fillRef>
+          <a:effectRef idx="2">
+            <a:schemeClr val="accent1"/>
+          </a:effectRef>
+          <a:fontRef idx="minor">
+            <a:schemeClr val="lt1"/>
+          </a:fontRef>
+        </p:style>
+        <p:txBody>
+          <a:bodyPr rtlCol="0" anchor="ctr"/>
+          <a:lstStyle/>
+          <a:p>
+            <a:pPr algn="ctr"/>
+          </a:p>
+        </p:txBody>
+      </p:sp>
+      <p:pic>
+        <p:nvPicPr>
+          <p:cNvPr id="227" name="Picture 226" descr="image.png"/>
+          <p:cNvPicPr>
+            <a:picLocks noChangeAspect="1"/>
+          </p:cNvPicPr>
+          <p:nvPr/>
+        </p:nvPicPr>
+        <p:blipFill>
+          <a:blip r:embed="rId32"/>
+          <a:stretch>
+            <a:fillRect/>
+          </a:stretch>
+        </p:blipFill>
+        <p:spPr>
+          <a:xfrm>
+            <a:off x="10533888" y="2798064"/>
+            <a:ext cx="274320" cy="274320"/>
+          </a:xfrm>
+          <a:prstGeom prst="rect">
+            <a:avLst/>
+          </a:prstGeom>
+        </p:spPr>
+      </p:pic>
+      <p:sp>
+        <p:nvSpPr>
+          <p:cNvPr id="228" name="TextBox 227"/>
+          <p:cNvSpPr txBox="1"/>
+          <p:nvPr/>
+        </p:nvSpPr>
+        <p:spPr>
+          <a:xfrm>
+            <a:off x="10241280" y="3163824"/>
+            <a:ext cx="868680" cy="219456"/>
+          </a:xfrm>
+          <a:prstGeom prst="rect">
+            <a:avLst/>
+          </a:prstGeom>
+          <a:noFill/>
+        </p:spPr>
+        <p:txBody>
+          <a:bodyPr wrap="square" anchor="t" lIns="36576" rIns="36576" tIns="18288" bIns="18288">
+            <a:spAutoFit/>
+          </a:bodyPr>
+          <a:lstStyle/>
+          <a:p>
+            <a:pPr algn="ctr">
+              <a:spcAft>
+                <a:spcPts val="300"/>
+              </a:spcAft>
+            </a:pPr>
+            <a:r>
+              <a:rPr sz="780" b="1" i="0">
+                <a:solidFill>
+                  <a:srgbClr val="172131"/>
+                </a:solidFill>
+                <a:latin typeface="Calibri"/>
+              </a:rPr>
+              <a:t>Gemini</a:t>
+            </a:r>
+          </a:p>
+        </p:txBody>
+      </p:sp>
+      <p:sp>
+        <p:nvSpPr>
+          <p:cNvPr id="229" name="Rounded Rectangle 228"/>
+          <p:cNvSpPr/>
+          <p:nvPr/>
+        </p:nvSpPr>
+        <p:spPr>
+          <a:xfrm>
+            <a:off x="11265407" y="2706624"/>
+            <a:ext cx="457200" cy="457200"/>
+          </a:xfrm>
+          <a:prstGeom prst="roundRect">
+            <a:avLst>
+              <a:gd name="adj" fmla="val 25000"/>
+            </a:avLst>
+          </a:prstGeom>
+          <a:solidFill>
+            <a:srgbClr val="F55036"/>
+          </a:solidFill>
+          <a:ln>
+            <a:noFill/>
+          </a:ln>
+          <a:effectLst/>
+        </p:spPr>
+        <p:style>
+          <a:lnRef idx="1">
+            <a:schemeClr val="accent1"/>
+          </a:lnRef>
+          <a:fillRef idx="3">
+            <a:schemeClr val="accent1"/>
+          </a:fillRef>
+          <a:effectRef idx="2">
+            <a:schemeClr val="accent1"/>
+          </a:effectRef>
+          <a:fontRef idx="minor">
+            <a:schemeClr val="lt1"/>
+          </a:fontRef>
+        </p:style>
+        <p:txBody>
+          <a:bodyPr rtlCol="0" anchor="ctr"/>
+          <a:lstStyle/>
+          <a:p>
+            <a:pPr algn="ctr"/>
+          </a:p>
+        </p:txBody>
+      </p:sp>
+      <p:pic>
+        <p:nvPicPr>
+          <p:cNvPr id="230" name="Picture 229" descr="image.png"/>
+          <p:cNvPicPr>
+            <a:picLocks noChangeAspect="1"/>
+          </p:cNvPicPr>
+          <p:nvPr/>
+        </p:nvPicPr>
+        <p:blipFill>
+          <a:blip r:embed="rId19"/>
+          <a:stretch>
+            <a:fillRect/>
+          </a:stretch>
+        </p:blipFill>
+        <p:spPr>
+          <a:xfrm>
+            <a:off x="11356847" y="2798064"/>
+            <a:ext cx="274320" cy="274320"/>
+          </a:xfrm>
+          <a:prstGeom prst="rect">
+            <a:avLst/>
+          </a:prstGeom>
+        </p:spPr>
+      </p:pic>
+      <p:sp>
+        <p:nvSpPr>
+          <p:cNvPr id="231" name="TextBox 230"/>
+          <p:cNvSpPr txBox="1"/>
+          <p:nvPr/>
+        </p:nvSpPr>
+        <p:spPr>
+          <a:xfrm>
+            <a:off x="11064239" y="3163824"/>
+            <a:ext cx="868680" cy="219456"/>
+          </a:xfrm>
+          <a:prstGeom prst="rect">
+            <a:avLst/>
+          </a:prstGeom>
+          <a:noFill/>
+        </p:spPr>
+        <p:txBody>
+          <a:bodyPr wrap="square" anchor="t" lIns="36576" rIns="36576" tIns="18288" bIns="18288">
+            <a:spAutoFit/>
+          </a:bodyPr>
+          <a:lstStyle/>
+          <a:p>
+            <a:pPr algn="ctr">
+              <a:spcAft>
+                <a:spcPts val="300"/>
+              </a:spcAft>
+            </a:pPr>
+            <a:r>
+              <a:rPr sz="780" b="1" i="0">
+                <a:solidFill>
+                  <a:srgbClr val="172131"/>
+                </a:solidFill>
+                <a:latin typeface="Calibri"/>
+              </a:rPr>
+              <a:t>Groq</a:t>
+            </a:r>
+          </a:p>
+        </p:txBody>
+      </p:sp>
+      <p:sp>
+        <p:nvSpPr>
+          <p:cNvPr id="232" name="Rounded Rectangle 231"/>
+          <p:cNvSpPr/>
+          <p:nvPr/>
+        </p:nvSpPr>
+        <p:spPr>
+          <a:xfrm>
+            <a:off x="8796528" y="3419856"/>
+            <a:ext cx="457200" cy="457200"/>
+          </a:xfrm>
+          <a:prstGeom prst="roundRect">
+            <a:avLst>
+              <a:gd name="adj" fmla="val 25000"/>
+            </a:avLst>
+          </a:prstGeom>
+          <a:solidFill>
+            <a:srgbClr val="3B7A3B"/>
+          </a:solidFill>
+          <a:ln>
+            <a:noFill/>
+          </a:ln>
+          <a:effectLst/>
+        </p:spPr>
+        <p:style>
+          <a:lnRef idx="1">
+            <a:schemeClr val="accent1"/>
+          </a:lnRef>
+          <a:fillRef idx="3">
+            <a:schemeClr val="accent1"/>
+          </a:fillRef>
+          <a:effectRef idx="2">
+            <a:schemeClr val="accent1"/>
+          </a:effectRef>
+          <a:fontRef idx="minor">
+            <a:schemeClr val="lt1"/>
+          </a:fontRef>
+        </p:style>
+        <p:txBody>
+          <a:bodyPr rtlCol="0" anchor="ctr"/>
+          <a:lstStyle/>
+          <a:p>
+            <a:pPr algn="ctr"/>
+          </a:p>
+        </p:txBody>
+      </p:sp>
+      <p:pic>
+        <p:nvPicPr>
+          <p:cNvPr id="233" name="Picture 232" descr="image.png"/>
+          <p:cNvPicPr>
+            <a:picLocks noChangeAspect="1"/>
+          </p:cNvPicPr>
+          <p:nvPr/>
+        </p:nvPicPr>
+        <p:blipFill>
+          <a:blip r:embed="rId15"/>
+          <a:stretch>
+            <a:fillRect/>
+          </a:stretch>
+        </p:blipFill>
+        <p:spPr>
+          <a:xfrm>
+            <a:off x="8887967" y="3511296"/>
+            <a:ext cx="274320" cy="274320"/>
+          </a:xfrm>
+          <a:prstGeom prst="rect">
+            <a:avLst/>
+          </a:prstGeom>
+        </p:spPr>
+      </p:pic>
+      <p:sp>
+        <p:nvSpPr>
+          <p:cNvPr id="234" name="TextBox 233"/>
+          <p:cNvSpPr txBox="1"/>
+          <p:nvPr/>
+        </p:nvSpPr>
+        <p:spPr>
+          <a:xfrm>
+            <a:off x="8595359" y="3877056"/>
+            <a:ext cx="868680" cy="219456"/>
+          </a:xfrm>
+          <a:prstGeom prst="rect">
+            <a:avLst/>
+          </a:prstGeom>
+          <a:noFill/>
+        </p:spPr>
+        <p:txBody>
+          <a:bodyPr wrap="square" anchor="t" lIns="36576" rIns="36576" tIns="18288" bIns="18288">
+            <a:spAutoFit/>
+          </a:bodyPr>
+          <a:lstStyle/>
+          <a:p>
+            <a:pPr algn="ctr">
+              <a:spcAft>
+                <a:spcPts val="300"/>
+              </a:spcAft>
+            </a:pPr>
+            <a:r>
+              <a:rPr sz="780" b="1" i="0">
+                <a:solidFill>
+                  <a:srgbClr val="172131"/>
+                </a:solidFill>
+                <a:latin typeface="Calibri"/>
+              </a:rPr>
+              <a:t>SymPy</a:t>
+            </a:r>
+          </a:p>
+        </p:txBody>
+      </p:sp>
+      <p:sp>
+        <p:nvSpPr>
+          <p:cNvPr id="235" name="Rounded Rectangle 234"/>
+          <p:cNvSpPr/>
+          <p:nvPr/>
+        </p:nvSpPr>
+        <p:spPr>
+          <a:xfrm>
+            <a:off x="9619488" y="3419856"/>
+            <a:ext cx="457200" cy="457200"/>
+          </a:xfrm>
+          <a:prstGeom prst="roundRect">
+            <a:avLst>
+              <a:gd name="adj" fmla="val 25000"/>
+            </a:avLst>
+          </a:prstGeom>
+          <a:solidFill>
+            <a:srgbClr val="C89B10"/>
+          </a:solidFill>
+          <a:ln>
+            <a:noFill/>
+          </a:ln>
+          <a:effectLst/>
+        </p:spPr>
+        <p:style>
+          <a:lnRef idx="1">
+            <a:schemeClr val="accent1"/>
+          </a:lnRef>
+          <a:fillRef idx="3">
+            <a:schemeClr val="accent1"/>
+          </a:fillRef>
+          <a:effectRef idx="2">
+            <a:schemeClr val="accent1"/>
+          </a:effectRef>
+          <a:fontRef idx="minor">
+            <a:schemeClr val="lt1"/>
+          </a:fontRef>
+        </p:style>
+        <p:txBody>
+          <a:bodyPr rtlCol="0" anchor="ctr"/>
+          <a:lstStyle/>
+          <a:p>
+            <a:pPr algn="ctr"/>
+          </a:p>
+        </p:txBody>
+      </p:sp>
+      <p:pic>
+        <p:nvPicPr>
+          <p:cNvPr id="236" name="Picture 235" descr="image.png"/>
+          <p:cNvPicPr>
+            <a:picLocks noChangeAspect="1"/>
+          </p:cNvPicPr>
+          <p:nvPr/>
+        </p:nvPicPr>
+        <p:blipFill>
+          <a:blip r:embed="rId33"/>
+          <a:stretch>
+            <a:fillRect/>
+          </a:stretch>
+        </p:blipFill>
+        <p:spPr>
+          <a:xfrm>
+            <a:off x="9710928" y="3511296"/>
+            <a:ext cx="274320" cy="274320"/>
+          </a:xfrm>
+          <a:prstGeom prst="rect">
+            <a:avLst/>
+          </a:prstGeom>
+        </p:spPr>
+      </p:pic>
+      <p:sp>
+        <p:nvSpPr>
+          <p:cNvPr id="237" name="TextBox 236"/>
+          <p:cNvSpPr txBox="1"/>
+          <p:nvPr/>
+        </p:nvSpPr>
+        <p:spPr>
+          <a:xfrm>
+            <a:off x="9418319" y="3877056"/>
+            <a:ext cx="868680" cy="219456"/>
+          </a:xfrm>
+          <a:prstGeom prst="rect">
+            <a:avLst/>
+          </a:prstGeom>
+          <a:noFill/>
+        </p:spPr>
+        <p:txBody>
+          <a:bodyPr wrap="square" anchor="t" lIns="36576" rIns="36576" tIns="18288" bIns="18288">
+            <a:spAutoFit/>
+          </a:bodyPr>
+          <a:lstStyle/>
+          <a:p>
+            <a:pPr algn="ctr">
+              <a:spcAft>
+                <a:spcPts val="300"/>
+              </a:spcAft>
+            </a:pPr>
+            <a:r>
+              <a:rPr sz="780" b="1" i="0">
+                <a:solidFill>
+                  <a:srgbClr val="172131"/>
+                </a:solidFill>
+                <a:latin typeface="Calibri"/>
+              </a:rPr>
+              <a:t>pytest</a:t>
+            </a:r>
+          </a:p>
+        </p:txBody>
+      </p:sp>
+      <p:sp>
+        <p:nvSpPr>
+          <p:cNvPr id="238" name="Rounded Rectangle 237"/>
+          <p:cNvSpPr/>
+          <p:nvPr/>
+        </p:nvSpPr>
+        <p:spPr>
+          <a:xfrm>
+            <a:off x="10442448" y="3419856"/>
+            <a:ext cx="457200" cy="457200"/>
+          </a:xfrm>
+          <a:prstGeom prst="roundRect">
+            <a:avLst>
+              <a:gd name="adj" fmla="val 25000"/>
+            </a:avLst>
+          </a:prstGeom>
+          <a:solidFill>
+            <a:srgbClr val="172131"/>
+          </a:solidFill>
+          <a:ln>
+            <a:noFill/>
+          </a:ln>
+          <a:effectLst/>
+        </p:spPr>
+        <p:style>
+          <a:lnRef idx="1">
+            <a:schemeClr val="accent1"/>
+          </a:lnRef>
+          <a:fillRef idx="3">
+            <a:schemeClr val="accent1"/>
+          </a:fillRef>
+          <a:effectRef idx="2">
+            <a:schemeClr val="accent1"/>
+          </a:effectRef>
+          <a:fontRef idx="minor">
+            <a:schemeClr val="lt1"/>
+          </a:fontRef>
+        </p:style>
+        <p:txBody>
+          <a:bodyPr rtlCol="0" anchor="ctr"/>
+          <a:lstStyle/>
+          <a:p>
+            <a:pPr algn="ctr"/>
+          </a:p>
+        </p:txBody>
+      </p:sp>
+      <p:pic>
+        <p:nvPicPr>
+          <p:cNvPr id="239" name="Picture 238" descr="image.png"/>
+          <p:cNvPicPr>
+            <a:picLocks noChangeAspect="1"/>
+          </p:cNvPicPr>
+          <p:nvPr/>
+        </p:nvPicPr>
+        <p:blipFill>
+          <a:blip r:embed="rId25"/>
+          <a:stretch>
+            <a:fillRect/>
+          </a:stretch>
+        </p:blipFill>
+        <p:spPr>
+          <a:xfrm>
+            <a:off x="10533888" y="3511296"/>
+            <a:ext cx="274320" cy="274320"/>
+          </a:xfrm>
+          <a:prstGeom prst="rect">
+            <a:avLst/>
+          </a:prstGeom>
+        </p:spPr>
+      </p:pic>
+      <p:sp>
+        <p:nvSpPr>
+          <p:cNvPr id="240" name="TextBox 239"/>
+          <p:cNvSpPr txBox="1"/>
+          <p:nvPr/>
+        </p:nvSpPr>
+        <p:spPr>
+          <a:xfrm>
+            <a:off x="10241280" y="3877056"/>
+            <a:ext cx="868680" cy="219456"/>
+          </a:xfrm>
+          <a:prstGeom prst="rect">
+            <a:avLst/>
+          </a:prstGeom>
+          <a:noFill/>
+        </p:spPr>
+        <p:txBody>
+          <a:bodyPr wrap="square" anchor="t" lIns="36576" rIns="36576" tIns="18288" bIns="18288">
+            <a:spAutoFit/>
+          </a:bodyPr>
+          <a:lstStyle/>
+          <a:p>
+            <a:pPr algn="ctr">
+              <a:spcAft>
+                <a:spcPts val="300"/>
+              </a:spcAft>
+            </a:pPr>
+            <a:r>
+              <a:rPr sz="780" b="1" i="0">
+                <a:solidFill>
+                  <a:srgbClr val="172131"/>
+                </a:solidFill>
+                <a:latin typeface="Calibri"/>
+              </a:rPr>
+              <a:t>GitHub</a:t>
+            </a:r>
+          </a:p>
+        </p:txBody>
+      </p:sp>
+      <p:sp>
+        <p:nvSpPr>
+          <p:cNvPr id="241" name="Rounded Rectangle 240"/>
+          <p:cNvSpPr/>
+          <p:nvPr/>
+        </p:nvSpPr>
+        <p:spPr>
+          <a:xfrm>
+            <a:off x="11265407" y="3419856"/>
+            <a:ext cx="457200" cy="457200"/>
+          </a:xfrm>
+          <a:prstGeom prst="roundRect">
+            <a:avLst>
+              <a:gd name="adj" fmla="val 25000"/>
+            </a:avLst>
+          </a:prstGeom>
+          <a:solidFill>
+            <a:srgbClr val="1D63ED"/>
+          </a:solidFill>
+          <a:ln>
+            <a:noFill/>
+          </a:ln>
+          <a:effectLst/>
+        </p:spPr>
+        <p:style>
+          <a:lnRef idx="1">
+            <a:schemeClr val="accent1"/>
+          </a:lnRef>
+          <a:fillRef idx="3">
+            <a:schemeClr val="accent1"/>
+          </a:fillRef>
+          <a:effectRef idx="2">
+            <a:schemeClr val="accent1"/>
+          </a:effectRef>
+          <a:fontRef idx="minor">
+            <a:schemeClr val="lt1"/>
+          </a:fontRef>
+        </p:style>
+        <p:txBody>
+          <a:bodyPr rtlCol="0" anchor="ctr"/>
+          <a:lstStyle/>
+          <a:p>
+            <a:pPr algn="ctr"/>
+          </a:p>
+        </p:txBody>
+      </p:sp>
+      <p:pic>
+        <p:nvPicPr>
+          <p:cNvPr id="242" name="Picture 241" descr="image.png"/>
           <p:cNvPicPr>
             <a:picLocks noChangeAspect="1"/>
           </p:cNvPicPr>
@@ -16480,8 +20636,8 @@
         </p:blipFill>
         <p:spPr>
           <a:xfrm>
-            <a:off x="8531352" y="960120"/>
-            <a:ext cx="237744" cy="237744"/>
+            <a:off x="11356847" y="3511296"/>
+            <a:ext cx="274320" cy="274320"/>
           </a:xfrm>
           <a:prstGeom prst="rect">
             <a:avLst/>
@@ -16490,53 +20646,14 @@
       </p:pic>
       <p:sp>
         <p:nvSpPr>
-          <p:cNvPr id="128" name="TextBox 127"/>
+          <p:cNvPr id="243" name="TextBox 242"/>
           <p:cNvSpPr txBox="1"/>
           <p:nvPr/>
         </p:nvSpPr>
         <p:spPr>
           <a:xfrm>
-            <a:off x="8805672" y="914400"/>
-            <a:ext cx="3063239" cy="329184"/>
-          </a:xfrm>
-          <a:prstGeom prst="rect">
-            <a:avLst/>
-          </a:prstGeom>
-          <a:noFill/>
-        </p:spPr>
-        <p:txBody>
-          <a:bodyPr wrap="square" anchor="ctr" lIns="36576" rIns="36576" tIns="18288" bIns="18288">
-            <a:spAutoFit/>
-          </a:bodyPr>
-          <a:lstStyle/>
-          <a:p>
-            <a:pPr algn="l">
-              <a:spcAft>
-                <a:spcPts val="300"/>
-              </a:spcAft>
-            </a:pPr>
-            <a:r>
-              <a:rPr sz="1200" b="1" i="0">
-                <a:solidFill>
-                  <a:srgbClr val="FFFFFF"/>
-                </a:solidFill>
-                <a:latin typeface="Montserrat"/>
-              </a:rPr>
-              <a:t>Technologies used</a:t>
-            </a:r>
-          </a:p>
-        </p:txBody>
-      </p:sp>
-      <p:sp>
-        <p:nvSpPr>
-          <p:cNvPr id="129" name="TextBox 128"/>
-          <p:cNvSpPr txBox="1"/>
-          <p:nvPr/>
-        </p:nvSpPr>
-        <p:spPr>
-          <a:xfrm>
-            <a:off x="8567928" y="1325880"/>
-            <a:ext cx="3291840" cy="3749039"/>
+            <a:off x="11064239" y="3877056"/>
+            <a:ext cx="868680" cy="219456"/>
           </a:xfrm>
           <a:prstGeom prst="rect">
             <a:avLst/>
@@ -16549,303 +20666,33 @@
           </a:bodyPr>
           <a:lstStyle/>
           <a:p>
-            <a:pPr algn="l">
-              <a:spcAft>
-                <a:spcPts val="600"/>
-              </a:spcAft>
-            </a:pPr>
-            <a:r>
-              <a:rPr sz="980" b="1" i="0">
-                <a:solidFill>
-                  <a:srgbClr val="F27A2E"/>
-                </a:solidFill>
-                <a:latin typeface="Calibri"/>
-              </a:rPr>
-              <a:t>• </a:t>
-            </a:r>
-            <a:r>
-              <a:rPr sz="980" b="1" i="0">
+            <a:pPr algn="ctr">
+              <a:spcAft>
+                <a:spcPts val="300"/>
+              </a:spcAft>
+            </a:pPr>
+            <a:r>
+              <a:rPr sz="780" b="1" i="0">
                 <a:solidFill>
                   <a:srgbClr val="172131"/>
                 </a:solidFill>
                 <a:latin typeface="Calibri"/>
               </a:rPr>
-              <a:t>Front end</a:t>
-            </a:r>
-            <a:r>
-              <a:rPr sz="980" b="0" i="0">
-                <a:solidFill>
-                  <a:srgbClr val="172131"/>
-                </a:solidFill>
-                <a:latin typeface="Calibri"/>
-              </a:rPr>
-              <a:t> React 18, Vite, Tailwind CSS, Reveal.js, PWA (manifest + service worker)</a:t>
-            </a:r>
-          </a:p>
-          <a:p>
-            <a:pPr algn="l">
-              <a:spcAft>
-                <a:spcPts val="600"/>
-              </a:spcAft>
-            </a:pPr>
-            <a:r>
-              <a:rPr sz="980" b="1" i="0">
-                <a:solidFill>
-                  <a:srgbClr val="F27A2E"/>
-                </a:solidFill>
-                <a:latin typeface="Calibri"/>
-              </a:rPr>
-              <a:t>• </a:t>
-            </a:r>
-            <a:r>
-              <a:rPr sz="980" b="1" i="0">
-                <a:solidFill>
-                  <a:srgbClr val="172131"/>
-                </a:solidFill>
-                <a:latin typeface="Calibri"/>
-              </a:rPr>
-              <a:t>Back end</a:t>
-            </a:r>
-            <a:r>
-              <a:rPr sz="980" b="0" i="0">
-                <a:solidFill>
-                  <a:srgbClr val="172131"/>
-                </a:solidFill>
-                <a:latin typeface="Calibri"/>
-              </a:rPr>
-              <a:t> Python 3.12, FastAPI, Pydantic, background job queue, SQLite</a:t>
-            </a:r>
-          </a:p>
-          <a:p>
-            <a:pPr algn="l">
-              <a:spcAft>
-                <a:spcPts val="600"/>
-              </a:spcAft>
-            </a:pPr>
-            <a:r>
-              <a:rPr sz="980" b="1" i="0">
-                <a:solidFill>
-                  <a:srgbClr val="F27A2E"/>
-                </a:solidFill>
-                <a:latin typeface="Calibri"/>
-              </a:rPr>
-              <a:t>• </a:t>
-            </a:r>
-            <a:r>
-              <a:rPr sz="980" b="1" i="0">
-                <a:solidFill>
-                  <a:srgbClr val="172131"/>
-                </a:solidFill>
-                <a:latin typeface="Calibri"/>
-              </a:rPr>
-              <a:t>Documents</a:t>
-            </a:r>
-            <a:r>
-              <a:rPr sz="980" b="0" i="0">
-                <a:solidFill>
-                  <a:srgbClr val="172131"/>
-                </a:solidFill>
-                <a:latin typeface="Calibri"/>
-              </a:rPr>
-              <a:t> python-pptx, PyMuPDF, LibreOffice (headless PPTX→PDF), python-docx, Tesseract OCR</a:t>
-            </a:r>
-          </a:p>
-          <a:p>
-            <a:pPr algn="l">
-              <a:spcAft>
-                <a:spcPts val="600"/>
-              </a:spcAft>
-            </a:pPr>
-            <a:r>
-              <a:rPr sz="980" b="1" i="0">
-                <a:solidFill>
-                  <a:srgbClr val="F27A2E"/>
-                </a:solidFill>
-                <a:latin typeface="Calibri"/>
-              </a:rPr>
-              <a:t>• </a:t>
-            </a:r>
-            <a:r>
-              <a:rPr sz="980" b="1" i="0">
-                <a:solidFill>
-                  <a:srgbClr val="172131"/>
-                </a:solidFill>
-                <a:latin typeface="Calibri"/>
-              </a:rPr>
-              <a:t>AI / NLP</a:t>
-            </a:r>
-            <a:r>
-              <a:rPr sz="980" b="0" i="0">
-                <a:solidFill>
-                  <a:srgbClr val="172131"/>
-                </a:solidFill>
-                <a:latin typeface="Calibri"/>
-              </a:rPr>
-              <a:t> Google Gemini (5-key pool, per-key pacing), Groq, NVIDIA NIM via failover router</a:t>
-            </a:r>
-          </a:p>
-          <a:p>
-            <a:pPr algn="l">
-              <a:spcAft>
-                <a:spcPts val="600"/>
-              </a:spcAft>
-            </a:pPr>
-            <a:r>
-              <a:rPr sz="980" b="1" i="0">
-                <a:solidFill>
-                  <a:srgbClr val="F27A2E"/>
-                </a:solidFill>
-                <a:latin typeface="Calibri"/>
-              </a:rPr>
-              <a:t>• </a:t>
-            </a:r>
-            <a:r>
-              <a:rPr sz="980" b="1" i="0">
-                <a:solidFill>
-                  <a:srgbClr val="172131"/>
-                </a:solidFill>
-                <a:latin typeface="Calibri"/>
-              </a:rPr>
-              <a:t>Maths &amp; labs</a:t>
-            </a:r>
-            <a:r>
-              <a:rPr sz="980" b="0" i="0">
-                <a:solidFill>
-                  <a:srgbClr val="172131"/>
-                </a:solidFill>
-                <a:latin typeface="Calibri"/>
-              </a:rPr>
-              <a:t> SymPy exact solvers; JavaScript lab engine; SVG + MuPDF rasterising</a:t>
-            </a:r>
-          </a:p>
-          <a:p>
-            <a:pPr algn="l">
-              <a:spcAft>
-                <a:spcPts val="600"/>
-              </a:spcAft>
-            </a:pPr>
-            <a:r>
-              <a:rPr sz="980" b="1" i="0">
-                <a:solidFill>
-                  <a:srgbClr val="F27A2E"/>
-                </a:solidFill>
-                <a:latin typeface="Calibri"/>
-              </a:rPr>
-              <a:t>• </a:t>
-            </a:r>
-            <a:r>
-              <a:rPr sz="980" b="1" i="0">
-                <a:solidFill>
-                  <a:srgbClr val="172131"/>
-                </a:solidFill>
-                <a:latin typeface="Calibri"/>
-              </a:rPr>
-              <a:t>Quality</a:t>
-            </a:r>
-            <a:r>
-              <a:rPr sz="980" b="0" i="0">
-                <a:solidFill>
-                  <a:srgbClr val="172131"/>
-                </a:solidFill>
-                <a:latin typeface="Calibri"/>
-              </a:rPr>
-              <a:t> pytest — 755 tests; layout audit; gold-set evaluation; e2e API check</a:t>
-            </a:r>
-          </a:p>
-          <a:p>
-            <a:pPr algn="l">
-              <a:spcAft>
-                <a:spcPts val="600"/>
-              </a:spcAft>
-            </a:pPr>
-            <a:r>
-              <a:rPr sz="980" b="1" i="0">
-                <a:solidFill>
-                  <a:srgbClr val="F27A2E"/>
-                </a:solidFill>
-                <a:latin typeface="Calibri"/>
-              </a:rPr>
-              <a:t>• </a:t>
-            </a:r>
-            <a:r>
-              <a:rPr sz="980" b="1" i="0">
-                <a:solidFill>
-                  <a:srgbClr val="172131"/>
-                </a:solidFill>
-                <a:latin typeface="Calibri"/>
-              </a:rPr>
-              <a:t>DevOps</a:t>
-            </a:r>
-            <a:r>
-              <a:rPr sz="980" b="0" i="0">
-                <a:solidFill>
-                  <a:srgbClr val="172131"/>
-                </a:solidFill>
-                <a:latin typeface="Calibri"/>
-              </a:rPr>
-              <a:t> GitHub (SDP42/LearnovaV2), launch configs, deploy: static front end + Docker back end</a:t>
-            </a:r>
-          </a:p>
-        </p:txBody>
-      </p:sp>
-      <p:sp>
-        <p:nvSpPr>
-          <p:cNvPr id="130" name="Rounded Rectangle 129"/>
-          <p:cNvSpPr/>
-          <p:nvPr/>
-        </p:nvSpPr>
-        <p:spPr>
-          <a:xfrm>
-            <a:off x="8567928" y="5120640"/>
-            <a:ext cx="3255264" cy="1261872"/>
-          </a:xfrm>
-          <a:prstGeom prst="roundRect">
-            <a:avLst>
-              <a:gd name="adj" fmla="val 8000"/>
-            </a:avLst>
-          </a:prstGeom>
-          <a:solidFill>
-            <a:srgbClr val="FFFFFF"/>
-          </a:solidFill>
-          <a:ln w="12700">
-            <a:solidFill>
-              <a:srgbClr val="1F5FBF"/>
-            </a:solidFill>
-          </a:ln>
-          <a:effectLst/>
-        </p:spPr>
-        <p:style>
-          <a:lnRef idx="1">
-            <a:schemeClr val="accent1"/>
-          </a:lnRef>
-          <a:fillRef idx="3">
-            <a:schemeClr val="accent1"/>
-          </a:fillRef>
-          <a:effectRef idx="2">
-            <a:schemeClr val="accent1"/>
-          </a:effectRef>
-          <a:fontRef idx="minor">
-            <a:schemeClr val="lt1"/>
-          </a:fontRef>
-        </p:style>
-        <p:txBody>
-          <a:bodyPr rtlCol="0" anchor="ctr"/>
-          <a:lstStyle/>
-          <a:p>
-            <a:pPr algn="ctr"/>
-          </a:p>
-        </p:txBody>
-      </p:sp>
-      <p:sp>
-        <p:nvSpPr>
-          <p:cNvPr id="131" name="TextBox 130"/>
+              <a:t>Docker</a:t>
+            </a:r>
+          </a:p>
+        </p:txBody>
+      </p:sp>
+      <p:sp>
+        <p:nvSpPr>
+          <p:cNvPr id="244" name="TextBox 243"/>
           <p:cNvSpPr txBox="1"/>
           <p:nvPr/>
         </p:nvSpPr>
         <p:spPr>
           <a:xfrm>
-            <a:off x="8641080" y="5148072"/>
-            <a:ext cx="3127248" cy="1216152"/>
+            <a:off x="8613648" y="4160520"/>
+            <a:ext cx="3337560" cy="2377440"/>
           </a:xfrm>
           <a:prstGeom prst="rect">
             <a:avLst/>
@@ -16860,33 +20707,205 @@
           <a:p>
             <a:pPr algn="l">
               <a:spcAft>
-                <a:spcPts val="100"/>
-              </a:spcAft>
-            </a:pPr>
-            <a:r>
-              <a:rPr sz="1050" b="1" i="0">
-                <a:solidFill>
-                  <a:srgbClr val="1F5FBF"/>
-                </a:solidFill>
-                <a:latin typeface="Calibri"/>
-              </a:rPr>
-              <a:t>Data flow</a:t>
+                <a:spcPts val="300"/>
+              </a:spcAft>
+            </a:pPr>
+            <a:r>
+              <a:rPr sz="890" b="1" i="0">
+                <a:solidFill>
+                  <a:srgbClr val="F27A2E"/>
+                </a:solidFill>
+                <a:latin typeface="Calibri"/>
+              </a:rPr>
+              <a:t>• </a:t>
+            </a:r>
+            <a:r>
+              <a:rPr sz="890" b="1" i="0">
+                <a:solidFill>
+                  <a:srgbClr val="172131"/>
+                </a:solidFill>
+                <a:latin typeface="Calibri"/>
+              </a:rPr>
+              <a:t>Frontend:</a:t>
+            </a:r>
+            <a:r>
+              <a:rPr sz="890" b="0" i="0">
+                <a:solidFill>
+                  <a:srgbClr val="172131"/>
+                </a:solidFill>
+                <a:latin typeface="Calibri"/>
+              </a:rPr>
+              <a:t> React 18 · Vite · Tailwind CSS · Reveal.js web deck · PWA (manifest + service worker)</a:t>
             </a:r>
           </a:p>
           <a:p>
             <a:pPr algn="l">
               <a:spcAft>
-                <a:spcPts val="100"/>
-              </a:spcAft>
-            </a:pPr>
-            <a:r>
-              <a:rPr sz="930" b="0" i="0">
+                <a:spcPts val="300"/>
+              </a:spcAft>
+            </a:pPr>
+            <a:r>
+              <a:rPr sz="890" b="1" i="0">
+                <a:solidFill>
+                  <a:srgbClr val="F27A2E"/>
+                </a:solidFill>
+                <a:latin typeface="Calibri"/>
+              </a:rPr>
+              <a:t>• </a:t>
+            </a:r>
+            <a:r>
+              <a:rPr sz="890" b="1" i="0">
                 <a:solidFill>
                   <a:srgbClr val="172131"/>
                 </a:solidFill>
                 <a:latin typeface="Calibri"/>
               </a:rPr>
-              <a:t>Input (deck / notes / topic) → Processing (read → plan → decide → illustrate → build → audit) → Output (PPTX, web deck, study pack, share link). Jobs run in the background with live stage progress; results are cached by content hash.</a:t>
+              <a:t>Backend:</a:t>
+            </a:r>
+            <a:r>
+              <a:rPr sz="890" b="0" i="0">
+                <a:solidFill>
+                  <a:srgbClr val="172131"/>
+                </a:solidFill>
+                <a:latin typeface="Calibri"/>
+              </a:rPr>
+              <a:t> Python 3.12 · FastAPI · Pydantic · background job queue · SQLite · OTP auth</a:t>
+            </a:r>
+          </a:p>
+          <a:p>
+            <a:pPr algn="l">
+              <a:spcAft>
+                <a:spcPts val="300"/>
+              </a:spcAft>
+            </a:pPr>
+            <a:r>
+              <a:rPr sz="890" b="1" i="0">
+                <a:solidFill>
+                  <a:srgbClr val="F27A2E"/>
+                </a:solidFill>
+                <a:latin typeface="Calibri"/>
+              </a:rPr>
+              <a:t>• </a:t>
+            </a:r>
+            <a:r>
+              <a:rPr sz="890" b="1" i="0">
+                <a:solidFill>
+                  <a:srgbClr val="172131"/>
+                </a:solidFill>
+                <a:latin typeface="Calibri"/>
+              </a:rPr>
+              <a:t>Documents:</a:t>
+            </a:r>
+            <a:r>
+              <a:rPr sz="890" b="0" i="0">
+                <a:solidFill>
+                  <a:srgbClr val="172131"/>
+                </a:solidFill>
+                <a:latin typeface="Calibri"/>
+              </a:rPr>
+              <a:t> python-pptx · PyMuPDF · LibreOffice headless · python-docx · Tesseract OCR</a:t>
+            </a:r>
+          </a:p>
+          <a:p>
+            <a:pPr algn="l">
+              <a:spcAft>
+                <a:spcPts val="300"/>
+              </a:spcAft>
+            </a:pPr>
+            <a:r>
+              <a:rPr sz="890" b="1" i="0">
+                <a:solidFill>
+                  <a:srgbClr val="F27A2E"/>
+                </a:solidFill>
+                <a:latin typeface="Calibri"/>
+              </a:rPr>
+              <a:t>• </a:t>
+            </a:r>
+            <a:r>
+              <a:rPr sz="890" b="1" i="0">
+                <a:solidFill>
+                  <a:srgbClr val="172131"/>
+                </a:solidFill>
+                <a:latin typeface="Calibri"/>
+              </a:rPr>
+              <a:t>AI / NLP:</a:t>
+            </a:r>
+            <a:r>
+              <a:rPr sz="890" b="0" i="0">
+                <a:solidFill>
+                  <a:srgbClr val="172131"/>
+                </a:solidFill>
+                <a:latin typeface="Calibri"/>
+              </a:rPr>
+              <a:t> Gemini (pool of 5 keys, per-key pacing) · Groq · NVIDIA NIM · failover router</a:t>
+            </a:r>
+          </a:p>
+          <a:p>
+            <a:pPr algn="l">
+              <a:spcAft>
+                <a:spcPts val="300"/>
+              </a:spcAft>
+            </a:pPr>
+            <a:r>
+              <a:rPr sz="890" b="1" i="0">
+                <a:solidFill>
+                  <a:srgbClr val="F27A2E"/>
+                </a:solidFill>
+                <a:latin typeface="Calibri"/>
+              </a:rPr>
+              <a:t>• </a:t>
+            </a:r>
+            <a:r>
+              <a:rPr sz="890" b="1" i="0">
+                <a:solidFill>
+                  <a:srgbClr val="172131"/>
+                </a:solidFill>
+                <a:latin typeface="Calibri"/>
+              </a:rPr>
+              <a:t>Maths &amp; labs:</a:t>
+            </a:r>
+            <a:r>
+              <a:rPr sz="890" b="0" i="0">
+                <a:solidFill>
+                  <a:srgbClr val="172131"/>
+                </a:solidFill>
+                <a:latin typeface="Calibri"/>
+              </a:rPr>
+              <a:t> SymPy exact solvers · JavaScript lab engine · SVG via MuPDF</a:t>
+            </a:r>
+          </a:p>
+          <a:p>
+            <a:pPr algn="l">
+              <a:spcAft>
+                <a:spcPts val="300"/>
+              </a:spcAft>
+            </a:pPr>
+            <a:r>
+              <a:rPr sz="890" b="1" i="0">
+                <a:solidFill>
+                  <a:srgbClr val="F27A2E"/>
+                </a:solidFill>
+                <a:latin typeface="Calibri"/>
+              </a:rPr>
+              <a:t>• </a:t>
+            </a:r>
+            <a:r>
+              <a:rPr sz="890" b="1" i="0">
+                <a:solidFill>
+                  <a:srgbClr val="172131"/>
+                </a:solidFill>
+                <a:latin typeface="Calibri"/>
+              </a:rPr>
+              <a:t>Quality &amp; DevOps:</a:t>
+            </a:r>
+            <a:r>
+              <a:rPr sz="890" b="0" i="0">
+                <a:solidFill>
+                  <a:srgbClr val="172131"/>
+                </a:solidFill>
+                <a:latin typeface="Calibri"/>
+              </a:rPr>
+              <a:t> pytest (755) · layout audit · gold sets · GitHub · Docker</a:t>
             </a:r>
           </a:p>
         </p:txBody>
@@ -23266,8 +27285,8 @@
         </p:nvSpPr>
         <p:spPr>
           <a:xfrm>
-            <a:off x="347472" y="4114800"/>
-            <a:ext cx="2697480" cy="1554480"/>
+            <a:off x="347472" y="4087368"/>
+            <a:ext cx="2697480" cy="1600200"/>
           </a:xfrm>
           <a:prstGeom prst="rect">
             <a:avLst/>
@@ -23282,11 +27301,11 @@
           <a:p>
             <a:pPr algn="l">
               <a:spcAft>
-                <a:spcPts val="300"/>
-              </a:spcAft>
-            </a:pPr>
-            <a:r>
-              <a:rPr sz="980" b="1" i="0">
+                <a:spcPts val="400"/>
+              </a:spcAft>
+            </a:pPr>
+            <a:r>
+              <a:rPr sz="1040" b="1" i="0">
                 <a:solidFill>
                   <a:srgbClr val="F27A2E"/>
                 </a:solidFill>
@@ -23295,7 +27314,7 @@
               <a:t>✔ </a:t>
             </a:r>
             <a:r>
-              <a:rPr sz="980" b="0" i="0">
+              <a:rPr sz="1040" b="0" i="0">
                 <a:solidFill>
                   <a:srgbClr val="172131"/>
                 </a:solidFill>
@@ -23307,11 +27326,11 @@
           <a:p>
             <a:pPr algn="l">
               <a:spcAft>
-                <a:spcPts val="300"/>
-              </a:spcAft>
-            </a:pPr>
-            <a:r>
-              <a:rPr sz="980" b="1" i="0">
+                <a:spcPts val="400"/>
+              </a:spcAft>
+            </a:pPr>
+            <a:r>
+              <a:rPr sz="1040" b="1" i="0">
                 <a:solidFill>
                   <a:srgbClr val="F27A2E"/>
                 </a:solidFill>
@@ -23320,7 +27339,7 @@
               <a:t>✔ </a:t>
             </a:r>
             <a:r>
-              <a:rPr sz="980" b="0" i="0">
+              <a:rPr sz="1040" b="0" i="0">
                 <a:solidFill>
                   <a:srgbClr val="172131"/>
                 </a:solidFill>
@@ -23332,11 +27351,11 @@
           <a:p>
             <a:pPr algn="l">
               <a:spcAft>
-                <a:spcPts val="300"/>
-              </a:spcAft>
-            </a:pPr>
-            <a:r>
-              <a:rPr sz="980" b="1" i="0">
+                <a:spcPts val="400"/>
+              </a:spcAft>
+            </a:pPr>
+            <a:r>
+              <a:rPr sz="1040" b="1" i="0">
                 <a:solidFill>
                   <a:srgbClr val="F27A2E"/>
                 </a:solidFill>
@@ -23345,7 +27364,7 @@
               <a:t>✔ </a:t>
             </a:r>
             <a:r>
-              <a:rPr sz="980" b="0" i="0">
+              <a:rPr sz="1040" b="0" i="0">
                 <a:solidFill>
                   <a:srgbClr val="172131"/>
                 </a:solidFill>
@@ -23357,11 +27376,11 @@
           <a:p>
             <a:pPr algn="l">
               <a:spcAft>
-                <a:spcPts val="300"/>
-              </a:spcAft>
-            </a:pPr>
-            <a:r>
-              <a:rPr sz="980" b="1" i="0">
+                <a:spcPts val="400"/>
+              </a:spcAft>
+            </a:pPr>
+            <a:r>
+              <a:rPr sz="1040" b="1" i="0">
                 <a:solidFill>
                   <a:srgbClr val="F27A2E"/>
                 </a:solidFill>
@@ -23370,7 +27389,7 @@
               <a:t>✔ </a:t>
             </a:r>
             <a:r>
-              <a:rPr sz="980" b="0" i="0">
+              <a:rPr sz="1040" b="0" i="0">
                 <a:solidFill>
                   <a:srgbClr val="172131"/>
                 </a:solidFill>
@@ -23590,8 +27609,8 @@
         </p:nvSpPr>
         <p:spPr>
           <a:xfrm>
-            <a:off x="3273552" y="4114800"/>
-            <a:ext cx="2697480" cy="1554480"/>
+            <a:off x="3273552" y="4087368"/>
+            <a:ext cx="2697480" cy="1600200"/>
           </a:xfrm>
           <a:prstGeom prst="rect">
             <a:avLst/>
@@ -23606,11 +27625,11 @@
           <a:p>
             <a:pPr algn="l">
               <a:spcAft>
-                <a:spcPts val="300"/>
-              </a:spcAft>
-            </a:pPr>
-            <a:r>
-              <a:rPr sz="980" b="1" i="0">
+                <a:spcPts val="400"/>
+              </a:spcAft>
+            </a:pPr>
+            <a:r>
+              <a:rPr sz="1040" b="1" i="0">
                 <a:solidFill>
                   <a:srgbClr val="F27A2E"/>
                 </a:solidFill>
@@ -23619,7 +27638,7 @@
               <a:t>✔ </a:t>
             </a:r>
             <a:r>
-              <a:rPr sz="980" b="0" i="0">
+              <a:rPr sz="1040" b="0" i="0">
                 <a:solidFill>
                   <a:srgbClr val="172131"/>
                 </a:solidFill>
@@ -23631,11 +27650,11 @@
           <a:p>
             <a:pPr algn="l">
               <a:spcAft>
-                <a:spcPts val="300"/>
-              </a:spcAft>
-            </a:pPr>
-            <a:r>
-              <a:rPr sz="980" b="1" i="0">
+                <a:spcPts val="400"/>
+              </a:spcAft>
+            </a:pPr>
+            <a:r>
+              <a:rPr sz="1040" b="1" i="0">
                 <a:solidFill>
                   <a:srgbClr val="F27A2E"/>
                 </a:solidFill>
@@ -23644,7 +27663,7 @@
               <a:t>✔ </a:t>
             </a:r>
             <a:r>
-              <a:rPr sz="980" b="0" i="0">
+              <a:rPr sz="1040" b="0" i="0">
                 <a:solidFill>
                   <a:srgbClr val="172131"/>
                 </a:solidFill>
@@ -23656,11 +27675,11 @@
           <a:p>
             <a:pPr algn="l">
               <a:spcAft>
-                <a:spcPts val="300"/>
-              </a:spcAft>
-            </a:pPr>
-            <a:r>
-              <a:rPr sz="980" b="1" i="0">
+                <a:spcPts val="400"/>
+              </a:spcAft>
+            </a:pPr>
+            <a:r>
+              <a:rPr sz="1040" b="1" i="0">
                 <a:solidFill>
                   <a:srgbClr val="F27A2E"/>
                 </a:solidFill>
@@ -23669,7 +27688,7 @@
               <a:t>✔ </a:t>
             </a:r>
             <a:r>
-              <a:rPr sz="980" b="0" i="0">
+              <a:rPr sz="1040" b="0" i="0">
                 <a:solidFill>
                   <a:srgbClr val="172131"/>
                 </a:solidFill>
@@ -23681,11 +27700,11 @@
           <a:p>
             <a:pPr algn="l">
               <a:spcAft>
-                <a:spcPts val="300"/>
-              </a:spcAft>
-            </a:pPr>
-            <a:r>
-              <a:rPr sz="980" b="1" i="0">
+                <a:spcPts val="400"/>
+              </a:spcAft>
+            </a:pPr>
+            <a:r>
+              <a:rPr sz="1040" b="1" i="0">
                 <a:solidFill>
                   <a:srgbClr val="F27A2E"/>
                 </a:solidFill>
@@ -23694,7 +27713,7 @@
               <a:t>✔ </a:t>
             </a:r>
             <a:r>
-              <a:rPr sz="980" b="0" i="0">
+              <a:rPr sz="1040" b="0" i="0">
                 <a:solidFill>
                   <a:srgbClr val="172131"/>
                 </a:solidFill>
@@ -23914,8 +27933,8 @@
         </p:nvSpPr>
         <p:spPr>
           <a:xfrm>
-            <a:off x="6199632" y="4114800"/>
-            <a:ext cx="2697480" cy="1554480"/>
+            <a:off x="6199632" y="4087368"/>
+            <a:ext cx="2697480" cy="1600200"/>
           </a:xfrm>
           <a:prstGeom prst="rect">
             <a:avLst/>
@@ -23930,11 +27949,11 @@
           <a:p>
             <a:pPr algn="l">
               <a:spcAft>
-                <a:spcPts val="300"/>
-              </a:spcAft>
-            </a:pPr>
-            <a:r>
-              <a:rPr sz="980" b="1" i="0">
+                <a:spcPts val="400"/>
+              </a:spcAft>
+            </a:pPr>
+            <a:r>
+              <a:rPr sz="1040" b="1" i="0">
                 <a:solidFill>
                   <a:srgbClr val="F27A2E"/>
                 </a:solidFill>
@@ -23943,7 +27962,7 @@
               <a:t>✔ </a:t>
             </a:r>
             <a:r>
-              <a:rPr sz="980" b="0" i="0">
+              <a:rPr sz="1040" b="0" i="0">
                 <a:solidFill>
                   <a:srgbClr val="172131"/>
                 </a:solidFill>
@@ -23955,11 +27974,11 @@
           <a:p>
             <a:pPr algn="l">
               <a:spcAft>
-                <a:spcPts val="300"/>
-              </a:spcAft>
-            </a:pPr>
-            <a:r>
-              <a:rPr sz="980" b="1" i="0">
+                <a:spcPts val="400"/>
+              </a:spcAft>
+            </a:pPr>
+            <a:r>
+              <a:rPr sz="1040" b="1" i="0">
                 <a:solidFill>
                   <a:srgbClr val="F27A2E"/>
                 </a:solidFill>
@@ -23968,7 +27987,7 @@
               <a:t>✔ </a:t>
             </a:r>
             <a:r>
-              <a:rPr sz="980" b="0" i="0">
+              <a:rPr sz="1040" b="0" i="0">
                 <a:solidFill>
                   <a:srgbClr val="172131"/>
                 </a:solidFill>
@@ -23980,11 +27999,11 @@
           <a:p>
             <a:pPr algn="l">
               <a:spcAft>
-                <a:spcPts val="300"/>
-              </a:spcAft>
-            </a:pPr>
-            <a:r>
-              <a:rPr sz="980" b="1" i="0">
+                <a:spcPts val="400"/>
+              </a:spcAft>
+            </a:pPr>
+            <a:r>
+              <a:rPr sz="1040" b="1" i="0">
                 <a:solidFill>
                   <a:srgbClr val="F27A2E"/>
                 </a:solidFill>
@@ -23993,7 +28012,7 @@
               <a:t>✔ </a:t>
             </a:r>
             <a:r>
-              <a:rPr sz="980" b="0" i="0">
+              <a:rPr sz="1040" b="0" i="0">
                 <a:solidFill>
                   <a:srgbClr val="172131"/>
                 </a:solidFill>
@@ -24005,11 +28024,11 @@
           <a:p>
             <a:pPr algn="l">
               <a:spcAft>
-                <a:spcPts val="300"/>
-              </a:spcAft>
-            </a:pPr>
-            <a:r>
-              <a:rPr sz="980" b="1" i="0">
+                <a:spcPts val="400"/>
+              </a:spcAft>
+            </a:pPr>
+            <a:r>
+              <a:rPr sz="1040" b="1" i="0">
                 <a:solidFill>
                   <a:srgbClr val="F27A2E"/>
                 </a:solidFill>
@@ -24018,7 +28037,7 @@
               <a:t>✔ </a:t>
             </a:r>
             <a:r>
-              <a:rPr sz="980" b="0" i="0">
+              <a:rPr sz="1040" b="0" i="0">
                 <a:solidFill>
                   <a:srgbClr val="172131"/>
                 </a:solidFill>
@@ -24238,8 +28257,8 @@
         </p:nvSpPr>
         <p:spPr>
           <a:xfrm>
-            <a:off x="9125712" y="4114800"/>
-            <a:ext cx="2697480" cy="1554480"/>
+            <a:off x="9125712" y="4087368"/>
+            <a:ext cx="2697480" cy="1600200"/>
           </a:xfrm>
           <a:prstGeom prst="rect">
             <a:avLst/>
@@ -24254,11 +28273,11 @@
           <a:p>
             <a:pPr algn="l">
               <a:spcAft>
-                <a:spcPts val="300"/>
-              </a:spcAft>
-            </a:pPr>
-            <a:r>
-              <a:rPr sz="980" b="1" i="0">
+                <a:spcPts val="400"/>
+              </a:spcAft>
+            </a:pPr>
+            <a:r>
+              <a:rPr sz="1040" b="1" i="0">
                 <a:solidFill>
                   <a:srgbClr val="F27A2E"/>
                 </a:solidFill>
@@ -24267,7 +28286,7 @@
               <a:t>✔ </a:t>
             </a:r>
             <a:r>
-              <a:rPr sz="980" b="0" i="0">
+              <a:rPr sz="1040" b="0" i="0">
                 <a:solidFill>
                   <a:srgbClr val="172131"/>
                 </a:solidFill>
@@ -24279,11 +28298,11 @@
           <a:p>
             <a:pPr algn="l">
               <a:spcAft>
-                <a:spcPts val="300"/>
-              </a:spcAft>
-            </a:pPr>
-            <a:r>
-              <a:rPr sz="980" b="1" i="0">
+                <a:spcPts val="400"/>
+              </a:spcAft>
+            </a:pPr>
+            <a:r>
+              <a:rPr sz="1040" b="1" i="0">
                 <a:solidFill>
                   <a:srgbClr val="F27A2E"/>
                 </a:solidFill>
@@ -24292,7 +28311,7 @@
               <a:t>✔ </a:t>
             </a:r>
             <a:r>
-              <a:rPr sz="980" b="0" i="0">
+              <a:rPr sz="1040" b="0" i="0">
                 <a:solidFill>
                   <a:srgbClr val="172131"/>
                 </a:solidFill>
@@ -24304,11 +28323,11 @@
           <a:p>
             <a:pPr algn="l">
               <a:spcAft>
-                <a:spcPts val="300"/>
-              </a:spcAft>
-            </a:pPr>
-            <a:r>
-              <a:rPr sz="980" b="1" i="0">
+                <a:spcPts val="400"/>
+              </a:spcAft>
+            </a:pPr>
+            <a:r>
+              <a:rPr sz="1040" b="1" i="0">
                 <a:solidFill>
                   <a:srgbClr val="F27A2E"/>
                 </a:solidFill>
@@ -24317,7 +28336,7 @@
               <a:t>✔ </a:t>
             </a:r>
             <a:r>
-              <a:rPr sz="980" b="0" i="0">
+              <a:rPr sz="1040" b="0" i="0">
                 <a:solidFill>
                   <a:srgbClr val="172131"/>
                 </a:solidFill>
@@ -24329,11 +28348,11 @@
           <a:p>
             <a:pPr algn="l">
               <a:spcAft>
-                <a:spcPts val="300"/>
-              </a:spcAft>
-            </a:pPr>
-            <a:r>
-              <a:rPr sz="980" b="1" i="0">
+                <a:spcPts val="400"/>
+              </a:spcAft>
+            </a:pPr>
+            <a:r>
+              <a:rPr sz="1040" b="1" i="0">
                 <a:solidFill>
                   <a:srgbClr val="F27A2E"/>
                 </a:solidFill>
@@ -24342,7 +28361,7 @@
               <a:t>✔ </a:t>
             </a:r>
             <a:r>
-              <a:rPr sz="980" b="0" i="0">
+              <a:rPr sz="1040" b="0" i="0">
                 <a:solidFill>
                   <a:srgbClr val="172131"/>
                 </a:solidFill>
@@ -28246,8 +32265,8 @@
         </p:nvSpPr>
         <p:spPr>
           <a:xfrm>
-            <a:off x="384048" y="1554480"/>
-            <a:ext cx="2633472" cy="1572768"/>
+            <a:off x="384048" y="1517904"/>
+            <a:ext cx="2633472" cy="1609344"/>
           </a:xfrm>
           <a:prstGeom prst="rect">
             <a:avLst/>
@@ -28262,11 +32281,11 @@
           <a:p>
             <a:pPr algn="l">
               <a:spcAft>
-                <a:spcPts val="500"/>
-              </a:spcAft>
-            </a:pPr>
-            <a:r>
-              <a:rPr sz="940" b="1" i="0">
+                <a:spcPts val="700"/>
+              </a:spcAft>
+            </a:pPr>
+            <a:r>
+              <a:rPr sz="1000" b="1" i="0">
                 <a:solidFill>
                   <a:srgbClr val="1F5FBF"/>
                 </a:solidFill>
@@ -28275,7 +32294,7 @@
               <a:t>▸ </a:t>
             </a:r>
             <a:r>
-              <a:rPr sz="940" b="0" i="0">
+              <a:rPr sz="1000" b="0" i="0">
                 <a:solidFill>
                   <a:srgbClr val="172131"/>
                 </a:solidFill>
@@ -28287,11 +32306,11 @@
           <a:p>
             <a:pPr algn="l">
               <a:spcAft>
-                <a:spcPts val="500"/>
-              </a:spcAft>
-            </a:pPr>
-            <a:r>
-              <a:rPr sz="940" b="1" i="0">
+                <a:spcPts val="700"/>
+              </a:spcAft>
+            </a:pPr>
+            <a:r>
+              <a:rPr sz="1000" b="1" i="0">
                 <a:solidFill>
                   <a:srgbClr val="1F5FBF"/>
                 </a:solidFill>
@@ -28300,7 +32319,7 @@
               <a:t>▸ </a:t>
             </a:r>
             <a:r>
-              <a:rPr sz="940" b="0" i="0">
+              <a:rPr sz="1000" b="0" i="0">
                 <a:solidFill>
                   <a:srgbClr val="172131"/>
                 </a:solidFill>
@@ -28312,11 +32331,11 @@
           <a:p>
             <a:pPr algn="l">
               <a:spcAft>
-                <a:spcPts val="500"/>
-              </a:spcAft>
-            </a:pPr>
-            <a:r>
-              <a:rPr sz="940" b="1" i="0">
+                <a:spcPts val="700"/>
+              </a:spcAft>
+            </a:pPr>
+            <a:r>
+              <a:rPr sz="1000" b="1" i="0">
                 <a:solidFill>
                   <a:srgbClr val="1F5FBF"/>
                 </a:solidFill>
@@ -28325,7 +32344,7 @@
               <a:t>▸ </a:t>
             </a:r>
             <a:r>
-              <a:rPr sz="940" b="0" i="0">
+              <a:rPr sz="1000" b="0" i="0">
                 <a:solidFill>
                   <a:srgbClr val="172131"/>
                 </a:solidFill>
@@ -28499,8 +32518,8 @@
         </p:nvSpPr>
         <p:spPr>
           <a:xfrm>
-            <a:off x="3310128" y="1554480"/>
-            <a:ext cx="2633472" cy="1572768"/>
+            <a:off x="3310128" y="1517904"/>
+            <a:ext cx="2633472" cy="1609344"/>
           </a:xfrm>
           <a:prstGeom prst="rect">
             <a:avLst/>
@@ -28515,11 +32534,11 @@
           <a:p>
             <a:pPr algn="l">
               <a:spcAft>
-                <a:spcPts val="500"/>
-              </a:spcAft>
-            </a:pPr>
-            <a:r>
-              <a:rPr sz="940" b="1" i="0">
+                <a:spcPts val="700"/>
+              </a:spcAft>
+            </a:pPr>
+            <a:r>
+              <a:rPr sz="1000" b="1" i="0">
                 <a:solidFill>
                   <a:srgbClr val="C03030"/>
                 </a:solidFill>
@@ -28528,7 +32547,7 @@
               <a:t>▸ </a:t>
             </a:r>
             <a:r>
-              <a:rPr sz="940" b="0" i="0">
+              <a:rPr sz="1000" b="0" i="0">
                 <a:solidFill>
                   <a:srgbClr val="172131"/>
                 </a:solidFill>
@@ -28540,11 +32559,11 @@
           <a:p>
             <a:pPr algn="l">
               <a:spcAft>
-                <a:spcPts val="500"/>
-              </a:spcAft>
-            </a:pPr>
-            <a:r>
-              <a:rPr sz="940" b="1" i="0">
+                <a:spcPts val="700"/>
+              </a:spcAft>
+            </a:pPr>
+            <a:r>
+              <a:rPr sz="1000" b="1" i="0">
                 <a:solidFill>
                   <a:srgbClr val="C03030"/>
                 </a:solidFill>
@@ -28553,7 +32572,7 @@
               <a:t>▸ </a:t>
             </a:r>
             <a:r>
-              <a:rPr sz="940" b="0" i="0">
+              <a:rPr sz="1000" b="0" i="0">
                 <a:solidFill>
                   <a:srgbClr val="172131"/>
                 </a:solidFill>
@@ -28727,8 +32746,8 @@
         </p:nvSpPr>
         <p:spPr>
           <a:xfrm>
-            <a:off x="6236208" y="1554480"/>
-            <a:ext cx="2633472" cy="1572768"/>
+            <a:off x="6236208" y="1517904"/>
+            <a:ext cx="2633472" cy="1609344"/>
           </a:xfrm>
           <a:prstGeom prst="rect">
             <a:avLst/>
@@ -28743,11 +32762,11 @@
           <a:p>
             <a:pPr algn="l">
               <a:spcAft>
-                <a:spcPts val="500"/>
-              </a:spcAft>
-            </a:pPr>
-            <a:r>
-              <a:rPr sz="940" b="1" i="0">
+                <a:spcPts val="700"/>
+              </a:spcAft>
+            </a:pPr>
+            <a:r>
+              <a:rPr sz="1000" b="1" i="0">
                 <a:solidFill>
                   <a:srgbClr val="16845B"/>
                 </a:solidFill>
@@ -28756,7 +32775,7 @@
               <a:t>▸ </a:t>
             </a:r>
             <a:r>
-              <a:rPr sz="940" b="0" i="0">
+              <a:rPr sz="1000" b="0" i="0">
                 <a:solidFill>
                   <a:srgbClr val="172131"/>
                 </a:solidFill>
@@ -28768,11 +32787,11 @@
           <a:p>
             <a:pPr algn="l">
               <a:spcAft>
-                <a:spcPts val="500"/>
-              </a:spcAft>
-            </a:pPr>
-            <a:r>
-              <a:rPr sz="940" b="1" i="0">
+                <a:spcPts val="700"/>
+              </a:spcAft>
+            </a:pPr>
+            <a:r>
+              <a:rPr sz="1000" b="1" i="0">
                 <a:solidFill>
                   <a:srgbClr val="16845B"/>
                 </a:solidFill>
@@ -28781,7 +32800,7 @@
               <a:t>▸ </a:t>
             </a:r>
             <a:r>
-              <a:rPr sz="940" b="0" i="0">
+              <a:rPr sz="1000" b="0" i="0">
                 <a:solidFill>
                   <a:srgbClr val="172131"/>
                 </a:solidFill>
@@ -28793,11 +32812,11 @@
           <a:p>
             <a:pPr algn="l">
               <a:spcAft>
-                <a:spcPts val="500"/>
-              </a:spcAft>
-            </a:pPr>
-            <a:r>
-              <a:rPr sz="940" b="1" i="0">
+                <a:spcPts val="700"/>
+              </a:spcAft>
+            </a:pPr>
+            <a:r>
+              <a:rPr sz="1000" b="1" i="0">
                 <a:solidFill>
                   <a:srgbClr val="16845B"/>
                 </a:solidFill>
@@ -28806,7 +32825,7 @@
               <a:t>▸ </a:t>
             </a:r>
             <a:r>
-              <a:rPr sz="940" b="0" i="0">
+              <a:rPr sz="1000" b="0" i="0">
                 <a:solidFill>
                   <a:srgbClr val="172131"/>
                 </a:solidFill>
@@ -28980,8 +32999,8 @@
         </p:nvSpPr>
         <p:spPr>
           <a:xfrm>
-            <a:off x="9162288" y="1554480"/>
-            <a:ext cx="2633472" cy="1572768"/>
+            <a:off x="9162288" y="1517904"/>
+            <a:ext cx="2633472" cy="1609344"/>
           </a:xfrm>
           <a:prstGeom prst="rect">
             <a:avLst/>
@@ -28996,11 +33015,11 @@
           <a:p>
             <a:pPr algn="l">
               <a:spcAft>
-                <a:spcPts val="500"/>
-              </a:spcAft>
-            </a:pPr>
-            <a:r>
-              <a:rPr sz="940" b="1" i="0">
+                <a:spcPts val="700"/>
+              </a:spcAft>
+            </a:pPr>
+            <a:r>
+              <a:rPr sz="1000" b="1" i="0">
                 <a:solidFill>
                   <a:srgbClr val="F27A2E"/>
                 </a:solidFill>
@@ -29009,7 +33028,7 @@
               <a:t>▸ </a:t>
             </a:r>
             <a:r>
-              <a:rPr sz="940" b="0" i="0">
+              <a:rPr sz="1000" b="0" i="0">
                 <a:solidFill>
                   <a:srgbClr val="172131"/>
                 </a:solidFill>
@@ -29021,11 +33040,11 @@
           <a:p>
             <a:pPr algn="l">
               <a:spcAft>
-                <a:spcPts val="500"/>
-              </a:spcAft>
-            </a:pPr>
-            <a:r>
-              <a:rPr sz="940" b="1" i="0">
+                <a:spcPts val="700"/>
+              </a:spcAft>
+            </a:pPr>
+            <a:r>
+              <a:rPr sz="1000" b="1" i="0">
                 <a:solidFill>
                   <a:srgbClr val="F27A2E"/>
                 </a:solidFill>
@@ -29034,7 +33053,7 @@
               <a:t>▸ </a:t>
             </a:r>
             <a:r>
-              <a:rPr sz="940" b="0" i="0">
+              <a:rPr sz="1000" b="0" i="0">
                 <a:solidFill>
                   <a:srgbClr val="172131"/>
                 </a:solidFill>
@@ -29046,11 +33065,11 @@
           <a:p>
             <a:pPr algn="l">
               <a:spcAft>
-                <a:spcPts val="500"/>
-              </a:spcAft>
-            </a:pPr>
-            <a:r>
-              <a:rPr sz="940" b="1" i="0">
+                <a:spcPts val="700"/>
+              </a:spcAft>
+            </a:pPr>
+            <a:r>
+              <a:rPr sz="1000" b="1" i="0">
                 <a:solidFill>
                   <a:srgbClr val="F27A2E"/>
                 </a:solidFill>
@@ -29059,7 +33078,7 @@
               <a:t>▸ </a:t>
             </a:r>
             <a:r>
-              <a:rPr sz="940" b="0" i="0">
+              <a:rPr sz="1000" b="0" i="0">
                 <a:solidFill>
                   <a:srgbClr val="172131"/>
                 </a:solidFill>
@@ -29233,8 +33252,8 @@
         </p:nvSpPr>
         <p:spPr>
           <a:xfrm>
-            <a:off x="384048" y="3886200"/>
-            <a:ext cx="2633472" cy="1572768"/>
+            <a:off x="384048" y="3849624"/>
+            <a:ext cx="2633472" cy="1609344"/>
           </a:xfrm>
           <a:prstGeom prst="rect">
             <a:avLst/>
@@ -29249,11 +33268,11 @@
           <a:p>
             <a:pPr algn="l">
               <a:spcAft>
-                <a:spcPts val="500"/>
-              </a:spcAft>
-            </a:pPr>
-            <a:r>
-              <a:rPr sz="940" b="1" i="0">
+                <a:spcPts val="700"/>
+              </a:spcAft>
+            </a:pPr>
+            <a:r>
+              <a:rPr sz="1000" b="1" i="0">
                 <a:solidFill>
                   <a:srgbClr val="6B3FA0"/>
                 </a:solidFill>
@@ -29262,7 +33281,7 @@
               <a:t>▸ </a:t>
             </a:r>
             <a:r>
-              <a:rPr sz="940" b="0" i="0">
+              <a:rPr sz="1000" b="0" i="0">
                 <a:solidFill>
                   <a:srgbClr val="172131"/>
                 </a:solidFill>
@@ -29274,11 +33293,11 @@
           <a:p>
             <a:pPr algn="l">
               <a:spcAft>
-                <a:spcPts val="500"/>
-              </a:spcAft>
-            </a:pPr>
-            <a:r>
-              <a:rPr sz="940" b="1" i="0">
+                <a:spcPts val="700"/>
+              </a:spcAft>
+            </a:pPr>
+            <a:r>
+              <a:rPr sz="1000" b="1" i="0">
                 <a:solidFill>
                   <a:srgbClr val="6B3FA0"/>
                 </a:solidFill>
@@ -29287,7 +33306,7 @@
               <a:t>▸ </a:t>
             </a:r>
             <a:r>
-              <a:rPr sz="940" b="0" i="0">
+              <a:rPr sz="1000" b="0" i="0">
                 <a:solidFill>
                   <a:srgbClr val="172131"/>
                 </a:solidFill>
@@ -29299,11 +33318,11 @@
           <a:p>
             <a:pPr algn="l">
               <a:spcAft>
-                <a:spcPts val="500"/>
-              </a:spcAft>
-            </a:pPr>
-            <a:r>
-              <a:rPr sz="940" b="1" i="0">
+                <a:spcPts val="700"/>
+              </a:spcAft>
+            </a:pPr>
+            <a:r>
+              <a:rPr sz="1000" b="1" i="0">
                 <a:solidFill>
                   <a:srgbClr val="6B3FA0"/>
                 </a:solidFill>
@@ -29312,7 +33331,7 @@
               <a:t>▸ </a:t>
             </a:r>
             <a:r>
-              <a:rPr sz="940" b="0" i="0">
+              <a:rPr sz="1000" b="0" i="0">
                 <a:solidFill>
                   <a:srgbClr val="172131"/>
                 </a:solidFill>
@@ -29486,8 +33505,8 @@
         </p:nvSpPr>
         <p:spPr>
           <a:xfrm>
-            <a:off x="3310128" y="3886200"/>
-            <a:ext cx="2633472" cy="1572768"/>
+            <a:off x="3310128" y="3849624"/>
+            <a:ext cx="2633472" cy="1609344"/>
           </a:xfrm>
           <a:prstGeom prst="rect">
             <a:avLst/>
@@ -29502,11 +33521,11 @@
           <a:p>
             <a:pPr algn="l">
               <a:spcAft>
-                <a:spcPts val="500"/>
-              </a:spcAft>
-            </a:pPr>
-            <a:r>
-              <a:rPr sz="940" b="1" i="0">
+                <a:spcPts val="700"/>
+              </a:spcAft>
+            </a:pPr>
+            <a:r>
+              <a:rPr sz="1000" b="1" i="0">
                 <a:solidFill>
                   <a:srgbClr val="0E7C86"/>
                 </a:solidFill>
@@ -29515,7 +33534,7 @@
               <a:t>▸ </a:t>
             </a:r>
             <a:r>
-              <a:rPr sz="940" b="0" i="0">
+              <a:rPr sz="1000" b="0" i="0">
                 <a:solidFill>
                   <a:srgbClr val="172131"/>
                 </a:solidFill>
@@ -29527,11 +33546,11 @@
           <a:p>
             <a:pPr algn="l">
               <a:spcAft>
-                <a:spcPts val="500"/>
-              </a:spcAft>
-            </a:pPr>
-            <a:r>
-              <a:rPr sz="940" b="1" i="0">
+                <a:spcPts val="700"/>
+              </a:spcAft>
+            </a:pPr>
+            <a:r>
+              <a:rPr sz="1000" b="1" i="0">
                 <a:solidFill>
                   <a:srgbClr val="0E7C86"/>
                 </a:solidFill>
@@ -29540,7 +33559,7 @@
               <a:t>▸ </a:t>
             </a:r>
             <a:r>
-              <a:rPr sz="940" b="0" i="0">
+              <a:rPr sz="1000" b="0" i="0">
                 <a:solidFill>
                   <a:srgbClr val="172131"/>
                 </a:solidFill>
@@ -29552,11 +33571,11 @@
           <a:p>
             <a:pPr algn="l">
               <a:spcAft>
-                <a:spcPts val="500"/>
-              </a:spcAft>
-            </a:pPr>
-            <a:r>
-              <a:rPr sz="940" b="1" i="0">
+                <a:spcPts val="700"/>
+              </a:spcAft>
+            </a:pPr>
+            <a:r>
+              <a:rPr sz="1000" b="1" i="0">
                 <a:solidFill>
                   <a:srgbClr val="0E7C86"/>
                 </a:solidFill>
@@ -29565,7 +33584,7 @@
               <a:t>▸ </a:t>
             </a:r>
             <a:r>
-              <a:rPr sz="940" b="0" i="0">
+              <a:rPr sz="1000" b="0" i="0">
                 <a:solidFill>
                   <a:srgbClr val="172131"/>
                 </a:solidFill>
@@ -29739,8 +33758,8 @@
         </p:nvSpPr>
         <p:spPr>
           <a:xfrm>
-            <a:off x="6236208" y="3886200"/>
-            <a:ext cx="2633472" cy="1572768"/>
+            <a:off x="6236208" y="3849624"/>
+            <a:ext cx="2633472" cy="1609344"/>
           </a:xfrm>
           <a:prstGeom prst="rect">
             <a:avLst/>
@@ -29755,11 +33774,11 @@
           <a:p>
             <a:pPr algn="l">
               <a:spcAft>
-                <a:spcPts val="500"/>
-              </a:spcAft>
-            </a:pPr>
-            <a:r>
-              <a:rPr sz="940" b="1" i="0">
+                <a:spcPts val="700"/>
+              </a:spcAft>
+            </a:pPr>
+            <a:r>
+              <a:rPr sz="1000" b="1" i="0">
                 <a:solidFill>
                   <a:srgbClr val="1F5FBF"/>
                 </a:solidFill>
@@ -29768,7 +33787,7 @@
               <a:t>▸ </a:t>
             </a:r>
             <a:r>
-              <a:rPr sz="940" b="0" i="0">
+              <a:rPr sz="1000" b="0" i="0">
                 <a:solidFill>
                   <a:srgbClr val="172131"/>
                 </a:solidFill>
@@ -29780,11 +33799,11 @@
           <a:p>
             <a:pPr algn="l">
               <a:spcAft>
-                <a:spcPts val="500"/>
-              </a:spcAft>
-            </a:pPr>
-            <a:r>
-              <a:rPr sz="940" b="1" i="0">
+                <a:spcPts val="700"/>
+              </a:spcAft>
+            </a:pPr>
+            <a:r>
+              <a:rPr sz="1000" b="1" i="0">
                 <a:solidFill>
                   <a:srgbClr val="1F5FBF"/>
                 </a:solidFill>
@@ -29793,7 +33812,7 @@
               <a:t>▸ </a:t>
             </a:r>
             <a:r>
-              <a:rPr sz="940" b="0" i="0">
+              <a:rPr sz="1000" b="0" i="0">
                 <a:solidFill>
                   <a:srgbClr val="172131"/>
                 </a:solidFill>
@@ -29805,11 +33824,11 @@
           <a:p>
             <a:pPr algn="l">
               <a:spcAft>
-                <a:spcPts val="500"/>
-              </a:spcAft>
-            </a:pPr>
-            <a:r>
-              <a:rPr sz="940" b="1" i="0">
+                <a:spcPts val="700"/>
+              </a:spcAft>
+            </a:pPr>
+            <a:r>
+              <a:rPr sz="1000" b="1" i="0">
                 <a:solidFill>
                   <a:srgbClr val="1F5FBF"/>
                 </a:solidFill>
@@ -29818,7 +33837,7 @@
               <a:t>▸ </a:t>
             </a:r>
             <a:r>
-              <a:rPr sz="940" b="0" i="0">
+              <a:rPr sz="1000" b="0" i="0">
                 <a:solidFill>
                   <a:srgbClr val="172131"/>
                 </a:solidFill>
@@ -29992,8 +34011,8 @@
         </p:nvSpPr>
         <p:spPr>
           <a:xfrm>
-            <a:off x="9162288" y="3886200"/>
-            <a:ext cx="2633472" cy="1572768"/>
+            <a:off x="9162288" y="3849624"/>
+            <a:ext cx="2633472" cy="1609344"/>
           </a:xfrm>
           <a:prstGeom prst="rect">
             <a:avLst/>
@@ -30008,11 +34027,11 @@
           <a:p>
             <a:pPr algn="l">
               <a:spcAft>
-                <a:spcPts val="500"/>
-              </a:spcAft>
-            </a:pPr>
-            <a:r>
-              <a:rPr sz="940" b="1" i="0">
+                <a:spcPts val="700"/>
+              </a:spcAft>
+            </a:pPr>
+            <a:r>
+              <a:rPr sz="1000" b="1" i="0">
                 <a:solidFill>
                   <a:srgbClr val="C03030"/>
                 </a:solidFill>
@@ -30021,7 +34040,7 @@
               <a:t>▸ </a:t>
             </a:r>
             <a:r>
-              <a:rPr sz="940" b="0" i="0">
+              <a:rPr sz="1000" b="0" i="0">
                 <a:solidFill>
                   <a:srgbClr val="172131"/>
                 </a:solidFill>
@@ -30033,11 +34052,11 @@
           <a:p>
             <a:pPr algn="l">
               <a:spcAft>
-                <a:spcPts val="500"/>
-              </a:spcAft>
-            </a:pPr>
-            <a:r>
-              <a:rPr sz="940" b="1" i="0">
+                <a:spcPts val="700"/>
+              </a:spcAft>
+            </a:pPr>
+            <a:r>
+              <a:rPr sz="1000" b="1" i="0">
                 <a:solidFill>
                   <a:srgbClr val="C03030"/>
                 </a:solidFill>
@@ -30046,7 +34065,7 @@
               <a:t>▸ </a:t>
             </a:r>
             <a:r>
-              <a:rPr sz="940" b="0" i="0">
+              <a:rPr sz="1000" b="0" i="0">
                 <a:solidFill>
                   <a:srgbClr val="172131"/>
                 </a:solidFill>
